--- a/assets/templates/sie_template.pptx
+++ b/assets/templates/sie_template.pptx
@@ -13,6 +13,10 @@
     <p:sldId id="257" r:id="rId4"/>
     <p:sldId id="258" r:id="rId5"/>
     <p:sldId id="16765492" r:id="rId6"/>
+    <p:sldId id="16765493" r:id="rId13"/>
+    <p:sldId id="16765494" r:id="rId14"/>
+    <p:sldId id="16765495" r:id="rId15"/>
+    <p:sldId id="16765496" r:id="rId16"/>
     <p:sldId id="16670705" r:id="rId7"/>
   </p:sldIdLst>
   <p:sldSz cx="12192000" cy="6858000"/>
@@ -11786,7 +11790,33 @@
 </file>
 
 <file path=ppt/slides/slide5.xml><?xml version="1.0" encoding="utf-8"?>
-<p:sld xmlns:a="http://schemas.openxmlformats.org/drawingml/2006/main" xmlns:r="http://schemas.openxmlformats.org/officeDocument/2006/relationships" xmlns:p="http://schemas.openxmlformats.org/presentationml/2006/main">
+<ns0:sld xmlns:ns0="http://schemas.openxmlformats.org/presentationml/2006/main" xmlns:ns1="http://schemas.openxmlformats.org/drawingml/2006/main">
+  <ns0:cSld>
+    <ns0:spTree>
+      <ns0:nvGrpSpPr>
+        <ns0:cNvPr id="1" name=""/>
+        <ns0:cNvGrpSpPr/>
+        <ns0:nvPr/>
+      </ns0:nvGrpSpPr>
+      <ns0:grpSpPr>
+        <ns1:xfrm>
+          <ns1:off x="0" y="0"/>
+          <ns1:ext cx="0" cy="0"/>
+          <ns1:chOff x="0" y="0"/>
+          <ns1:chExt cx="0" cy="0"/>
+        </ns1:xfrm>
+      </ns0:grpSpPr>
+    </ns0:spTree>
+  </ns0:cSld>
+  <ns0:clrMapOvr>
+    <ns1:masterClrMapping/>
+  </ns0:clrMapOvr>
+  <ns0:transition spd="slow"/>
+</ns0:sld>
+</file>
+
+<file path=ppt/slides/slide6.xml><?xml version="1.0" encoding="utf-8"?>
+<p:sld xmlns:a="http://schemas.openxmlformats.org/drawingml/2006/main" xmlns:p="http://schemas.openxmlformats.org/presentationml/2006/main" xmlns:r="http://schemas.openxmlformats.org/officeDocument/2006/relationships">
   <p:cSld>
     <p:spTree>
       <p:nvGrpSpPr>
@@ -11794,20 +11824,7666 @@
         <p:cNvGrpSpPr/>
         <p:nvPr/>
       </p:nvGrpSpPr>
-      <p:grpSpPr>
-        <a:xfrm>
-          <a:off x="0" y="0"/>
-          <a:ext cx="0" cy="0"/>
-          <a:chOff x="0" y="0"/>
-          <a:chExt cx="0" cy="0"/>
-        </a:xfrm>
-      </p:grpSpPr>
+      <p:grpSpPr/>
+      <p:sp>
+        <p:nvSpPr>
+          <p:cNvPr id="65" name="矩形 64"/>
+          <p:cNvSpPr/>
+          <p:nvPr/>
+        </p:nvSpPr>
+        <p:spPr>
+          <a:xfrm>
+            <a:off x="0" y="0"/>
+            <a:ext cx="3173449" cy="6858000"/>
+          </a:xfrm>
+          <a:prstGeom prst="rect">
+            <a:avLst/>
+          </a:prstGeom>
+          <a:solidFill>
+            <a:srgbClr val="8EA2A9"/>
+          </a:solidFill>
+          <a:ln w="12700" cap="flat" cmpd="sng" algn="ctr">
+            <a:noFill/>
+            <a:prstDash val="solid"/>
+            <a:miter lim="800000"/>
+          </a:ln>
+          <a:effectLst/>
+        </p:spPr>
+        <p:txBody>
+          <a:bodyPr rtlCol="0" anchor="ctr"/>
+          <a:lstStyle/>
+          <a:p>
+            <a:pPr marL="0" marR="0" lvl="0" indent="0" algn="ctr" defTabSz="914400" eaLnBrk="1" fontAlgn="auto" latinLnBrk="0" hangingPunct="1">
+              <a:lnSpc>
+                <a:spcPct val="100000"/>
+              </a:lnSpc>
+              <a:spcBef>
+                <a:spcPts val="0"/>
+              </a:spcBef>
+              <a:spcAft>
+                <a:spcPts val="0"/>
+              </a:spcAft>
+              <a:buClrTx/>
+              <a:buSzTx/>
+              <a:buFontTx/>
+              <a:buNone/>
+              <a:defRPr/>
+            </a:pPr>
+            <a:endParaRPr kumimoji="0" lang="zh-CN" altLang="en-US" sz="1800" b="0" i="0" u="none" strike="noStrike" kern="0" cap="none" spc="0" normalizeH="0" baseline="0" noProof="0">
+              <a:ln>
+                <a:noFill/>
+              </a:ln>
+              <a:solidFill>
+                <a:srgbClr val="FFFFFF"/>
+              </a:solidFill>
+              <a:effectLst/>
+              <a:uLnTx/>
+              <a:uFillTx/>
+              <a:latin typeface="Arial" panose="020B0604020202020204"/>
+              <a:ea typeface="微软雅黑" panose="020B0503020204020204" pitchFamily="34" charset="-122"/>
+              <a:cs typeface="+mn-cs"/>
+            </a:endParaRPr>
+          </a:p>
+        </p:txBody>
+      </p:sp>
+      <p:sp>
+        <p:nvSpPr>
+          <p:cNvPr id="66" name="文本框 65"/>
+          <p:cNvSpPr txBox="1"/>
+          <p:nvPr/>
+        </p:nvSpPr>
+        <p:spPr>
+          <a:xfrm>
+            <a:off x="630515" y="606355"/>
+            <a:ext cx="1334442" cy="728661"/>
+          </a:xfrm>
+          <a:prstGeom prst="rect">
+            <a:avLst/>
+          </a:prstGeom>
+          <a:noFill/>
+        </p:spPr>
+        <p:txBody>
+          <a:bodyPr wrap="square">
+            <a:spAutoFit/>
+          </a:bodyPr>
+          <a:lstStyle/>
+          <a:p>
+            <a:pPr>
+              <a:lnSpc>
+                <a:spcPct val="110000"/>
+              </a:lnSpc>
+            </a:pPr>
+            <a:r>
+              <a:rPr lang="zh-CN" altLang="en-US" sz="4000" spc="100" dirty="0">
+                <a:solidFill>
+                  <a:srgbClr val="FFFFFF"/>
+                </a:solidFill>
+                <a:latin typeface="Arial" panose="020B0604020202020204"/>
+                <a:ea typeface="微软雅黑" panose="020B0503020204020204" pitchFamily="34" charset="-122"/>
+              </a:rPr>
+              <a:t>目录</a:t>
+            </a:r>
+            <a:endParaRPr lang="en-US" altLang="zh-CN" sz="4000" spc="100" dirty="0">
+              <a:solidFill>
+                <a:srgbClr val="FFFFFF"/>
+              </a:solidFill>
+              <a:latin typeface="Arial" panose="020B0604020202020204"/>
+              <a:ea typeface="微软雅黑" panose="020B0503020204020204" pitchFamily="34" charset="-122"/>
+            </a:endParaRPr>
+          </a:p>
+        </p:txBody>
+      </p:sp>
+      <p:sp>
+        <p:nvSpPr>
+          <p:cNvPr id="67" name="文本框 66"/>
+          <p:cNvSpPr txBox="1"/>
+          <p:nvPr/>
+        </p:nvSpPr>
+        <p:spPr>
+          <a:xfrm>
+            <a:off x="720140" y="1273953"/>
+            <a:ext cx="2029767" cy="378693"/>
+          </a:xfrm>
+          <a:prstGeom prst="rect">
+            <a:avLst/>
+          </a:prstGeom>
+          <a:noFill/>
+        </p:spPr>
+        <p:txBody>
+          <a:bodyPr wrap="square">
+            <a:spAutoFit/>
+          </a:bodyPr>
+          <a:lstStyle/>
+          <a:p>
+            <a:pPr>
+              <a:lnSpc>
+                <a:spcPct val="110000"/>
+              </a:lnSpc>
+            </a:pPr>
+            <a:r>
+              <a:rPr lang="en-US" altLang="zh-CN" spc="100" dirty="0">
+                <a:solidFill>
+                  <a:srgbClr val="FFFFFF"/>
+                </a:solidFill>
+                <a:latin typeface="Arial" panose="020B0604020202020204"/>
+                <a:ea typeface="微软雅黑" panose="020B0503020204020204" pitchFamily="34" charset="-122"/>
+              </a:rPr>
+              <a:t>Content</a:t>
+            </a:r>
+          </a:p>
+        </p:txBody>
+      </p:sp>
+      <p:cxnSp>
+        <p:nvCxnSpPr>
+          <p:cNvPr id="68" name="直接连接符 67"/>
+          <p:cNvCxnSpPr/>
+          <p:nvPr/>
+        </p:nvCxnSpPr>
+        <p:spPr>
+          <a:xfrm>
+            <a:off x="10827696" y="5646150"/>
+            <a:ext cx="0" cy="335775"/>
+          </a:xfrm>
+          <a:prstGeom prst="line">
+            <a:avLst/>
+          </a:prstGeom>
+          <a:noFill/>
+          <a:ln w="38100" cap="rnd" cmpd="sng" algn="ctr">
+            <a:gradFill flip="none" rotWithShape="1">
+              <a:gsLst>
+                <a:gs pos="0">
+                  <a:srgbClr val="8EA2A9">
+                    <a:alpha val="0"/>
+                  </a:srgbClr>
+                </a:gs>
+                <a:gs pos="100000">
+                  <a:srgbClr val="8EA2A9"/>
+                </a:gs>
+              </a:gsLst>
+              <a:lin ang="16200000" scaled="1"/>
+              <a:tileRect/>
+            </a:gradFill>
+            <a:prstDash val="solid"/>
+            <a:round/>
+          </a:ln>
+          <a:effectLst/>
+        </p:spPr>
+      </p:cxnSp>
+      <p:sp>
+        <p:nvSpPr>
+          <p:cNvPr id="69" name="椭圆 68"/>
+          <p:cNvSpPr/>
+          <p:nvPr/>
+        </p:nvSpPr>
+        <p:spPr>
+          <a:xfrm>
+            <a:off x="11252343" y="5706115"/>
+            <a:ext cx="72000" cy="72000"/>
+          </a:xfrm>
+          <a:prstGeom prst="ellipse">
+            <a:avLst/>
+          </a:prstGeom>
+          <a:solidFill>
+            <a:srgbClr val="AD053D"/>
+          </a:solidFill>
+          <a:ln w="12700" cap="flat" cmpd="sng" algn="ctr">
+            <a:noFill/>
+            <a:prstDash val="solid"/>
+            <a:miter lim="800000"/>
+          </a:ln>
+          <a:effectLst/>
+        </p:spPr>
+        <p:txBody>
+          <a:bodyPr rtlCol="0" anchor="ctr"/>
+          <a:lstStyle/>
+          <a:p>
+            <a:pPr marL="0" marR="0" lvl="0" indent="0" algn="ctr" defTabSz="914400" eaLnBrk="1" fontAlgn="auto" latinLnBrk="0" hangingPunct="1">
+              <a:lnSpc>
+                <a:spcPct val="100000"/>
+              </a:lnSpc>
+              <a:spcBef>
+                <a:spcPts val="0"/>
+              </a:spcBef>
+              <a:spcAft>
+                <a:spcPts val="0"/>
+              </a:spcAft>
+              <a:buClrTx/>
+              <a:buSzTx/>
+              <a:buFontTx/>
+              <a:buNone/>
+              <a:defRPr/>
+            </a:pPr>
+            <a:endParaRPr kumimoji="0" lang="zh-CN" altLang="en-US" sz="1800" b="0" i="0" u="none" strike="noStrike" kern="0" cap="none" spc="0" normalizeH="0" baseline="0" noProof="0">
+              <a:ln>
+                <a:noFill/>
+              </a:ln>
+              <a:solidFill>
+                <a:srgbClr val="FFFFFF"/>
+              </a:solidFill>
+              <a:effectLst/>
+              <a:uLnTx/>
+              <a:uFillTx/>
+              <a:latin typeface="Arial" panose="020B0604020202020204"/>
+              <a:ea typeface="微软雅黑" panose="020B0503020204020204" pitchFamily="34" charset="-122"/>
+              <a:cs typeface="+mn-cs"/>
+            </a:endParaRPr>
+          </a:p>
+        </p:txBody>
+      </p:sp>
+      <p:sp>
+        <p:nvSpPr>
+          <p:cNvPr id="70" name="椭圆 69"/>
+          <p:cNvSpPr/>
+          <p:nvPr/>
+        </p:nvSpPr>
+        <p:spPr>
+          <a:xfrm>
+            <a:off x="10623061" y="5866482"/>
+            <a:ext cx="36000" cy="36000"/>
+          </a:xfrm>
+          <a:prstGeom prst="ellipse">
+            <a:avLst/>
+          </a:prstGeom>
+          <a:solidFill>
+            <a:srgbClr val="AD053D"/>
+          </a:solidFill>
+          <a:ln w="12700" cap="flat" cmpd="sng" algn="ctr">
+            <a:noFill/>
+            <a:prstDash val="solid"/>
+            <a:miter lim="800000"/>
+          </a:ln>
+          <a:effectLst/>
+        </p:spPr>
+        <p:txBody>
+          <a:bodyPr rtlCol="0" anchor="ctr"/>
+          <a:lstStyle/>
+          <a:p>
+            <a:pPr marL="0" marR="0" lvl="0" indent="0" algn="ctr" defTabSz="914400" eaLnBrk="1" fontAlgn="auto" latinLnBrk="0" hangingPunct="1">
+              <a:lnSpc>
+                <a:spcPct val="100000"/>
+              </a:lnSpc>
+              <a:spcBef>
+                <a:spcPts val="0"/>
+              </a:spcBef>
+              <a:spcAft>
+                <a:spcPts val="0"/>
+              </a:spcAft>
+              <a:buClrTx/>
+              <a:buSzTx/>
+              <a:buFontTx/>
+              <a:buNone/>
+              <a:defRPr/>
+            </a:pPr>
+            <a:endParaRPr kumimoji="0" lang="zh-CN" altLang="en-US" sz="1800" b="0" i="0" u="none" strike="noStrike" kern="0" cap="none" spc="0" normalizeH="0" baseline="0" noProof="0">
+              <a:ln>
+                <a:noFill/>
+              </a:ln>
+              <a:solidFill>
+                <a:srgbClr val="FFFFFF"/>
+              </a:solidFill>
+              <a:effectLst/>
+              <a:uLnTx/>
+              <a:uFillTx/>
+              <a:latin typeface="Arial" panose="020B0604020202020204"/>
+              <a:ea typeface="微软雅黑" panose="020B0503020204020204" pitchFamily="34" charset="-122"/>
+              <a:cs typeface="+mn-cs"/>
+            </a:endParaRPr>
+          </a:p>
+        </p:txBody>
+      </p:sp>
+      <p:grpSp>
+        <p:nvGrpSpPr>
+          <p:cNvPr id="71" name="组合 70"/>
+          <p:cNvGrpSpPr/>
+          <p:nvPr/>
+        </p:nvGrpSpPr>
+        <p:grpSpPr>
+          <a:xfrm>
+            <a:off x="10803102" y="4768117"/>
+            <a:ext cx="894951" cy="2153732"/>
+            <a:chOff x="7932383" y="1237483"/>
+            <a:chExt cx="1656167" cy="3985627"/>
+          </a:xfrm>
+        </p:grpSpPr>
+        <p:grpSp>
+          <p:nvGrpSpPr>
+            <p:cNvPr id="72" name="组合 71"/>
+            <p:cNvGrpSpPr/>
+            <p:nvPr/>
+          </p:nvGrpSpPr>
+          <p:grpSpPr>
+            <a:xfrm>
+              <a:off x="7932383" y="1237483"/>
+              <a:ext cx="1656167" cy="3985627"/>
+              <a:chOff x="8854316" y="1476349"/>
+              <a:chExt cx="1656167" cy="3985627"/>
+            </a:xfrm>
+          </p:grpSpPr>
+          <p:sp>
+            <p:nvSpPr>
+              <p:cNvPr id="77" name="六边形 76"/>
+              <p:cNvSpPr/>
+              <p:nvPr/>
+            </p:nvSpPr>
+            <p:spPr>
+              <a:xfrm rot="5400000">
+                <a:off x="7705005" y="2689240"/>
+                <a:ext cx="3952238" cy="1593233"/>
+              </a:xfrm>
+              <a:prstGeom prst="hexagon">
+                <a:avLst>
+                  <a:gd name="adj" fmla="val 20346"/>
+                  <a:gd name="vf" fmla="val 115470"/>
+                </a:avLst>
+              </a:prstGeom>
+              <a:gradFill flip="none" rotWithShape="1">
+                <a:gsLst>
+                  <a:gs pos="3000">
+                    <a:srgbClr val="AD053D">
+                      <a:alpha val="0"/>
+                    </a:srgbClr>
+                  </a:gs>
+                  <a:gs pos="100000">
+                    <a:srgbClr val="AD053D">
+                      <a:alpha val="13000"/>
+                    </a:srgbClr>
+                  </a:gs>
+                </a:gsLst>
+                <a:lin ang="10800000" scaled="1"/>
+                <a:tileRect/>
+              </a:gradFill>
+              <a:ln w="12700" cap="flat" cmpd="sng" algn="ctr">
+                <a:gradFill flip="none" rotWithShape="1">
+                  <a:gsLst>
+                    <a:gs pos="0">
+                      <a:srgbClr val="AD053D">
+                        <a:alpha val="0"/>
+                      </a:srgbClr>
+                    </a:gs>
+                    <a:gs pos="100000">
+                      <a:srgbClr val="AD053D">
+                        <a:alpha val="55000"/>
+                      </a:srgbClr>
+                    </a:gs>
+                  </a:gsLst>
+                  <a:lin ang="10800000" scaled="1"/>
+                  <a:tileRect/>
+                </a:gradFill>
+                <a:prstDash val="solid"/>
+                <a:miter lim="800000"/>
+              </a:ln>
+              <a:effectLst/>
+            </p:spPr>
+            <p:txBody>
+              <a:bodyPr rtlCol="0" anchor="ctr"/>
+              <a:lstStyle/>
+              <a:p>
+                <a:pPr marL="0" marR="0" lvl="0" indent="0" algn="ctr" defTabSz="914400" eaLnBrk="1" fontAlgn="auto" latinLnBrk="0" hangingPunct="1">
+                  <a:lnSpc>
+                    <a:spcPct val="100000"/>
+                  </a:lnSpc>
+                  <a:spcBef>
+                    <a:spcPts val="0"/>
+                  </a:spcBef>
+                  <a:spcAft>
+                    <a:spcPts val="0"/>
+                  </a:spcAft>
+                  <a:buClrTx/>
+                  <a:buSzTx/>
+                  <a:buFontTx/>
+                  <a:buNone/>
+                  <a:defRPr/>
+                </a:pPr>
+                <a:endParaRPr kumimoji="0" lang="zh-CN" altLang="en-US" sz="1800" b="0" i="0" u="none" strike="noStrike" kern="0" cap="none" spc="0" normalizeH="0" baseline="0" noProof="0" dirty="0">
+                  <a:ln>
+                    <a:noFill/>
+                  </a:ln>
+                  <a:solidFill>
+                    <a:srgbClr val="FFFFFF"/>
+                  </a:solidFill>
+                  <a:effectLst/>
+                  <a:uLnTx/>
+                  <a:uFillTx/>
+                  <a:latin typeface="Arial" panose="020B0604020202020204"/>
+                  <a:ea typeface="微软雅黑" panose="020B0503020204020204" pitchFamily="34" charset="-122"/>
+                  <a:cs typeface="+mn-cs"/>
+                </a:endParaRPr>
+              </a:p>
+            </p:txBody>
+          </p:sp>
+          <p:sp>
+            <p:nvSpPr>
+              <p:cNvPr id="78" name="椭圆 77"/>
+              <p:cNvSpPr/>
+              <p:nvPr/>
+            </p:nvSpPr>
+            <p:spPr>
+              <a:xfrm>
+                <a:off x="9641624" y="1476349"/>
+                <a:ext cx="72000" cy="72000"/>
+              </a:xfrm>
+              <a:prstGeom prst="ellipse">
+                <a:avLst/>
+              </a:prstGeom>
+              <a:solidFill>
+                <a:srgbClr val="AD053D"/>
+              </a:solidFill>
+              <a:ln w="12700" cap="flat" cmpd="sng" algn="ctr">
+                <a:noFill/>
+                <a:prstDash val="solid"/>
+                <a:miter lim="800000"/>
+              </a:ln>
+              <a:effectLst/>
+            </p:spPr>
+            <p:txBody>
+              <a:bodyPr rtlCol="0" anchor="ctr"/>
+              <a:lstStyle/>
+              <a:p>
+                <a:pPr marL="0" marR="0" lvl="0" indent="0" algn="ctr" defTabSz="914400" eaLnBrk="1" fontAlgn="auto" latinLnBrk="0" hangingPunct="1">
+                  <a:lnSpc>
+                    <a:spcPct val="100000"/>
+                  </a:lnSpc>
+                  <a:spcBef>
+                    <a:spcPts val="0"/>
+                  </a:spcBef>
+                  <a:spcAft>
+                    <a:spcPts val="0"/>
+                  </a:spcAft>
+                  <a:buClrTx/>
+                  <a:buSzTx/>
+                  <a:buFontTx/>
+                  <a:buNone/>
+                  <a:defRPr/>
+                </a:pPr>
+                <a:endParaRPr kumimoji="0" lang="zh-CN" altLang="en-US" sz="1800" b="0" i="0" u="none" strike="noStrike" kern="0" cap="none" spc="0" normalizeH="0" baseline="0" noProof="0">
+                  <a:ln>
+                    <a:noFill/>
+                  </a:ln>
+                  <a:solidFill>
+                    <a:srgbClr val="FFFFFF"/>
+                  </a:solidFill>
+                  <a:effectLst/>
+                  <a:uLnTx/>
+                  <a:uFillTx/>
+                  <a:latin typeface="Arial" panose="020B0604020202020204"/>
+                  <a:ea typeface="微软雅黑" panose="020B0503020204020204" pitchFamily="34" charset="-122"/>
+                  <a:cs typeface="+mn-cs"/>
+                </a:endParaRPr>
+              </a:p>
+            </p:txBody>
+          </p:sp>
+          <p:sp>
+            <p:nvSpPr>
+              <p:cNvPr id="79" name="椭圆 78"/>
+              <p:cNvSpPr/>
+              <p:nvPr/>
+            </p:nvSpPr>
+            <p:spPr>
+              <a:xfrm>
+                <a:off x="8854316" y="1808324"/>
+                <a:ext cx="72000" cy="72000"/>
+              </a:xfrm>
+              <a:prstGeom prst="ellipse">
+                <a:avLst/>
+              </a:prstGeom>
+              <a:solidFill>
+                <a:srgbClr val="AD053D"/>
+              </a:solidFill>
+              <a:ln w="12700" cap="flat" cmpd="sng" algn="ctr">
+                <a:noFill/>
+                <a:prstDash val="solid"/>
+                <a:miter lim="800000"/>
+              </a:ln>
+              <a:effectLst/>
+            </p:spPr>
+            <p:txBody>
+              <a:bodyPr rtlCol="0" anchor="ctr"/>
+              <a:lstStyle/>
+              <a:p>
+                <a:pPr marL="0" marR="0" lvl="0" indent="0" algn="ctr" defTabSz="914400" eaLnBrk="1" fontAlgn="auto" latinLnBrk="0" hangingPunct="1">
+                  <a:lnSpc>
+                    <a:spcPct val="100000"/>
+                  </a:lnSpc>
+                  <a:spcBef>
+                    <a:spcPts val="0"/>
+                  </a:spcBef>
+                  <a:spcAft>
+                    <a:spcPts val="0"/>
+                  </a:spcAft>
+                  <a:buClrTx/>
+                  <a:buSzTx/>
+                  <a:buFontTx/>
+                  <a:buNone/>
+                  <a:defRPr/>
+                </a:pPr>
+                <a:endParaRPr kumimoji="0" lang="zh-CN" altLang="en-US" sz="1800" b="0" i="0" u="none" strike="noStrike" kern="0" cap="none" spc="0" normalizeH="0" baseline="0" noProof="0">
+                  <a:ln>
+                    <a:noFill/>
+                  </a:ln>
+                  <a:solidFill>
+                    <a:srgbClr val="FFFFFF"/>
+                  </a:solidFill>
+                  <a:effectLst/>
+                  <a:uLnTx/>
+                  <a:uFillTx/>
+                  <a:latin typeface="Arial" panose="020B0604020202020204"/>
+                  <a:ea typeface="微软雅黑" panose="020B0503020204020204" pitchFamily="34" charset="-122"/>
+                  <a:cs typeface="+mn-cs"/>
+                </a:endParaRPr>
+              </a:p>
+            </p:txBody>
+          </p:sp>
+          <p:sp>
+            <p:nvSpPr>
+              <p:cNvPr id="80" name="椭圆 79"/>
+              <p:cNvSpPr/>
+              <p:nvPr/>
+            </p:nvSpPr>
+            <p:spPr>
+              <a:xfrm>
+                <a:off x="10438483" y="1806315"/>
+                <a:ext cx="72000" cy="72000"/>
+              </a:xfrm>
+              <a:prstGeom prst="ellipse">
+                <a:avLst/>
+              </a:prstGeom>
+              <a:solidFill>
+                <a:srgbClr val="AD053D"/>
+              </a:solidFill>
+              <a:ln w="12700" cap="flat" cmpd="sng" algn="ctr">
+                <a:noFill/>
+                <a:prstDash val="solid"/>
+                <a:miter lim="800000"/>
+              </a:ln>
+              <a:effectLst/>
+            </p:spPr>
+            <p:txBody>
+              <a:bodyPr rtlCol="0" anchor="ctr"/>
+              <a:lstStyle/>
+              <a:p>
+                <a:pPr marL="0" marR="0" lvl="0" indent="0" algn="ctr" defTabSz="914400" eaLnBrk="1" fontAlgn="auto" latinLnBrk="0" hangingPunct="1">
+                  <a:lnSpc>
+                    <a:spcPct val="100000"/>
+                  </a:lnSpc>
+                  <a:spcBef>
+                    <a:spcPts val="0"/>
+                  </a:spcBef>
+                  <a:spcAft>
+                    <a:spcPts val="0"/>
+                  </a:spcAft>
+                  <a:buClrTx/>
+                  <a:buSzTx/>
+                  <a:buFontTx/>
+                  <a:buNone/>
+                  <a:defRPr/>
+                </a:pPr>
+                <a:endParaRPr kumimoji="0" lang="zh-CN" altLang="en-US" sz="1800" b="0" i="0" u="none" strike="noStrike" kern="0" cap="none" spc="0" normalizeH="0" baseline="0" noProof="0">
+                  <a:ln>
+                    <a:noFill/>
+                  </a:ln>
+                  <a:solidFill>
+                    <a:srgbClr val="FFFFFF"/>
+                  </a:solidFill>
+                  <a:effectLst/>
+                  <a:uLnTx/>
+                  <a:uFillTx/>
+                  <a:latin typeface="Arial" panose="020B0604020202020204"/>
+                  <a:ea typeface="微软雅黑" panose="020B0503020204020204" pitchFamily="34" charset="-122"/>
+                  <a:cs typeface="+mn-cs"/>
+                </a:endParaRPr>
+              </a:p>
+            </p:txBody>
+          </p:sp>
+        </p:grpSp>
+        <p:grpSp>
+          <p:nvGrpSpPr>
+            <p:cNvPr id="73" name="组合 72"/>
+            <p:cNvGrpSpPr/>
+            <p:nvPr/>
+          </p:nvGrpSpPr>
+          <p:grpSpPr>
+            <a:xfrm>
+              <a:off x="8133347" y="1502482"/>
+              <a:ext cx="1250009" cy="3670942"/>
+              <a:chOff x="9680544" y="2138994"/>
+              <a:chExt cx="1250009" cy="3670942"/>
+            </a:xfrm>
+          </p:grpSpPr>
+          <p:sp>
+            <p:nvSpPr>
+              <p:cNvPr id="74" name="矩形 73"/>
+              <p:cNvSpPr/>
+              <p:nvPr/>
+            </p:nvSpPr>
+            <p:spPr>
+              <a:xfrm>
+                <a:off x="9680800" y="2399981"/>
+                <a:ext cx="625794" cy="3409955"/>
+              </a:xfrm>
+              <a:prstGeom prst="rect">
+                <a:avLst/>
+              </a:prstGeom>
+              <a:gradFill flip="none" rotWithShape="1">
+                <a:gsLst>
+                  <a:gs pos="24000">
+                    <a:srgbClr val="AD053D">
+                      <a:alpha val="0"/>
+                    </a:srgbClr>
+                  </a:gs>
+                  <a:gs pos="76000">
+                    <a:srgbClr val="AD053D"/>
+                  </a:gs>
+                </a:gsLst>
+                <a:lin ang="16200000" scaled="1"/>
+                <a:tileRect/>
+              </a:gradFill>
+              <a:ln w="12700" cap="flat" cmpd="sng" algn="ctr">
+                <a:noFill/>
+                <a:prstDash val="solid"/>
+                <a:miter lim="800000"/>
+              </a:ln>
+              <a:effectLst/>
+            </p:spPr>
+            <p:txBody>
+              <a:bodyPr rtlCol="0" anchor="ctr"/>
+              <a:lstStyle/>
+              <a:p>
+                <a:pPr marL="0" marR="0" lvl="0" indent="0" algn="ctr" defTabSz="914400" eaLnBrk="1" fontAlgn="auto" latinLnBrk="0" hangingPunct="1">
+                  <a:lnSpc>
+                    <a:spcPct val="100000"/>
+                  </a:lnSpc>
+                  <a:spcBef>
+                    <a:spcPts val="0"/>
+                  </a:spcBef>
+                  <a:spcAft>
+                    <a:spcPts val="0"/>
+                  </a:spcAft>
+                  <a:buClrTx/>
+                  <a:buSzTx/>
+                  <a:buFontTx/>
+                  <a:buNone/>
+                  <a:defRPr/>
+                </a:pPr>
+                <a:endParaRPr kumimoji="0" lang="zh-CN" altLang="en-US" sz="1800" b="0" i="0" u="none" strike="noStrike" kern="0" cap="none" spc="0" normalizeH="0" baseline="0" noProof="0" dirty="0">
+                  <a:ln>
+                    <a:noFill/>
+                  </a:ln>
+                  <a:solidFill>
+                    <a:srgbClr val="FFFFFF"/>
+                  </a:solidFill>
+                  <a:effectLst/>
+                  <a:uLnTx/>
+                  <a:uFillTx/>
+                  <a:latin typeface="Arial" panose="020B0604020202020204"/>
+                  <a:ea typeface="微软雅黑" panose="020B0503020204020204" pitchFamily="34" charset="-122"/>
+                  <a:cs typeface="+mn-cs"/>
+                </a:endParaRPr>
+              </a:p>
+            </p:txBody>
+          </p:sp>
+          <p:sp>
+            <p:nvSpPr>
+              <p:cNvPr id="75" name="矩形 74"/>
+              <p:cNvSpPr/>
+              <p:nvPr/>
+            </p:nvSpPr>
+            <p:spPr>
+              <a:xfrm>
+                <a:off x="10297986" y="2399981"/>
+                <a:ext cx="625794" cy="3409955"/>
+              </a:xfrm>
+              <a:prstGeom prst="rect">
+                <a:avLst/>
+              </a:prstGeom>
+              <a:gradFill flip="none" rotWithShape="1">
+                <a:gsLst>
+                  <a:gs pos="23000">
+                    <a:srgbClr val="EE004A">
+                      <a:alpha val="0"/>
+                    </a:srgbClr>
+                  </a:gs>
+                  <a:gs pos="63000">
+                    <a:srgbClr val="EE004A"/>
+                  </a:gs>
+                </a:gsLst>
+                <a:lin ang="16200000" scaled="1"/>
+                <a:tileRect/>
+              </a:gradFill>
+              <a:ln w="12700" cap="flat" cmpd="sng" algn="ctr">
+                <a:noFill/>
+                <a:prstDash val="solid"/>
+                <a:miter lim="800000"/>
+              </a:ln>
+              <a:effectLst/>
+            </p:spPr>
+            <p:txBody>
+              <a:bodyPr rtlCol="0" anchor="ctr"/>
+              <a:lstStyle/>
+              <a:p>
+                <a:pPr marL="0" marR="0" lvl="0" indent="0" algn="ctr" defTabSz="914400" eaLnBrk="1" fontAlgn="auto" latinLnBrk="0" hangingPunct="1">
+                  <a:lnSpc>
+                    <a:spcPct val="100000"/>
+                  </a:lnSpc>
+                  <a:spcBef>
+                    <a:spcPts val="0"/>
+                  </a:spcBef>
+                  <a:spcAft>
+                    <a:spcPts val="0"/>
+                  </a:spcAft>
+                  <a:buClrTx/>
+                  <a:buSzTx/>
+                  <a:buFontTx/>
+                  <a:buNone/>
+                  <a:defRPr/>
+                </a:pPr>
+                <a:endParaRPr kumimoji="0" lang="zh-CN" altLang="en-US" sz="1800" b="0" i="0" u="none" strike="noStrike" kern="0" cap="none" spc="0" normalizeH="0" baseline="0" noProof="0">
+                  <a:ln>
+                    <a:noFill/>
+                  </a:ln>
+                  <a:solidFill>
+                    <a:srgbClr val="FFFFFF"/>
+                  </a:solidFill>
+                  <a:effectLst/>
+                  <a:uLnTx/>
+                  <a:uFillTx/>
+                  <a:latin typeface="Arial" panose="020B0604020202020204"/>
+                  <a:ea typeface="微软雅黑" panose="020B0503020204020204" pitchFamily="34" charset="-122"/>
+                  <a:cs typeface="+mn-cs"/>
+                </a:endParaRPr>
+              </a:p>
+            </p:txBody>
+          </p:sp>
+          <p:sp>
+            <p:nvSpPr>
+              <p:cNvPr id="76" name="菱形 75"/>
+              <p:cNvSpPr/>
+              <p:nvPr/>
+            </p:nvSpPr>
+            <p:spPr>
+              <a:xfrm>
+                <a:off x="9680544" y="2138994"/>
+                <a:ext cx="1250009" cy="521116"/>
+              </a:xfrm>
+              <a:prstGeom prst="diamond">
+                <a:avLst/>
+              </a:prstGeom>
+              <a:gradFill flip="none" rotWithShape="1">
+                <a:gsLst>
+                  <a:gs pos="0">
+                    <a:srgbClr val="AD053D"/>
+                  </a:gs>
+                  <a:gs pos="100000">
+                    <a:srgbClr val="EE004A"/>
+                  </a:gs>
+                </a:gsLst>
+                <a:lin ang="10800000" scaled="1"/>
+                <a:tileRect/>
+              </a:gradFill>
+              <a:ln w="12700" cap="flat" cmpd="sng" algn="ctr">
+                <a:noFill/>
+                <a:prstDash val="solid"/>
+                <a:miter lim="800000"/>
+              </a:ln>
+              <a:effectLst/>
+            </p:spPr>
+            <p:txBody>
+              <a:bodyPr rtlCol="0" anchor="ctr"/>
+              <a:lstStyle/>
+              <a:p>
+                <a:pPr marL="0" marR="0" lvl="0" indent="0" algn="ctr" defTabSz="914400" eaLnBrk="1" fontAlgn="auto" latinLnBrk="0" hangingPunct="1">
+                  <a:lnSpc>
+                    <a:spcPct val="100000"/>
+                  </a:lnSpc>
+                  <a:spcBef>
+                    <a:spcPts val="0"/>
+                  </a:spcBef>
+                  <a:spcAft>
+                    <a:spcPts val="0"/>
+                  </a:spcAft>
+                  <a:buClrTx/>
+                  <a:buSzTx/>
+                  <a:buFontTx/>
+                  <a:buNone/>
+                  <a:defRPr/>
+                </a:pPr>
+                <a:endParaRPr kumimoji="0" lang="zh-CN" altLang="en-US" sz="1800" b="0" i="0" u="none" strike="noStrike" kern="0" cap="none" spc="0" normalizeH="0" baseline="0" noProof="0">
+                  <a:ln>
+                    <a:noFill/>
+                  </a:ln>
+                  <a:solidFill>
+                    <a:srgbClr val="FFFFFF"/>
+                  </a:solidFill>
+                  <a:effectLst/>
+                  <a:uLnTx/>
+                  <a:uFillTx/>
+                  <a:latin typeface="Arial" panose="020B0604020202020204"/>
+                  <a:ea typeface="微软雅黑" panose="020B0503020204020204" pitchFamily="34" charset="-122"/>
+                  <a:cs typeface="+mn-cs"/>
+                </a:endParaRPr>
+              </a:p>
+            </p:txBody>
+          </p:sp>
+        </p:grpSp>
+      </p:grpSp>
+      <p:grpSp>
+        <p:nvGrpSpPr>
+          <p:cNvPr id="81" name="组合 80"/>
+          <p:cNvGrpSpPr/>
+          <p:nvPr/>
+        </p:nvGrpSpPr>
+        <p:grpSpPr>
+          <a:xfrm>
+            <a:off x="10340196" y="5573612"/>
+            <a:ext cx="754426" cy="1361660"/>
+            <a:chOff x="7860291" y="7394087"/>
+            <a:chExt cx="1110550" cy="2004428"/>
+          </a:xfrm>
+        </p:grpSpPr>
+        <p:grpSp>
+          <p:nvGrpSpPr>
+            <p:cNvPr id="82" name="组合 81"/>
+            <p:cNvGrpSpPr/>
+            <p:nvPr/>
+          </p:nvGrpSpPr>
+          <p:grpSpPr>
+            <a:xfrm>
+              <a:off x="7860291" y="7394087"/>
+              <a:ext cx="1110550" cy="2004428"/>
+              <a:chOff x="8854316" y="1476349"/>
+              <a:chExt cx="1656165" cy="2989207"/>
+            </a:xfrm>
+          </p:grpSpPr>
+          <p:sp>
+            <p:nvSpPr>
+              <p:cNvPr id="87" name="六边形 86"/>
+              <p:cNvSpPr/>
+              <p:nvPr/>
+            </p:nvSpPr>
+            <p:spPr>
+              <a:xfrm rot="5400000">
+                <a:off x="8203213" y="2191032"/>
+                <a:ext cx="2955817" cy="1593232"/>
+              </a:xfrm>
+              <a:prstGeom prst="hexagon">
+                <a:avLst>
+                  <a:gd name="adj" fmla="val 20346"/>
+                  <a:gd name="vf" fmla="val 115470"/>
+                </a:avLst>
+              </a:prstGeom>
+              <a:gradFill flip="none" rotWithShape="1">
+                <a:gsLst>
+                  <a:gs pos="0">
+                    <a:srgbClr val="8EA2A9">
+                      <a:alpha val="0"/>
+                    </a:srgbClr>
+                  </a:gs>
+                  <a:gs pos="100000">
+                    <a:srgbClr val="8EA2A9">
+                      <a:alpha val="13000"/>
+                    </a:srgbClr>
+                  </a:gs>
+                </a:gsLst>
+                <a:lin ang="10800000" scaled="1"/>
+                <a:tileRect/>
+              </a:gradFill>
+              <a:ln w="12700" cap="flat" cmpd="sng" algn="ctr">
+                <a:gradFill flip="none" rotWithShape="1">
+                  <a:gsLst>
+                    <a:gs pos="0">
+                      <a:srgbClr val="8EA2A9">
+                        <a:alpha val="0"/>
+                      </a:srgbClr>
+                    </a:gs>
+                    <a:gs pos="100000">
+                      <a:srgbClr val="8EA2A9"/>
+                    </a:gs>
+                  </a:gsLst>
+                  <a:lin ang="10800000" scaled="1"/>
+                  <a:tileRect/>
+                </a:gradFill>
+                <a:prstDash val="solid"/>
+                <a:miter lim="800000"/>
+              </a:ln>
+              <a:effectLst/>
+            </p:spPr>
+            <p:txBody>
+              <a:bodyPr rtlCol="0" anchor="ctr"/>
+              <a:lstStyle/>
+              <a:p>
+                <a:pPr marL="0" marR="0" lvl="0" indent="0" algn="ctr" defTabSz="914400" eaLnBrk="1" fontAlgn="auto" latinLnBrk="0" hangingPunct="1">
+                  <a:lnSpc>
+                    <a:spcPct val="100000"/>
+                  </a:lnSpc>
+                  <a:spcBef>
+                    <a:spcPts val="0"/>
+                  </a:spcBef>
+                  <a:spcAft>
+                    <a:spcPts val="0"/>
+                  </a:spcAft>
+                  <a:buClrTx/>
+                  <a:buSzTx/>
+                  <a:buFontTx/>
+                  <a:buNone/>
+                  <a:defRPr/>
+                </a:pPr>
+                <a:endParaRPr kumimoji="0" lang="zh-CN" altLang="en-US" sz="1800" b="0" i="0" u="none" strike="noStrike" kern="0" cap="none" spc="0" normalizeH="0" baseline="0" noProof="0">
+                  <a:ln>
+                    <a:noFill/>
+                  </a:ln>
+                  <a:solidFill>
+                    <a:srgbClr val="FFFFFF"/>
+                  </a:solidFill>
+                  <a:effectLst/>
+                  <a:uLnTx/>
+                  <a:uFillTx/>
+                  <a:latin typeface="Arial" panose="020B0604020202020204"/>
+                  <a:ea typeface="微软雅黑" panose="020B0503020204020204" pitchFamily="34" charset="-122"/>
+                  <a:cs typeface="+mn-cs"/>
+                </a:endParaRPr>
+              </a:p>
+            </p:txBody>
+          </p:sp>
+          <p:sp>
+            <p:nvSpPr>
+              <p:cNvPr id="88" name="椭圆 87"/>
+              <p:cNvSpPr/>
+              <p:nvPr/>
+            </p:nvSpPr>
+            <p:spPr>
+              <a:xfrm>
+                <a:off x="9641624" y="1476349"/>
+                <a:ext cx="72000" cy="72000"/>
+              </a:xfrm>
+              <a:prstGeom prst="ellipse">
+                <a:avLst/>
+              </a:prstGeom>
+              <a:solidFill>
+                <a:srgbClr val="8EA2A9"/>
+              </a:solidFill>
+              <a:ln w="12700" cap="flat" cmpd="sng" algn="ctr">
+                <a:noFill/>
+                <a:prstDash val="solid"/>
+                <a:miter lim="800000"/>
+              </a:ln>
+              <a:effectLst/>
+            </p:spPr>
+            <p:txBody>
+              <a:bodyPr rtlCol="0" anchor="ctr"/>
+              <a:lstStyle/>
+              <a:p>
+                <a:pPr marL="0" marR="0" lvl="0" indent="0" algn="ctr" defTabSz="914400" eaLnBrk="1" fontAlgn="auto" latinLnBrk="0" hangingPunct="1">
+                  <a:lnSpc>
+                    <a:spcPct val="100000"/>
+                  </a:lnSpc>
+                  <a:spcBef>
+                    <a:spcPts val="0"/>
+                  </a:spcBef>
+                  <a:spcAft>
+                    <a:spcPts val="0"/>
+                  </a:spcAft>
+                  <a:buClrTx/>
+                  <a:buSzTx/>
+                  <a:buFontTx/>
+                  <a:buNone/>
+                  <a:defRPr/>
+                </a:pPr>
+                <a:endParaRPr kumimoji="0" lang="zh-CN" altLang="en-US" sz="1800" b="0" i="0" u="none" strike="noStrike" kern="0" cap="none" spc="0" normalizeH="0" baseline="0" noProof="0">
+                  <a:ln>
+                    <a:noFill/>
+                  </a:ln>
+                  <a:solidFill>
+                    <a:srgbClr val="FFFFFF"/>
+                  </a:solidFill>
+                  <a:effectLst/>
+                  <a:uLnTx/>
+                  <a:uFillTx/>
+                  <a:latin typeface="Arial" panose="020B0604020202020204"/>
+                  <a:ea typeface="微软雅黑" panose="020B0503020204020204" pitchFamily="34" charset="-122"/>
+                  <a:cs typeface="+mn-cs"/>
+                </a:endParaRPr>
+              </a:p>
+            </p:txBody>
+          </p:sp>
+          <p:sp>
+            <p:nvSpPr>
+              <p:cNvPr id="89" name="椭圆 88"/>
+              <p:cNvSpPr/>
+              <p:nvPr/>
+            </p:nvSpPr>
+            <p:spPr>
+              <a:xfrm>
+                <a:off x="8854316" y="1808323"/>
+                <a:ext cx="72000" cy="72000"/>
+              </a:xfrm>
+              <a:prstGeom prst="ellipse">
+                <a:avLst/>
+              </a:prstGeom>
+              <a:solidFill>
+                <a:srgbClr val="8EA2A9"/>
+              </a:solidFill>
+              <a:ln w="12700" cap="flat" cmpd="sng" algn="ctr">
+                <a:noFill/>
+                <a:prstDash val="solid"/>
+                <a:miter lim="800000"/>
+              </a:ln>
+              <a:effectLst/>
+            </p:spPr>
+            <p:txBody>
+              <a:bodyPr rtlCol="0" anchor="ctr"/>
+              <a:lstStyle/>
+              <a:p>
+                <a:pPr marL="0" marR="0" lvl="0" indent="0" algn="ctr" defTabSz="914400" eaLnBrk="1" fontAlgn="auto" latinLnBrk="0" hangingPunct="1">
+                  <a:lnSpc>
+                    <a:spcPct val="100000"/>
+                  </a:lnSpc>
+                  <a:spcBef>
+                    <a:spcPts val="0"/>
+                  </a:spcBef>
+                  <a:spcAft>
+                    <a:spcPts val="0"/>
+                  </a:spcAft>
+                  <a:buClrTx/>
+                  <a:buSzTx/>
+                  <a:buFontTx/>
+                  <a:buNone/>
+                  <a:defRPr/>
+                </a:pPr>
+                <a:endParaRPr kumimoji="0" lang="zh-CN" altLang="en-US" sz="1800" b="0" i="0" u="none" strike="noStrike" kern="0" cap="none" spc="0" normalizeH="0" baseline="0" noProof="0">
+                  <a:ln>
+                    <a:noFill/>
+                  </a:ln>
+                  <a:solidFill>
+                    <a:srgbClr val="FFFFFF"/>
+                  </a:solidFill>
+                  <a:effectLst/>
+                  <a:uLnTx/>
+                  <a:uFillTx/>
+                  <a:latin typeface="Arial" panose="020B0604020202020204"/>
+                  <a:ea typeface="微软雅黑" panose="020B0503020204020204" pitchFamily="34" charset="-122"/>
+                  <a:cs typeface="+mn-cs"/>
+                </a:endParaRPr>
+              </a:p>
+            </p:txBody>
+          </p:sp>
+          <p:sp>
+            <p:nvSpPr>
+              <p:cNvPr id="90" name="椭圆 89"/>
+              <p:cNvSpPr/>
+              <p:nvPr/>
+            </p:nvSpPr>
+            <p:spPr>
+              <a:xfrm>
+                <a:off x="10438481" y="1806314"/>
+                <a:ext cx="72000" cy="72000"/>
+              </a:xfrm>
+              <a:prstGeom prst="ellipse">
+                <a:avLst/>
+              </a:prstGeom>
+              <a:solidFill>
+                <a:srgbClr val="8EA2A9"/>
+              </a:solidFill>
+              <a:ln w="12700" cap="flat" cmpd="sng" algn="ctr">
+                <a:noFill/>
+                <a:prstDash val="solid"/>
+                <a:miter lim="800000"/>
+              </a:ln>
+              <a:effectLst/>
+            </p:spPr>
+            <p:txBody>
+              <a:bodyPr rtlCol="0" anchor="ctr"/>
+              <a:lstStyle/>
+              <a:p>
+                <a:pPr marL="0" marR="0" lvl="0" indent="0" algn="ctr" defTabSz="914400" eaLnBrk="1" fontAlgn="auto" latinLnBrk="0" hangingPunct="1">
+                  <a:lnSpc>
+                    <a:spcPct val="100000"/>
+                  </a:lnSpc>
+                  <a:spcBef>
+                    <a:spcPts val="0"/>
+                  </a:spcBef>
+                  <a:spcAft>
+                    <a:spcPts val="0"/>
+                  </a:spcAft>
+                  <a:buClrTx/>
+                  <a:buSzTx/>
+                  <a:buFontTx/>
+                  <a:buNone/>
+                  <a:defRPr/>
+                </a:pPr>
+                <a:endParaRPr kumimoji="0" lang="zh-CN" altLang="en-US" sz="1800" b="0" i="0" u="none" strike="noStrike" kern="0" cap="none" spc="0" normalizeH="0" baseline="0" noProof="0">
+                  <a:ln>
+                    <a:noFill/>
+                  </a:ln>
+                  <a:solidFill>
+                    <a:srgbClr val="FFFFFF"/>
+                  </a:solidFill>
+                  <a:effectLst/>
+                  <a:uLnTx/>
+                  <a:uFillTx/>
+                  <a:latin typeface="Arial" panose="020B0604020202020204"/>
+                  <a:ea typeface="微软雅黑" panose="020B0503020204020204" pitchFamily="34" charset="-122"/>
+                  <a:cs typeface="+mn-cs"/>
+                </a:endParaRPr>
+              </a:p>
+            </p:txBody>
+          </p:sp>
+        </p:grpSp>
+        <p:grpSp>
+          <p:nvGrpSpPr>
+            <p:cNvPr id="83" name="组合 82"/>
+            <p:cNvGrpSpPr/>
+            <p:nvPr/>
+          </p:nvGrpSpPr>
+          <p:grpSpPr>
+            <a:xfrm>
+              <a:off x="8017668" y="7543760"/>
+              <a:ext cx="845627" cy="1617055"/>
+              <a:chOff x="8160309" y="3595151"/>
+              <a:chExt cx="845627" cy="1617055"/>
+            </a:xfrm>
+          </p:grpSpPr>
+          <p:sp>
+            <p:nvSpPr>
+              <p:cNvPr id="84" name="矩形 83"/>
+              <p:cNvSpPr/>
+              <p:nvPr/>
+            </p:nvSpPr>
+            <p:spPr>
+              <a:xfrm>
+                <a:off x="8160309" y="3777038"/>
+                <a:ext cx="418042" cy="1435168"/>
+              </a:xfrm>
+              <a:prstGeom prst="rect">
+                <a:avLst/>
+              </a:prstGeom>
+              <a:gradFill flip="none" rotWithShape="1">
+                <a:gsLst>
+                  <a:gs pos="3000">
+                    <a:srgbClr val="8EA2A9">
+                      <a:alpha val="0"/>
+                    </a:srgbClr>
+                  </a:gs>
+                  <a:gs pos="100000">
+                    <a:srgbClr val="8EA2A9">
+                      <a:lumMod val="75000"/>
+                    </a:srgbClr>
+                  </a:gs>
+                </a:gsLst>
+                <a:lin ang="16200000" scaled="1"/>
+                <a:tileRect/>
+              </a:gradFill>
+              <a:ln w="12700" cap="flat" cmpd="sng" algn="ctr">
+                <a:noFill/>
+                <a:prstDash val="solid"/>
+                <a:miter lim="800000"/>
+              </a:ln>
+              <a:effectLst/>
+            </p:spPr>
+            <p:txBody>
+              <a:bodyPr rtlCol="0" anchor="ctr"/>
+              <a:lstStyle/>
+              <a:p>
+                <a:pPr marL="0" marR="0" lvl="0" indent="0" algn="ctr" defTabSz="914400" eaLnBrk="1" fontAlgn="auto" latinLnBrk="0" hangingPunct="1">
+                  <a:lnSpc>
+                    <a:spcPct val="100000"/>
+                  </a:lnSpc>
+                  <a:spcBef>
+                    <a:spcPts val="0"/>
+                  </a:spcBef>
+                  <a:spcAft>
+                    <a:spcPts val="0"/>
+                  </a:spcAft>
+                  <a:buClrTx/>
+                  <a:buSzTx/>
+                  <a:buFontTx/>
+                  <a:buNone/>
+                  <a:defRPr/>
+                </a:pPr>
+                <a:endParaRPr kumimoji="0" lang="zh-CN" altLang="en-US" sz="1800" b="0" i="0" u="none" strike="noStrike" kern="0" cap="none" spc="0" normalizeH="0" baseline="0" noProof="0">
+                  <a:ln>
+                    <a:noFill/>
+                  </a:ln>
+                  <a:solidFill>
+                    <a:srgbClr val="FFFFFF"/>
+                  </a:solidFill>
+                  <a:effectLst/>
+                  <a:uLnTx/>
+                  <a:uFillTx/>
+                  <a:latin typeface="Arial" panose="020B0604020202020204"/>
+                  <a:ea typeface="微软雅黑" panose="020B0503020204020204" pitchFamily="34" charset="-122"/>
+                  <a:cs typeface="+mn-cs"/>
+                </a:endParaRPr>
+              </a:p>
+            </p:txBody>
+          </p:sp>
+          <p:sp>
+            <p:nvSpPr>
+              <p:cNvPr id="85" name="矩形 84"/>
+              <p:cNvSpPr/>
+              <p:nvPr/>
+            </p:nvSpPr>
+            <p:spPr>
+              <a:xfrm>
+                <a:off x="8577125" y="3767457"/>
+                <a:ext cx="418042" cy="1435168"/>
+              </a:xfrm>
+              <a:prstGeom prst="rect">
+                <a:avLst/>
+              </a:prstGeom>
+              <a:gradFill flip="none" rotWithShape="1">
+                <a:gsLst>
+                  <a:gs pos="13000">
+                    <a:srgbClr val="8EA2A9">
+                      <a:lumMod val="60000"/>
+                      <a:lumOff val="40000"/>
+                      <a:alpha val="0"/>
+                    </a:srgbClr>
+                  </a:gs>
+                  <a:gs pos="100000">
+                    <a:srgbClr val="8EA2A9">
+                      <a:lumMod val="60000"/>
+                      <a:lumOff val="40000"/>
+                    </a:srgbClr>
+                  </a:gs>
+                </a:gsLst>
+                <a:lin ang="16200000" scaled="1"/>
+                <a:tileRect/>
+              </a:gradFill>
+              <a:ln w="12700" cap="flat" cmpd="sng" algn="ctr">
+                <a:noFill/>
+                <a:prstDash val="solid"/>
+                <a:miter lim="800000"/>
+              </a:ln>
+              <a:effectLst/>
+            </p:spPr>
+            <p:txBody>
+              <a:bodyPr rtlCol="0" anchor="ctr"/>
+              <a:lstStyle/>
+              <a:p>
+                <a:pPr marL="0" marR="0" lvl="0" indent="0" algn="ctr" defTabSz="914400" eaLnBrk="1" fontAlgn="auto" latinLnBrk="0" hangingPunct="1">
+                  <a:lnSpc>
+                    <a:spcPct val="100000"/>
+                  </a:lnSpc>
+                  <a:spcBef>
+                    <a:spcPts val="0"/>
+                  </a:spcBef>
+                  <a:spcAft>
+                    <a:spcPts val="0"/>
+                  </a:spcAft>
+                  <a:buClrTx/>
+                  <a:buSzTx/>
+                  <a:buFontTx/>
+                  <a:buNone/>
+                  <a:defRPr/>
+                </a:pPr>
+                <a:endParaRPr kumimoji="0" lang="zh-CN" altLang="en-US" sz="1800" b="0" i="0" u="none" strike="noStrike" kern="0" cap="none" spc="0" normalizeH="0" baseline="0" noProof="0">
+                  <a:ln>
+                    <a:noFill/>
+                  </a:ln>
+                  <a:solidFill>
+                    <a:srgbClr val="FFFFFF"/>
+                  </a:solidFill>
+                  <a:effectLst/>
+                  <a:uLnTx/>
+                  <a:uFillTx/>
+                  <a:latin typeface="Arial" panose="020B0604020202020204"/>
+                  <a:ea typeface="微软雅黑" panose="020B0503020204020204" pitchFamily="34" charset="-122"/>
+                  <a:cs typeface="+mn-cs"/>
+                </a:endParaRPr>
+              </a:p>
+            </p:txBody>
+          </p:sp>
+          <p:sp>
+            <p:nvSpPr>
+              <p:cNvPr id="86" name="菱形 85"/>
+              <p:cNvSpPr/>
+              <p:nvPr/>
+            </p:nvSpPr>
+            <p:spPr>
+              <a:xfrm>
+                <a:off x="8160309" y="3595151"/>
+                <a:ext cx="845627" cy="363763"/>
+              </a:xfrm>
+              <a:prstGeom prst="diamond">
+                <a:avLst/>
+              </a:prstGeom>
+              <a:gradFill flip="none" rotWithShape="1">
+                <a:gsLst>
+                  <a:gs pos="0">
+                    <a:srgbClr val="8EA2A9"/>
+                  </a:gs>
+                  <a:gs pos="100000">
+                    <a:srgbClr val="8EA2A9">
+                      <a:lumMod val="60000"/>
+                      <a:lumOff val="40000"/>
+                    </a:srgbClr>
+                  </a:gs>
+                </a:gsLst>
+                <a:lin ang="10800000" scaled="1"/>
+                <a:tileRect/>
+              </a:gradFill>
+              <a:ln w="12700" cap="flat" cmpd="sng" algn="ctr">
+                <a:noFill/>
+                <a:prstDash val="solid"/>
+                <a:miter lim="800000"/>
+              </a:ln>
+              <a:effectLst/>
+            </p:spPr>
+            <p:txBody>
+              <a:bodyPr rtlCol="0" anchor="ctr"/>
+              <a:lstStyle/>
+              <a:p>
+                <a:pPr marL="0" marR="0" lvl="0" indent="0" algn="ctr" defTabSz="914400" eaLnBrk="1" fontAlgn="auto" latinLnBrk="0" hangingPunct="1">
+                  <a:lnSpc>
+                    <a:spcPct val="100000"/>
+                  </a:lnSpc>
+                  <a:spcBef>
+                    <a:spcPts val="0"/>
+                  </a:spcBef>
+                  <a:spcAft>
+                    <a:spcPts val="0"/>
+                  </a:spcAft>
+                  <a:buClrTx/>
+                  <a:buSzTx/>
+                  <a:buFontTx/>
+                  <a:buNone/>
+                  <a:defRPr/>
+                </a:pPr>
+                <a:endParaRPr kumimoji="0" lang="zh-CN" altLang="en-US" sz="1800" b="0" i="0" u="none" strike="noStrike" kern="0" cap="none" spc="0" normalizeH="0" baseline="0" noProof="0">
+                  <a:ln>
+                    <a:noFill/>
+                  </a:ln>
+                  <a:solidFill>
+                    <a:srgbClr val="FFFFFF"/>
+                  </a:solidFill>
+                  <a:effectLst/>
+                  <a:uLnTx/>
+                  <a:uFillTx/>
+                  <a:latin typeface="Arial" panose="020B0604020202020204"/>
+                  <a:ea typeface="微软雅黑" panose="020B0503020204020204" pitchFamily="34" charset="-122"/>
+                  <a:cs typeface="+mn-cs"/>
+                </a:endParaRPr>
+              </a:p>
+            </p:txBody>
+          </p:sp>
+        </p:grpSp>
+      </p:grpSp>
+      <p:grpSp>
+        <p:nvGrpSpPr>
+          <p:cNvPr id="91" name="组合 90"/>
+          <p:cNvGrpSpPr/>
+          <p:nvPr/>
+        </p:nvGrpSpPr>
+        <p:grpSpPr>
+          <a:xfrm>
+            <a:off x="11444407" y="5619972"/>
+            <a:ext cx="632266" cy="1141175"/>
+            <a:chOff x="7860291" y="7394087"/>
+            <a:chExt cx="1110550" cy="2004428"/>
+          </a:xfrm>
+        </p:grpSpPr>
+        <p:grpSp>
+          <p:nvGrpSpPr>
+            <p:cNvPr id="92" name="组合 91"/>
+            <p:cNvGrpSpPr/>
+            <p:nvPr/>
+          </p:nvGrpSpPr>
+          <p:grpSpPr>
+            <a:xfrm>
+              <a:off x="7860291" y="7394087"/>
+              <a:ext cx="1110550" cy="2004428"/>
+              <a:chOff x="8854316" y="1476349"/>
+              <a:chExt cx="1656165" cy="2989207"/>
+            </a:xfrm>
+          </p:grpSpPr>
+          <p:sp>
+            <p:nvSpPr>
+              <p:cNvPr id="97" name="六边形 96"/>
+              <p:cNvSpPr/>
+              <p:nvPr/>
+            </p:nvSpPr>
+            <p:spPr>
+              <a:xfrm rot="5400000">
+                <a:off x="8203213" y="2191032"/>
+                <a:ext cx="2955817" cy="1593232"/>
+              </a:xfrm>
+              <a:prstGeom prst="hexagon">
+                <a:avLst>
+                  <a:gd name="adj" fmla="val 20346"/>
+                  <a:gd name="vf" fmla="val 115470"/>
+                </a:avLst>
+              </a:prstGeom>
+              <a:gradFill flip="none" rotWithShape="1">
+                <a:gsLst>
+                  <a:gs pos="0">
+                    <a:srgbClr val="8EA2A9">
+                      <a:alpha val="0"/>
+                    </a:srgbClr>
+                  </a:gs>
+                  <a:gs pos="100000">
+                    <a:srgbClr val="8EA2A9">
+                      <a:alpha val="13000"/>
+                    </a:srgbClr>
+                  </a:gs>
+                </a:gsLst>
+                <a:lin ang="10800000" scaled="1"/>
+                <a:tileRect/>
+              </a:gradFill>
+              <a:ln w="12700" cap="flat" cmpd="sng" algn="ctr">
+                <a:gradFill flip="none" rotWithShape="1">
+                  <a:gsLst>
+                    <a:gs pos="0">
+                      <a:srgbClr val="8EA2A9">
+                        <a:alpha val="0"/>
+                      </a:srgbClr>
+                    </a:gs>
+                    <a:gs pos="100000">
+                      <a:srgbClr val="8EA2A9"/>
+                    </a:gs>
+                  </a:gsLst>
+                  <a:lin ang="10800000" scaled="1"/>
+                  <a:tileRect/>
+                </a:gradFill>
+                <a:prstDash val="solid"/>
+                <a:miter lim="800000"/>
+              </a:ln>
+              <a:effectLst/>
+            </p:spPr>
+            <p:txBody>
+              <a:bodyPr rtlCol="0" anchor="ctr"/>
+              <a:lstStyle/>
+              <a:p>
+                <a:pPr marL="0" marR="0" lvl="0" indent="0" algn="ctr" defTabSz="914400" eaLnBrk="1" fontAlgn="auto" latinLnBrk="0" hangingPunct="1">
+                  <a:lnSpc>
+                    <a:spcPct val="100000"/>
+                  </a:lnSpc>
+                  <a:spcBef>
+                    <a:spcPts val="0"/>
+                  </a:spcBef>
+                  <a:spcAft>
+                    <a:spcPts val="0"/>
+                  </a:spcAft>
+                  <a:buClrTx/>
+                  <a:buSzTx/>
+                  <a:buFontTx/>
+                  <a:buNone/>
+                  <a:defRPr/>
+                </a:pPr>
+                <a:endParaRPr kumimoji="0" lang="zh-CN" altLang="en-US" sz="1800" b="0" i="0" u="none" strike="noStrike" kern="0" cap="none" spc="0" normalizeH="0" baseline="0" noProof="0">
+                  <a:ln>
+                    <a:noFill/>
+                  </a:ln>
+                  <a:solidFill>
+                    <a:srgbClr val="FFFFFF"/>
+                  </a:solidFill>
+                  <a:effectLst/>
+                  <a:uLnTx/>
+                  <a:uFillTx/>
+                  <a:latin typeface="Arial" panose="020B0604020202020204"/>
+                  <a:ea typeface="微软雅黑" panose="020B0503020204020204" pitchFamily="34" charset="-122"/>
+                  <a:cs typeface="+mn-cs"/>
+                </a:endParaRPr>
+              </a:p>
+            </p:txBody>
+          </p:sp>
+          <p:sp>
+            <p:nvSpPr>
+              <p:cNvPr id="98" name="椭圆 97"/>
+              <p:cNvSpPr/>
+              <p:nvPr/>
+            </p:nvSpPr>
+            <p:spPr>
+              <a:xfrm>
+                <a:off x="9641624" y="1476349"/>
+                <a:ext cx="72000" cy="72000"/>
+              </a:xfrm>
+              <a:prstGeom prst="ellipse">
+                <a:avLst/>
+              </a:prstGeom>
+              <a:solidFill>
+                <a:srgbClr val="8EA2A9"/>
+              </a:solidFill>
+              <a:ln w="12700" cap="flat" cmpd="sng" algn="ctr">
+                <a:noFill/>
+                <a:prstDash val="solid"/>
+                <a:miter lim="800000"/>
+              </a:ln>
+              <a:effectLst/>
+            </p:spPr>
+            <p:txBody>
+              <a:bodyPr rtlCol="0" anchor="ctr"/>
+              <a:lstStyle/>
+              <a:p>
+                <a:pPr marL="0" marR="0" lvl="0" indent="0" algn="ctr" defTabSz="914400" eaLnBrk="1" fontAlgn="auto" latinLnBrk="0" hangingPunct="1">
+                  <a:lnSpc>
+                    <a:spcPct val="100000"/>
+                  </a:lnSpc>
+                  <a:spcBef>
+                    <a:spcPts val="0"/>
+                  </a:spcBef>
+                  <a:spcAft>
+                    <a:spcPts val="0"/>
+                  </a:spcAft>
+                  <a:buClrTx/>
+                  <a:buSzTx/>
+                  <a:buFontTx/>
+                  <a:buNone/>
+                  <a:defRPr/>
+                </a:pPr>
+                <a:endParaRPr kumimoji="0" lang="zh-CN" altLang="en-US" sz="1800" b="0" i="0" u="none" strike="noStrike" kern="0" cap="none" spc="0" normalizeH="0" baseline="0" noProof="0">
+                  <a:ln>
+                    <a:noFill/>
+                  </a:ln>
+                  <a:solidFill>
+                    <a:srgbClr val="FFFFFF"/>
+                  </a:solidFill>
+                  <a:effectLst/>
+                  <a:uLnTx/>
+                  <a:uFillTx/>
+                  <a:latin typeface="Arial" panose="020B0604020202020204"/>
+                  <a:ea typeface="微软雅黑" panose="020B0503020204020204" pitchFamily="34" charset="-122"/>
+                  <a:cs typeface="+mn-cs"/>
+                </a:endParaRPr>
+              </a:p>
+            </p:txBody>
+          </p:sp>
+          <p:sp>
+            <p:nvSpPr>
+              <p:cNvPr id="99" name="椭圆 98"/>
+              <p:cNvSpPr/>
+              <p:nvPr/>
+            </p:nvSpPr>
+            <p:spPr>
+              <a:xfrm>
+                <a:off x="8854316" y="1808323"/>
+                <a:ext cx="72000" cy="72000"/>
+              </a:xfrm>
+              <a:prstGeom prst="ellipse">
+                <a:avLst/>
+              </a:prstGeom>
+              <a:solidFill>
+                <a:srgbClr val="8EA2A9"/>
+              </a:solidFill>
+              <a:ln w="12700" cap="flat" cmpd="sng" algn="ctr">
+                <a:noFill/>
+                <a:prstDash val="solid"/>
+                <a:miter lim="800000"/>
+              </a:ln>
+              <a:effectLst/>
+            </p:spPr>
+            <p:txBody>
+              <a:bodyPr rtlCol="0" anchor="ctr"/>
+              <a:lstStyle/>
+              <a:p>
+                <a:pPr marL="0" marR="0" lvl="0" indent="0" algn="ctr" defTabSz="914400" eaLnBrk="1" fontAlgn="auto" latinLnBrk="0" hangingPunct="1">
+                  <a:lnSpc>
+                    <a:spcPct val="100000"/>
+                  </a:lnSpc>
+                  <a:spcBef>
+                    <a:spcPts val="0"/>
+                  </a:spcBef>
+                  <a:spcAft>
+                    <a:spcPts val="0"/>
+                  </a:spcAft>
+                  <a:buClrTx/>
+                  <a:buSzTx/>
+                  <a:buFontTx/>
+                  <a:buNone/>
+                  <a:defRPr/>
+                </a:pPr>
+                <a:endParaRPr kumimoji="0" lang="zh-CN" altLang="en-US" sz="1800" b="0" i="0" u="none" strike="noStrike" kern="0" cap="none" spc="0" normalizeH="0" baseline="0" noProof="0">
+                  <a:ln>
+                    <a:noFill/>
+                  </a:ln>
+                  <a:solidFill>
+                    <a:srgbClr val="FFFFFF"/>
+                  </a:solidFill>
+                  <a:effectLst/>
+                  <a:uLnTx/>
+                  <a:uFillTx/>
+                  <a:latin typeface="Arial" panose="020B0604020202020204"/>
+                  <a:ea typeface="微软雅黑" panose="020B0503020204020204" pitchFamily="34" charset="-122"/>
+                  <a:cs typeface="+mn-cs"/>
+                </a:endParaRPr>
+              </a:p>
+            </p:txBody>
+          </p:sp>
+          <p:sp>
+            <p:nvSpPr>
+              <p:cNvPr id="100" name="椭圆 99"/>
+              <p:cNvSpPr/>
+              <p:nvPr/>
+            </p:nvSpPr>
+            <p:spPr>
+              <a:xfrm>
+                <a:off x="10438481" y="1806314"/>
+                <a:ext cx="72000" cy="72000"/>
+              </a:xfrm>
+              <a:prstGeom prst="ellipse">
+                <a:avLst/>
+              </a:prstGeom>
+              <a:solidFill>
+                <a:srgbClr val="8EA2A9"/>
+              </a:solidFill>
+              <a:ln w="12700" cap="flat" cmpd="sng" algn="ctr">
+                <a:noFill/>
+                <a:prstDash val="solid"/>
+                <a:miter lim="800000"/>
+              </a:ln>
+              <a:effectLst/>
+            </p:spPr>
+            <p:txBody>
+              <a:bodyPr rtlCol="0" anchor="ctr"/>
+              <a:lstStyle/>
+              <a:p>
+                <a:pPr marL="0" marR="0" lvl="0" indent="0" algn="ctr" defTabSz="914400" eaLnBrk="1" fontAlgn="auto" latinLnBrk="0" hangingPunct="1">
+                  <a:lnSpc>
+                    <a:spcPct val="100000"/>
+                  </a:lnSpc>
+                  <a:spcBef>
+                    <a:spcPts val="0"/>
+                  </a:spcBef>
+                  <a:spcAft>
+                    <a:spcPts val="0"/>
+                  </a:spcAft>
+                  <a:buClrTx/>
+                  <a:buSzTx/>
+                  <a:buFontTx/>
+                  <a:buNone/>
+                  <a:defRPr/>
+                </a:pPr>
+                <a:endParaRPr kumimoji="0" lang="zh-CN" altLang="en-US" sz="1800" b="0" i="0" u="none" strike="noStrike" kern="0" cap="none" spc="0" normalizeH="0" baseline="0" noProof="0">
+                  <a:ln>
+                    <a:noFill/>
+                  </a:ln>
+                  <a:solidFill>
+                    <a:srgbClr val="FFFFFF"/>
+                  </a:solidFill>
+                  <a:effectLst/>
+                  <a:uLnTx/>
+                  <a:uFillTx/>
+                  <a:latin typeface="Arial" panose="020B0604020202020204"/>
+                  <a:ea typeface="微软雅黑" panose="020B0503020204020204" pitchFamily="34" charset="-122"/>
+                  <a:cs typeface="+mn-cs"/>
+                </a:endParaRPr>
+              </a:p>
+            </p:txBody>
+          </p:sp>
+        </p:grpSp>
+        <p:grpSp>
+          <p:nvGrpSpPr>
+            <p:cNvPr id="93" name="组合 92"/>
+            <p:cNvGrpSpPr/>
+            <p:nvPr/>
+          </p:nvGrpSpPr>
+          <p:grpSpPr>
+            <a:xfrm>
+              <a:off x="8017668" y="7543760"/>
+              <a:ext cx="845627" cy="1617055"/>
+              <a:chOff x="8160309" y="3595151"/>
+              <a:chExt cx="845627" cy="1617055"/>
+            </a:xfrm>
+          </p:grpSpPr>
+          <p:sp>
+            <p:nvSpPr>
+              <p:cNvPr id="94" name="矩形 93"/>
+              <p:cNvSpPr/>
+              <p:nvPr/>
+            </p:nvSpPr>
+            <p:spPr>
+              <a:xfrm>
+                <a:off x="8160309" y="3777038"/>
+                <a:ext cx="418042" cy="1435168"/>
+              </a:xfrm>
+              <a:prstGeom prst="rect">
+                <a:avLst/>
+              </a:prstGeom>
+              <a:gradFill flip="none" rotWithShape="1">
+                <a:gsLst>
+                  <a:gs pos="3000">
+                    <a:srgbClr val="8EA2A9">
+                      <a:alpha val="0"/>
+                    </a:srgbClr>
+                  </a:gs>
+                  <a:gs pos="100000">
+                    <a:srgbClr val="8EA2A9">
+                      <a:lumMod val="75000"/>
+                    </a:srgbClr>
+                  </a:gs>
+                </a:gsLst>
+                <a:lin ang="16200000" scaled="1"/>
+                <a:tileRect/>
+              </a:gradFill>
+              <a:ln w="12700" cap="flat" cmpd="sng" algn="ctr">
+                <a:noFill/>
+                <a:prstDash val="solid"/>
+                <a:miter lim="800000"/>
+              </a:ln>
+              <a:effectLst/>
+            </p:spPr>
+            <p:txBody>
+              <a:bodyPr rtlCol="0" anchor="ctr"/>
+              <a:lstStyle/>
+              <a:p>
+                <a:pPr marL="0" marR="0" lvl="0" indent="0" algn="ctr" defTabSz="914400" eaLnBrk="1" fontAlgn="auto" latinLnBrk="0" hangingPunct="1">
+                  <a:lnSpc>
+                    <a:spcPct val="100000"/>
+                  </a:lnSpc>
+                  <a:spcBef>
+                    <a:spcPts val="0"/>
+                  </a:spcBef>
+                  <a:spcAft>
+                    <a:spcPts val="0"/>
+                  </a:spcAft>
+                  <a:buClrTx/>
+                  <a:buSzTx/>
+                  <a:buFontTx/>
+                  <a:buNone/>
+                  <a:defRPr/>
+                </a:pPr>
+                <a:endParaRPr kumimoji="0" lang="zh-CN" altLang="en-US" sz="1800" b="0" i="0" u="none" strike="noStrike" kern="0" cap="none" spc="0" normalizeH="0" baseline="0" noProof="0">
+                  <a:ln>
+                    <a:noFill/>
+                  </a:ln>
+                  <a:solidFill>
+                    <a:srgbClr val="FFFFFF"/>
+                  </a:solidFill>
+                  <a:effectLst/>
+                  <a:uLnTx/>
+                  <a:uFillTx/>
+                  <a:latin typeface="Arial" panose="020B0604020202020204"/>
+                  <a:ea typeface="微软雅黑" panose="020B0503020204020204" pitchFamily="34" charset="-122"/>
+                  <a:cs typeface="+mn-cs"/>
+                </a:endParaRPr>
+              </a:p>
+            </p:txBody>
+          </p:sp>
+          <p:sp>
+            <p:nvSpPr>
+              <p:cNvPr id="95" name="矩形 94"/>
+              <p:cNvSpPr/>
+              <p:nvPr/>
+            </p:nvSpPr>
+            <p:spPr>
+              <a:xfrm>
+                <a:off x="8577125" y="3767457"/>
+                <a:ext cx="418042" cy="1435168"/>
+              </a:xfrm>
+              <a:prstGeom prst="rect">
+                <a:avLst/>
+              </a:prstGeom>
+              <a:gradFill flip="none" rotWithShape="1">
+                <a:gsLst>
+                  <a:gs pos="13000">
+                    <a:srgbClr val="8EA2A9">
+                      <a:lumMod val="60000"/>
+                      <a:lumOff val="40000"/>
+                      <a:alpha val="0"/>
+                    </a:srgbClr>
+                  </a:gs>
+                  <a:gs pos="100000">
+                    <a:srgbClr val="8EA2A9">
+                      <a:lumMod val="60000"/>
+                      <a:lumOff val="40000"/>
+                    </a:srgbClr>
+                  </a:gs>
+                </a:gsLst>
+                <a:lin ang="16200000" scaled="1"/>
+                <a:tileRect/>
+              </a:gradFill>
+              <a:ln w="12700" cap="flat" cmpd="sng" algn="ctr">
+                <a:noFill/>
+                <a:prstDash val="solid"/>
+                <a:miter lim="800000"/>
+              </a:ln>
+              <a:effectLst/>
+            </p:spPr>
+            <p:txBody>
+              <a:bodyPr rtlCol="0" anchor="ctr"/>
+              <a:lstStyle/>
+              <a:p>
+                <a:pPr marL="0" marR="0" lvl="0" indent="0" algn="ctr" defTabSz="914400" eaLnBrk="1" fontAlgn="auto" latinLnBrk="0" hangingPunct="1">
+                  <a:lnSpc>
+                    <a:spcPct val="100000"/>
+                  </a:lnSpc>
+                  <a:spcBef>
+                    <a:spcPts val="0"/>
+                  </a:spcBef>
+                  <a:spcAft>
+                    <a:spcPts val="0"/>
+                  </a:spcAft>
+                  <a:buClrTx/>
+                  <a:buSzTx/>
+                  <a:buFontTx/>
+                  <a:buNone/>
+                  <a:defRPr/>
+                </a:pPr>
+                <a:endParaRPr kumimoji="0" lang="zh-CN" altLang="en-US" sz="1800" b="0" i="0" u="none" strike="noStrike" kern="0" cap="none" spc="0" normalizeH="0" baseline="0" noProof="0">
+                  <a:ln>
+                    <a:noFill/>
+                  </a:ln>
+                  <a:solidFill>
+                    <a:srgbClr val="FFFFFF"/>
+                  </a:solidFill>
+                  <a:effectLst/>
+                  <a:uLnTx/>
+                  <a:uFillTx/>
+                  <a:latin typeface="Arial" panose="020B0604020202020204"/>
+                  <a:ea typeface="微软雅黑" panose="020B0503020204020204" pitchFamily="34" charset="-122"/>
+                  <a:cs typeface="+mn-cs"/>
+                </a:endParaRPr>
+              </a:p>
+            </p:txBody>
+          </p:sp>
+          <p:sp>
+            <p:nvSpPr>
+              <p:cNvPr id="96" name="菱形 95"/>
+              <p:cNvSpPr/>
+              <p:nvPr/>
+            </p:nvSpPr>
+            <p:spPr>
+              <a:xfrm>
+                <a:off x="8160309" y="3595151"/>
+                <a:ext cx="845627" cy="363763"/>
+              </a:xfrm>
+              <a:prstGeom prst="diamond">
+                <a:avLst/>
+              </a:prstGeom>
+              <a:gradFill flip="none" rotWithShape="1">
+                <a:gsLst>
+                  <a:gs pos="0">
+                    <a:srgbClr val="8EA2A9"/>
+                  </a:gs>
+                  <a:gs pos="100000">
+                    <a:srgbClr val="8EA2A9">
+                      <a:lumMod val="60000"/>
+                      <a:lumOff val="40000"/>
+                    </a:srgbClr>
+                  </a:gs>
+                </a:gsLst>
+                <a:lin ang="10800000" scaled="1"/>
+                <a:tileRect/>
+              </a:gradFill>
+              <a:ln w="12700" cap="flat" cmpd="sng" algn="ctr">
+                <a:noFill/>
+                <a:prstDash val="solid"/>
+                <a:miter lim="800000"/>
+              </a:ln>
+              <a:effectLst/>
+            </p:spPr>
+            <p:txBody>
+              <a:bodyPr rtlCol="0" anchor="ctr"/>
+              <a:lstStyle/>
+              <a:p>
+                <a:pPr marL="0" marR="0" lvl="0" indent="0" algn="ctr" defTabSz="914400" eaLnBrk="1" fontAlgn="auto" latinLnBrk="0" hangingPunct="1">
+                  <a:lnSpc>
+                    <a:spcPct val="100000"/>
+                  </a:lnSpc>
+                  <a:spcBef>
+                    <a:spcPts val="0"/>
+                  </a:spcBef>
+                  <a:spcAft>
+                    <a:spcPts val="0"/>
+                  </a:spcAft>
+                  <a:buClrTx/>
+                  <a:buSzTx/>
+                  <a:buFontTx/>
+                  <a:buNone/>
+                  <a:defRPr/>
+                </a:pPr>
+                <a:endParaRPr kumimoji="0" lang="zh-CN" altLang="en-US" sz="1800" b="0" i="0" u="none" strike="noStrike" kern="0" cap="none" spc="0" normalizeH="0" baseline="0" noProof="0">
+                  <a:ln>
+                    <a:noFill/>
+                  </a:ln>
+                  <a:solidFill>
+                    <a:srgbClr val="FFFFFF"/>
+                  </a:solidFill>
+                  <a:effectLst/>
+                  <a:uLnTx/>
+                  <a:uFillTx/>
+                  <a:latin typeface="Arial" panose="020B0604020202020204"/>
+                  <a:ea typeface="微软雅黑" panose="020B0503020204020204" pitchFamily="34" charset="-122"/>
+                  <a:cs typeface="+mn-cs"/>
+                </a:endParaRPr>
+              </a:p>
+            </p:txBody>
+          </p:sp>
+        </p:grpSp>
+      </p:grpSp>
+      <p:sp>
+        <p:nvSpPr>
+          <p:cNvPr id="101" name="矩形 100"/>
+          <p:cNvSpPr/>
+          <p:nvPr/>
+        </p:nvSpPr>
+        <p:spPr>
+          <a:xfrm>
+            <a:off x="900874" y="1578707"/>
+            <a:ext cx="10490446" cy="4193295"/>
+          </a:xfrm>
+          <a:prstGeom prst="rect">
+            <a:avLst/>
+          </a:prstGeom>
+          <a:solidFill>
+            <a:srgbClr val="FFFFFF"/>
+          </a:solidFill>
+          <a:ln w="12700" cap="flat" cmpd="sng" algn="ctr">
+            <a:solidFill>
+              <a:srgbClr val="8EA2A9">
+                <a:alpha val="44000"/>
+              </a:srgbClr>
+            </a:solidFill>
+            <a:prstDash val="solid"/>
+            <a:miter lim="800000"/>
+          </a:ln>
+          <a:effectLst>
+            <a:outerShdw blurRad="254000" dist="38100" dir="5400000" algn="t" rotWithShape="0">
+              <a:srgbClr val="8EA2A9">
+                <a:lumMod val="50000"/>
+                <a:alpha val="35000"/>
+              </a:srgbClr>
+            </a:outerShdw>
+          </a:effectLst>
+        </p:spPr>
+        <p:txBody>
+          <a:bodyPr rtlCol="0" anchor="ctr"/>
+          <a:lstStyle/>
+          <a:p>
+            <a:pPr marL="0" marR="0" lvl="0" indent="0" algn="ctr" defTabSz="914400" eaLnBrk="1" fontAlgn="auto" latinLnBrk="0" hangingPunct="1">
+              <a:lnSpc>
+                <a:spcPct val="100000"/>
+              </a:lnSpc>
+              <a:spcBef>
+                <a:spcPts val="0"/>
+              </a:spcBef>
+              <a:spcAft>
+                <a:spcPts val="0"/>
+              </a:spcAft>
+              <a:buClrTx/>
+              <a:buSzTx/>
+              <a:buFontTx/>
+              <a:buNone/>
+              <a:defRPr/>
+            </a:pPr>
+            <a:endParaRPr kumimoji="0" lang="zh-CN" altLang="en-US" sz="1800" b="0" i="0" u="none" strike="noStrike" kern="0" cap="none" spc="0" normalizeH="0" baseline="0" noProof="0">
+              <a:ln>
+                <a:noFill/>
+              </a:ln>
+              <a:solidFill>
+                <a:srgbClr val="FFFFFF"/>
+              </a:solidFill>
+              <a:effectLst/>
+              <a:uLnTx/>
+              <a:uFillTx/>
+              <a:latin typeface="Arial" panose="020B0604020202020204"/>
+              <a:ea typeface="微软雅黑" panose="020B0503020204020204" pitchFamily="34" charset="-122"/>
+              <a:cs typeface="+mn-cs"/>
+            </a:endParaRPr>
+          </a:p>
+        </p:txBody>
+      </p:sp>
+      <p:sp>
+        <p:nvSpPr>
+          <p:cNvPr id="102" name="文本占位符 1"/>
+          <p:cNvSpPr txBox="1"/>
+          <p:nvPr/>
+        </p:nvSpPr>
+        <p:spPr>
+          <a:xfrm>
+            <a:off x="2124472" y="3462676"/>
+            <a:ext cx="4446556" cy="469616"/>
+          </a:xfrm>
+          <a:prstGeom prst="rect">
+            <a:avLst/>
+          </a:prstGeom>
+          <a:noFill/>
+        </p:spPr>
+        <p:txBody>
+          <a:bodyPr vert="horz" wrap="square" lIns="91440" tIns="45720" rIns="91440" bIns="45720" rtlCol="0">
+            <a:spAutoFit/>
+          </a:bodyPr>
+          <a:lstStyle>
+            <a:defPPr>
+              <a:defRPr lang="zh-CN"/>
+            </a:defPPr>
+            <a:lvl1pPr marR="0" indent="0">
+              <a:lnSpc>
+                <a:spcPct val="110000"/>
+              </a:lnSpc>
+              <a:spcBef>
+                <a:spcPts val="0"/>
+              </a:spcBef>
+              <a:spcAft>
+                <a:spcPts val="0"/>
+              </a:spcAft>
+              <a:buFont typeface="Arial" panose="020B0604020202020204" pitchFamily="34" charset="0"/>
+              <a:buNone/>
+              <a:defRPr sz="2400" spc="100">
+                <a:solidFill>
+                  <a:srgbClr val="B8C4C9"/>
+                </a:solidFill>
+                <a:ea typeface="微软雅黑" panose="020B0503020204020204" pitchFamily="34" charset="-122"/>
+              </a:defRPr>
+            </a:lvl1pPr>
+            <a:lvl2pPr marL="685800" indent="-228600">
+              <a:lnSpc>
+                <a:spcPct val="90000"/>
+              </a:lnSpc>
+              <a:spcBef>
+                <a:spcPts val="500"/>
+              </a:spcBef>
+              <a:buFont typeface="Arial" panose="020B0604020202020204" pitchFamily="34" charset="0"/>
+              <a:buChar char="•"/>
+            </a:lvl2pPr>
+            <a:lvl3pPr marL="1143000" indent="-228600">
+              <a:lnSpc>
+                <a:spcPct val="90000"/>
+              </a:lnSpc>
+              <a:spcBef>
+                <a:spcPts val="500"/>
+              </a:spcBef>
+              <a:buFont typeface="Arial" panose="020B0604020202020204" pitchFamily="34" charset="0"/>
+              <a:buChar char="•"/>
+            </a:lvl3pPr>
+            <a:lvl4pPr marL="1600200" indent="-228600">
+              <a:lnSpc>
+                <a:spcPct val="90000"/>
+              </a:lnSpc>
+              <a:spcBef>
+                <a:spcPts val="500"/>
+              </a:spcBef>
+              <a:buFont typeface="Arial" panose="020B0604020202020204" pitchFamily="34" charset="0"/>
+              <a:buChar char="•"/>
+            </a:lvl4pPr>
+            <a:lvl5pPr marL="2057400" indent="-228600">
+              <a:lnSpc>
+                <a:spcPct val="90000"/>
+              </a:lnSpc>
+              <a:spcBef>
+                <a:spcPts val="500"/>
+              </a:spcBef>
+              <a:buFont typeface="Arial" panose="020B0604020202020204" pitchFamily="34" charset="0"/>
+              <a:buChar char="•"/>
+            </a:lvl5pPr>
+            <a:lvl6pPr marL="2514600" indent="-228600">
+              <a:lnSpc>
+                <a:spcPct val="90000"/>
+              </a:lnSpc>
+              <a:spcBef>
+                <a:spcPts val="500"/>
+              </a:spcBef>
+              <a:buFont typeface="Arial" panose="020B0604020202020204" pitchFamily="34" charset="0"/>
+              <a:buChar char="•"/>
+            </a:lvl6pPr>
+            <a:lvl7pPr marL="2971800" indent="-228600">
+              <a:lnSpc>
+                <a:spcPct val="90000"/>
+              </a:lnSpc>
+              <a:spcBef>
+                <a:spcPts val="500"/>
+              </a:spcBef>
+              <a:buFont typeface="Arial" panose="020B0604020202020204" pitchFamily="34" charset="0"/>
+              <a:buChar char="•"/>
+            </a:lvl7pPr>
+            <a:lvl8pPr marL="3429000" indent="-228600">
+              <a:lnSpc>
+                <a:spcPct val="90000"/>
+              </a:lnSpc>
+              <a:spcBef>
+                <a:spcPts val="500"/>
+              </a:spcBef>
+              <a:buFont typeface="Arial" panose="020B0604020202020204" pitchFamily="34" charset="0"/>
+              <a:buChar char="•"/>
+            </a:lvl8pPr>
+            <a:lvl9pPr marL="3886200" indent="-228600">
+              <a:lnSpc>
+                <a:spcPct val="90000"/>
+              </a:lnSpc>
+              <a:spcBef>
+                <a:spcPts val="500"/>
+              </a:spcBef>
+              <a:buFont typeface="Arial" panose="020B0604020202020204" pitchFamily="34" charset="0"/>
+              <a:buChar char="•"/>
+            </a:lvl9pPr>
+          </a:lstStyle>
+          <a:p>
+            <a:r>
+              <a:rPr lang="zh-CN" altLang="en-US" dirty="0"/>
+              <a:t>核心解决方案</a:t>
+            </a:r>
+          </a:p>
+        </p:txBody>
+      </p:sp>
+      <p:sp>
+        <p:nvSpPr>
+          <p:cNvPr id="103" name="文本占位符 2"/>
+          <p:cNvSpPr txBox="1"/>
+          <p:nvPr/>
+        </p:nvSpPr>
+        <p:spPr>
+          <a:xfrm>
+            <a:off x="2124472" y="4804965"/>
+            <a:ext cx="3727688" cy="469616"/>
+          </a:xfrm>
+          <a:prstGeom prst="rect">
+            <a:avLst/>
+          </a:prstGeom>
+          <a:noFill/>
+        </p:spPr>
+        <p:txBody>
+          <a:bodyPr vert="horz" wrap="square" lIns="91440" tIns="45720" rIns="91440" bIns="45720" rtlCol="0">
+            <a:spAutoFit/>
+          </a:bodyPr>
+          <a:lstStyle>
+            <a:defPPr>
+              <a:defRPr lang="zh-CN"/>
+            </a:defPPr>
+            <a:lvl1pPr marR="0" indent="0">
+              <a:lnSpc>
+                <a:spcPct val="110000"/>
+              </a:lnSpc>
+              <a:spcBef>
+                <a:spcPts val="0"/>
+              </a:spcBef>
+              <a:spcAft>
+                <a:spcPts val="0"/>
+              </a:spcAft>
+              <a:buFont typeface="Arial" panose="020B0604020202020204" pitchFamily="34" charset="0"/>
+              <a:buNone/>
+              <a:defRPr sz="2400" spc="100">
+                <a:solidFill>
+                  <a:srgbClr val="B8C4C9"/>
+                </a:solidFill>
+                <a:ea typeface="微软雅黑" panose="020B0503020204020204" pitchFamily="34" charset="-122"/>
+              </a:defRPr>
+            </a:lvl1pPr>
+            <a:lvl2pPr marL="685800" indent="-228600">
+              <a:lnSpc>
+                <a:spcPct val="90000"/>
+              </a:lnSpc>
+              <a:spcBef>
+                <a:spcPts val="500"/>
+              </a:spcBef>
+              <a:buFont typeface="Arial" panose="020B0604020202020204" pitchFamily="34" charset="0"/>
+              <a:buChar char="•"/>
+            </a:lvl2pPr>
+            <a:lvl3pPr marL="1143000" indent="-228600">
+              <a:lnSpc>
+                <a:spcPct val="90000"/>
+              </a:lnSpc>
+              <a:spcBef>
+                <a:spcPts val="500"/>
+              </a:spcBef>
+              <a:buFont typeface="Arial" panose="020B0604020202020204" pitchFamily="34" charset="0"/>
+              <a:buChar char="•"/>
+            </a:lvl3pPr>
+            <a:lvl4pPr marL="1600200" indent="-228600">
+              <a:lnSpc>
+                <a:spcPct val="90000"/>
+              </a:lnSpc>
+              <a:spcBef>
+                <a:spcPts val="500"/>
+              </a:spcBef>
+              <a:buFont typeface="Arial" panose="020B0604020202020204" pitchFamily="34" charset="0"/>
+              <a:buChar char="•"/>
+            </a:lvl4pPr>
+            <a:lvl5pPr marL="2057400" indent="-228600">
+              <a:lnSpc>
+                <a:spcPct val="90000"/>
+              </a:lnSpc>
+              <a:spcBef>
+                <a:spcPts val="500"/>
+              </a:spcBef>
+              <a:buFont typeface="Arial" panose="020B0604020202020204" pitchFamily="34" charset="0"/>
+              <a:buChar char="•"/>
+            </a:lvl5pPr>
+            <a:lvl6pPr marL="2514600" indent="-228600">
+              <a:lnSpc>
+                <a:spcPct val="90000"/>
+              </a:lnSpc>
+              <a:spcBef>
+                <a:spcPts val="500"/>
+              </a:spcBef>
+              <a:buFont typeface="Arial" panose="020B0604020202020204" pitchFamily="34" charset="0"/>
+              <a:buChar char="•"/>
+            </a:lvl6pPr>
+            <a:lvl7pPr marL="2971800" indent="-228600">
+              <a:lnSpc>
+                <a:spcPct val="90000"/>
+              </a:lnSpc>
+              <a:spcBef>
+                <a:spcPts val="500"/>
+              </a:spcBef>
+              <a:buFont typeface="Arial" panose="020B0604020202020204" pitchFamily="34" charset="0"/>
+              <a:buChar char="•"/>
+            </a:lvl7pPr>
+            <a:lvl8pPr marL="3429000" indent="-228600">
+              <a:lnSpc>
+                <a:spcPct val="90000"/>
+              </a:lnSpc>
+              <a:spcBef>
+                <a:spcPts val="500"/>
+              </a:spcBef>
+              <a:buFont typeface="Arial" panose="020B0604020202020204" pitchFamily="34" charset="0"/>
+              <a:buChar char="•"/>
+            </a:lvl8pPr>
+            <a:lvl9pPr marL="3886200" indent="-228600">
+              <a:lnSpc>
+                <a:spcPct val="90000"/>
+              </a:lnSpc>
+              <a:spcBef>
+                <a:spcPts val="500"/>
+              </a:spcBef>
+              <a:buFont typeface="Arial" panose="020B0604020202020204" pitchFamily="34" charset="0"/>
+              <a:buChar char="•"/>
+            </a:lvl9pPr>
+          </a:lstStyle>
+          <a:p>
+            <a:r>
+              <a:rPr lang="zh-CN" altLang="en-US" dirty="0"/>
+              <a:t>沟通</a:t>
+            </a:r>
+            <a:r>
+              <a:rPr lang="zh-CN" altLang="en-US"/>
+              <a:t>及探讨</a:t>
+            </a:r>
+            <a:endParaRPr lang="zh-CN" altLang="en-US" dirty="0"/>
+          </a:p>
+        </p:txBody>
+      </p:sp>
+      <p:sp>
+        <p:nvSpPr>
+          <p:cNvPr id="105" name="文本占位符 4"/>
+          <p:cNvSpPr txBox="1"/>
+          <p:nvPr/>
+        </p:nvSpPr>
+        <p:spPr>
+          <a:xfrm>
+            <a:off x="7426888" y="3488344"/>
+            <a:ext cx="3587261" cy="467051"/>
+          </a:xfrm>
+          <a:prstGeom prst="rect">
+            <a:avLst/>
+          </a:prstGeom>
+          <a:noFill/>
+        </p:spPr>
+        <p:txBody>
+          <a:bodyPr vert="horz" wrap="square" lIns="91440" tIns="45720" rIns="91440" bIns="45720" rtlCol="0">
+            <a:spAutoFit/>
+          </a:bodyPr>
+          <a:lstStyle>
+            <a:lvl1pPr marL="0" marR="0" indent="0" algn="l" defTabSz="914400" rtl="0" eaLnBrk="1" latinLnBrk="0" hangingPunct="1">
+              <a:lnSpc>
+                <a:spcPct val="110000"/>
+              </a:lnSpc>
+              <a:spcBef>
+                <a:spcPts val="0"/>
+              </a:spcBef>
+              <a:spcAft>
+                <a:spcPts val="0"/>
+              </a:spcAft>
+              <a:buFont typeface="Arial" panose="020B0604020202020204" pitchFamily="34" charset="0"/>
+              <a:buChar char="•"/>
+              <a:defRPr lang="zh-CN" altLang="en-US" sz="2400" kern="1200" spc="100" smtClean="0">
+                <a:solidFill>
+                  <a:schemeClr val="accent2"/>
+                </a:solidFill>
+                <a:latin typeface="+mn-lt"/>
+                <a:ea typeface="+mn-ea"/>
+                <a:cs typeface="+mn-cs"/>
+              </a:defRPr>
+            </a:lvl1pPr>
+            <a:lvl2pPr marL="685800" indent="-228600" algn="l" defTabSz="914400" rtl="0" eaLnBrk="1" latinLnBrk="0" hangingPunct="1">
+              <a:lnSpc>
+                <a:spcPct val="90000"/>
+              </a:lnSpc>
+              <a:spcBef>
+                <a:spcPts val="500"/>
+              </a:spcBef>
+              <a:buFont typeface="Arial" panose="020B0604020202020204" pitchFamily="34" charset="0"/>
+              <a:buChar char="•"/>
+              <a:defRPr lang="zh-CN" altLang="en-US" sz="1800" kern="1200" smtClean="0">
+                <a:solidFill>
+                  <a:schemeClr val="tx1"/>
+                </a:solidFill>
+                <a:latin typeface="+mn-lt"/>
+                <a:ea typeface="+mn-ea"/>
+                <a:cs typeface="+mn-cs"/>
+              </a:defRPr>
+            </a:lvl2pPr>
+            <a:lvl3pPr marL="1143000" indent="-228600" algn="l" defTabSz="914400" rtl="0" eaLnBrk="1" latinLnBrk="0" hangingPunct="1">
+              <a:lnSpc>
+                <a:spcPct val="90000"/>
+              </a:lnSpc>
+              <a:spcBef>
+                <a:spcPts val="500"/>
+              </a:spcBef>
+              <a:buFont typeface="Arial" panose="020B0604020202020204" pitchFamily="34" charset="0"/>
+              <a:buChar char="•"/>
+              <a:defRPr lang="zh-CN" altLang="en-US" sz="1800" kern="1200" smtClean="0">
+                <a:solidFill>
+                  <a:schemeClr val="tx1"/>
+                </a:solidFill>
+                <a:latin typeface="+mn-lt"/>
+                <a:ea typeface="+mn-ea"/>
+                <a:cs typeface="+mn-cs"/>
+              </a:defRPr>
+            </a:lvl3pPr>
+            <a:lvl4pPr marL="1600200" indent="-228600" algn="l" defTabSz="914400" rtl="0" eaLnBrk="1" latinLnBrk="0" hangingPunct="1">
+              <a:lnSpc>
+                <a:spcPct val="90000"/>
+              </a:lnSpc>
+              <a:spcBef>
+                <a:spcPts val="500"/>
+              </a:spcBef>
+              <a:buFont typeface="Arial" panose="020B0604020202020204" pitchFamily="34" charset="0"/>
+              <a:buChar char="•"/>
+              <a:defRPr lang="zh-CN" altLang="en-US" sz="1800" kern="1200" smtClean="0">
+                <a:solidFill>
+                  <a:schemeClr val="tx1"/>
+                </a:solidFill>
+                <a:latin typeface="+mn-lt"/>
+                <a:ea typeface="+mn-ea"/>
+                <a:cs typeface="+mn-cs"/>
+              </a:defRPr>
+            </a:lvl4pPr>
+            <a:lvl5pPr marL="2057400" indent="-228600" algn="l" defTabSz="914400" rtl="0" eaLnBrk="1" latinLnBrk="0" hangingPunct="1">
+              <a:lnSpc>
+                <a:spcPct val="90000"/>
+              </a:lnSpc>
+              <a:spcBef>
+                <a:spcPts val="500"/>
+              </a:spcBef>
+              <a:buFont typeface="Arial" panose="020B0604020202020204" pitchFamily="34" charset="0"/>
+              <a:buChar char="•"/>
+              <a:defRPr lang="zh-CN" altLang="en-US" sz="1800" kern="1200">
+                <a:solidFill>
+                  <a:schemeClr val="tx1"/>
+                </a:solidFill>
+                <a:latin typeface="+mn-lt"/>
+                <a:ea typeface="+mn-ea"/>
+                <a:cs typeface="+mn-cs"/>
+              </a:defRPr>
+            </a:lvl5pPr>
+            <a:lvl6pPr marL="2514600" indent="-228600" algn="l" defTabSz="914400" rtl="0" eaLnBrk="1" latinLnBrk="0" hangingPunct="1">
+              <a:lnSpc>
+                <a:spcPct val="90000"/>
+              </a:lnSpc>
+              <a:spcBef>
+                <a:spcPts val="500"/>
+              </a:spcBef>
+              <a:buFont typeface="Arial" panose="020B0604020202020204" pitchFamily="34" charset="0"/>
+              <a:buChar char="•"/>
+              <a:defRPr sz="1800" kern="1200">
+                <a:solidFill>
+                  <a:schemeClr val="tx1"/>
+                </a:solidFill>
+                <a:latin typeface="+mn-lt"/>
+                <a:ea typeface="+mn-ea"/>
+                <a:cs typeface="+mn-cs"/>
+              </a:defRPr>
+            </a:lvl6pPr>
+            <a:lvl7pPr marL="2971800" indent="-228600" algn="l" defTabSz="914400" rtl="0" eaLnBrk="1" latinLnBrk="0" hangingPunct="1">
+              <a:lnSpc>
+                <a:spcPct val="90000"/>
+              </a:lnSpc>
+              <a:spcBef>
+                <a:spcPts val="500"/>
+              </a:spcBef>
+              <a:buFont typeface="Arial" panose="020B0604020202020204" pitchFamily="34" charset="0"/>
+              <a:buChar char="•"/>
+              <a:defRPr sz="1800" kern="1200">
+                <a:solidFill>
+                  <a:schemeClr val="tx1"/>
+                </a:solidFill>
+                <a:latin typeface="+mn-lt"/>
+                <a:ea typeface="+mn-ea"/>
+                <a:cs typeface="+mn-cs"/>
+              </a:defRPr>
+            </a:lvl7pPr>
+            <a:lvl8pPr marL="3429000" indent="-228600" algn="l" defTabSz="914400" rtl="0" eaLnBrk="1" latinLnBrk="0" hangingPunct="1">
+              <a:lnSpc>
+                <a:spcPct val="90000"/>
+              </a:lnSpc>
+              <a:spcBef>
+                <a:spcPts val="500"/>
+              </a:spcBef>
+              <a:buFont typeface="Arial" panose="020B0604020202020204" pitchFamily="34" charset="0"/>
+              <a:buChar char="•"/>
+              <a:defRPr sz="1800" kern="1200">
+                <a:solidFill>
+                  <a:schemeClr val="tx1"/>
+                </a:solidFill>
+                <a:latin typeface="+mn-lt"/>
+                <a:ea typeface="+mn-ea"/>
+                <a:cs typeface="+mn-cs"/>
+              </a:defRPr>
+            </a:lvl8pPr>
+            <a:lvl9pPr marL="3886200" indent="-228600" algn="l" defTabSz="914400" rtl="0" eaLnBrk="1" latinLnBrk="0" hangingPunct="1">
+              <a:lnSpc>
+                <a:spcPct val="90000"/>
+              </a:lnSpc>
+              <a:spcBef>
+                <a:spcPts val="500"/>
+              </a:spcBef>
+              <a:buFont typeface="Arial" panose="020B0604020202020204" pitchFamily="34" charset="0"/>
+              <a:buChar char="•"/>
+              <a:defRPr sz="1800" kern="1200">
+                <a:solidFill>
+                  <a:schemeClr val="tx1"/>
+                </a:solidFill>
+                <a:latin typeface="+mn-lt"/>
+                <a:ea typeface="+mn-ea"/>
+                <a:cs typeface="+mn-cs"/>
+              </a:defRPr>
+            </a:lvl9pPr>
+          </a:lstStyle>
+          <a:p>
+            <a:pPr>
+              <a:buNone/>
+              <a:defRPr/>
+            </a:pPr>
+            <a:r>
+              <a:rPr lang="zh-CN" altLang="en-US" dirty="0">
+                <a:solidFill>
+                  <a:srgbClr val="B8C4C9"/>
+                </a:solidFill>
+                <a:ea typeface="微软雅黑" panose="020B0503020204020204" pitchFamily="34" charset="-122"/>
+              </a:rPr>
+              <a:t>项目实施方法</a:t>
+            </a:r>
+            <a:endParaRPr kumimoji="0" lang="zh-CN" altLang="en-US" sz="2400" b="0" i="0" u="none" strike="noStrike" kern="1200" cap="none" spc="100" normalizeH="0" baseline="0" noProof="0" dirty="0">
+              <a:ln>
+                <a:noFill/>
+              </a:ln>
+              <a:solidFill>
+                <a:srgbClr val="8EA2A9"/>
+              </a:solidFill>
+              <a:effectLst/>
+              <a:uLnTx/>
+              <a:uFillTx/>
+              <a:latin typeface="Arial" panose="020B0604020202020204"/>
+              <a:ea typeface="微软雅黑" panose="020B0503020204020204" pitchFamily="34" charset="-122"/>
+              <a:cs typeface="+mn-cs"/>
+            </a:endParaRPr>
+          </a:p>
+        </p:txBody>
+      </p:sp>
+      <p:grpSp>
+        <p:nvGrpSpPr>
+          <p:cNvPr id="106" name="组合 105"/>
+          <p:cNvGrpSpPr/>
+          <p:nvPr/>
+        </p:nvGrpSpPr>
+        <p:grpSpPr>
+          <a:xfrm>
+            <a:off x="8865235" y="100330"/>
+            <a:ext cx="3552190" cy="718820"/>
+            <a:chOff x="13142" y="1264"/>
+            <a:chExt cx="5594" cy="1132"/>
+          </a:xfrm>
+        </p:grpSpPr>
+        <p:pic>
+          <p:nvPicPr>
+            <p:cNvPr id="107" name="图片 106"/>
+            <p:cNvPicPr>
+              <a:picLocks noChangeAspect="1"/>
+            </p:cNvPicPr>
+            <p:nvPr userDrawn="1"/>
+          </p:nvPicPr>
+          <p:blipFill rotWithShape="1">
+            <a:blip r:embed="rId2"/>
+            <a:srcRect r="24054"/>
+            <a:stretch>
+              <a:fillRect/>
+            </a:stretch>
+          </p:blipFill>
+          <p:spPr>
+            <a:xfrm>
+              <a:off x="13142" y="1264"/>
+              <a:ext cx="2742" cy="1133"/>
+            </a:xfrm>
+            <a:prstGeom prst="rect">
+              <a:avLst/>
+            </a:prstGeom>
+          </p:spPr>
+        </p:pic>
+        <p:sp>
+          <p:nvSpPr>
+            <p:cNvPr id="108" name="文本框 107"/>
+            <p:cNvSpPr txBox="1"/>
+            <p:nvPr userDrawn="1"/>
+          </p:nvSpPr>
+          <p:spPr>
+            <a:xfrm>
+              <a:off x="15976" y="1452"/>
+              <a:ext cx="2761" cy="758"/>
+            </a:xfrm>
+            <a:prstGeom prst="rect">
+              <a:avLst/>
+            </a:prstGeom>
+            <a:noFill/>
+          </p:spPr>
+          <p:txBody>
+            <a:bodyPr wrap="square">
+              <a:spAutoFit/>
+            </a:bodyPr>
+            <a:lstStyle/>
+            <a:p>
+              <a:pPr marL="0" marR="0" lvl="0" indent="0" defTabSz="914400" eaLnBrk="1" fontAlgn="auto" latinLnBrk="0" hangingPunct="1">
+                <a:lnSpc>
+                  <a:spcPct val="120000"/>
+                </a:lnSpc>
+                <a:spcBef>
+                  <a:spcPts val="0"/>
+                </a:spcBef>
+                <a:spcAft>
+                  <a:spcPts val="0"/>
+                </a:spcAft>
+                <a:buClrTx/>
+                <a:buSzTx/>
+                <a:buFontTx/>
+                <a:buNone/>
+                <a:defRPr/>
+              </a:pPr>
+              <a:r>
+                <a:rPr kumimoji="0" lang="zh-CN" altLang="en-US" sz="1050" b="0" i="0" u="none" strike="noStrike" kern="0" cap="none" spc="0" normalizeH="0" baseline="0" noProof="0" dirty="0">
+                  <a:ln>
+                    <a:noFill/>
+                  </a:ln>
+                  <a:solidFill>
+                    <a:srgbClr val="8EA2A9"/>
+                  </a:solidFill>
+                  <a:effectLst/>
+                  <a:uLnTx/>
+                  <a:uFillTx/>
+                  <a:latin typeface="Arial" panose="020B0604020202020204"/>
+                  <a:ea typeface="微软雅黑" panose="020B0503020204020204" pitchFamily="34" charset="-122"/>
+                </a:rPr>
+                <a:t>企业数字化赋能者 </a:t>
+              </a:r>
+              <a:endParaRPr kumimoji="0" lang="en-US" altLang="zh-CN" sz="1050" b="0" i="0" u="none" strike="noStrike" kern="0" cap="none" spc="0" normalizeH="0" baseline="0" noProof="0" dirty="0">
+                <a:ln>
+                  <a:noFill/>
+                </a:ln>
+                <a:solidFill>
+                  <a:srgbClr val="8EA2A9"/>
+                </a:solidFill>
+                <a:effectLst/>
+                <a:uLnTx/>
+                <a:uFillTx/>
+                <a:latin typeface="Arial" panose="020B0604020202020204"/>
+                <a:ea typeface="微软雅黑" panose="020B0503020204020204" pitchFamily="34" charset="-122"/>
+              </a:endParaRPr>
+            </a:p>
+            <a:p>
+              <a:pPr marL="0" marR="0" lvl="0" indent="0" defTabSz="914400" eaLnBrk="1" fontAlgn="auto" latinLnBrk="0" hangingPunct="1">
+                <a:lnSpc>
+                  <a:spcPct val="120000"/>
+                </a:lnSpc>
+                <a:spcBef>
+                  <a:spcPts val="0"/>
+                </a:spcBef>
+                <a:spcAft>
+                  <a:spcPts val="0"/>
+                </a:spcAft>
+                <a:buClrTx/>
+                <a:buSzTx/>
+                <a:buFontTx/>
+                <a:buNone/>
+                <a:defRPr/>
+              </a:pPr>
+              <a:r>
+                <a:rPr kumimoji="0" lang="zh-CN" altLang="en-US" sz="1050" b="0" i="0" u="none" strike="noStrike" kern="0" cap="none" spc="0" normalizeH="0" baseline="0" noProof="0" dirty="0">
+                  <a:ln>
+                    <a:noFill/>
+                  </a:ln>
+                  <a:solidFill>
+                    <a:srgbClr val="8EA2A9"/>
+                  </a:solidFill>
+                  <a:effectLst/>
+                  <a:uLnTx/>
+                  <a:uFillTx/>
+                  <a:latin typeface="Arial" panose="020B0604020202020204"/>
+                  <a:ea typeface="微软雅黑" panose="020B0503020204020204" pitchFamily="34" charset="-122"/>
+                </a:rPr>
+                <a:t>工业管理软件践行者</a:t>
+              </a:r>
+            </a:p>
+          </p:txBody>
+        </p:sp>
+        <p:cxnSp>
+          <p:nvCxnSpPr>
+            <p:cNvPr id="109" name="直接连接符 108"/>
+            <p:cNvCxnSpPr/>
+            <p:nvPr userDrawn="1"/>
+          </p:nvCxnSpPr>
+          <p:spPr>
+            <a:xfrm>
+              <a:off x="15886" y="1599"/>
+              <a:ext cx="0" cy="478"/>
+            </a:xfrm>
+            <a:prstGeom prst="line">
+              <a:avLst/>
+            </a:prstGeom>
+            <a:noFill/>
+            <a:ln w="12700" cap="flat" cmpd="sng" algn="ctr">
+              <a:solidFill>
+                <a:srgbClr val="8EA2A9"/>
+              </a:solidFill>
+              <a:prstDash val="solid"/>
+              <a:miter lim="800000"/>
+            </a:ln>
+            <a:effectLst/>
+          </p:spPr>
+        </p:cxnSp>
+      </p:grpSp>
+      <p:sp>
+        <p:nvSpPr>
+          <p:cNvPr id="110" name="文本框 109"/>
+          <p:cNvSpPr txBox="1"/>
+          <p:nvPr/>
+        </p:nvSpPr>
+        <p:spPr>
+          <a:xfrm>
+            <a:off x="1503021" y="4783280"/>
+            <a:ext cx="798693" cy="521970"/>
+          </a:xfrm>
+          <a:prstGeom prst="rect">
+            <a:avLst/>
+          </a:prstGeom>
+          <a:noFill/>
+        </p:spPr>
+        <p:txBody>
+          <a:bodyPr wrap="square" rtlCol="0">
+            <a:spAutoFit/>
+          </a:bodyPr>
+          <a:lstStyle/>
+          <a:p>
+            <a:r>
+              <a:rPr lang="en-US" altLang="zh-CN" sz="2800" b="1" dirty="0">
+                <a:gradFill flip="none" rotWithShape="1">
+                  <a:gsLst>
+                    <a:gs pos="0">
+                      <a:srgbClr val="AD053D">
+                        <a:alpha val="0"/>
+                      </a:srgbClr>
+                    </a:gs>
+                    <a:gs pos="100000">
+                      <a:srgbClr val="AD053D"/>
+                    </a:gs>
+                  </a:gsLst>
+                  <a:lin ang="16200000" scaled="1"/>
+                  <a:tileRect/>
+                </a:gradFill>
+                <a:latin typeface="Arial" panose="020B0604020202020204"/>
+                <a:ea typeface="微软雅黑" panose="020B0503020204020204" pitchFamily="34" charset="-122"/>
+              </a:rPr>
+              <a:t>05</a:t>
+            </a:r>
+            <a:endParaRPr lang="zh-CN" altLang="en-US" sz="2800" b="1" dirty="0">
+              <a:gradFill flip="none" rotWithShape="1">
+                <a:gsLst>
+                  <a:gs pos="0">
+                    <a:srgbClr val="AD053D">
+                      <a:alpha val="0"/>
+                    </a:srgbClr>
+                  </a:gs>
+                  <a:gs pos="100000">
+                    <a:srgbClr val="AD053D"/>
+                  </a:gs>
+                </a:gsLst>
+                <a:lin ang="16200000" scaled="1"/>
+                <a:tileRect/>
+              </a:gradFill>
+              <a:latin typeface="Arial" panose="020B0604020202020204"/>
+              <a:ea typeface="微软雅黑" panose="020B0503020204020204" pitchFamily="34" charset="-122"/>
+            </a:endParaRPr>
+          </a:p>
+        </p:txBody>
+      </p:sp>
+      <p:grpSp>
+        <p:nvGrpSpPr>
+          <p:cNvPr id="111" name="组合 110"/>
+          <p:cNvGrpSpPr/>
+          <p:nvPr/>
+        </p:nvGrpSpPr>
+        <p:grpSpPr>
+          <a:xfrm>
+            <a:off x="1452939" y="4083077"/>
+            <a:ext cx="4077153" cy="73789"/>
+            <a:chOff x="10228870" y="-1876245"/>
+            <a:chExt cx="1109599" cy="49098"/>
+          </a:xfrm>
+        </p:grpSpPr>
+        <p:cxnSp>
+          <p:nvCxnSpPr>
+            <p:cNvPr id="112" name="直接连接符 111"/>
+            <p:cNvCxnSpPr/>
+            <p:nvPr/>
+          </p:nvCxnSpPr>
+          <p:spPr>
+            <a:xfrm>
+              <a:off x="10228870" y="-1827147"/>
+              <a:ext cx="208749" cy="0"/>
+            </a:xfrm>
+            <a:prstGeom prst="line">
+              <a:avLst/>
+            </a:prstGeom>
+            <a:noFill/>
+            <a:ln w="38100" cap="rnd" cmpd="sng" algn="ctr">
+              <a:gradFill flip="none" rotWithShape="1">
+                <a:gsLst>
+                  <a:gs pos="0">
+                    <a:srgbClr val="8EA2A9">
+                      <a:alpha val="0"/>
+                    </a:srgbClr>
+                  </a:gs>
+                  <a:gs pos="100000">
+                    <a:srgbClr val="8EA2A9"/>
+                  </a:gs>
+                </a:gsLst>
+                <a:lin ang="0" scaled="1"/>
+                <a:tileRect/>
+              </a:gradFill>
+              <a:prstDash val="solid"/>
+              <a:round/>
+            </a:ln>
+            <a:effectLst/>
+          </p:spPr>
+        </p:cxnSp>
+        <p:cxnSp>
+          <p:nvCxnSpPr>
+            <p:cNvPr id="113" name="直接连接符 112"/>
+            <p:cNvCxnSpPr/>
+            <p:nvPr/>
+          </p:nvCxnSpPr>
+          <p:spPr>
+            <a:xfrm>
+              <a:off x="10273345" y="-1876245"/>
+              <a:ext cx="1065124" cy="0"/>
+            </a:xfrm>
+            <a:prstGeom prst="line">
+              <a:avLst/>
+            </a:prstGeom>
+            <a:noFill/>
+            <a:ln w="38100" cap="rnd" cmpd="sng" algn="ctr">
+              <a:gradFill flip="none" rotWithShape="1">
+                <a:gsLst>
+                  <a:gs pos="0">
+                    <a:srgbClr val="AD053D">
+                      <a:alpha val="0"/>
+                    </a:srgbClr>
+                  </a:gs>
+                  <a:gs pos="100000">
+                    <a:srgbClr val="AD053D"/>
+                  </a:gs>
+                </a:gsLst>
+                <a:lin ang="0" scaled="1"/>
+                <a:tileRect/>
+              </a:gradFill>
+              <a:prstDash val="solid"/>
+              <a:round/>
+            </a:ln>
+            <a:effectLst/>
+          </p:spPr>
+        </p:cxnSp>
+      </p:grpSp>
+      <p:grpSp>
+        <p:nvGrpSpPr>
+          <p:cNvPr id="114" name="组合 113"/>
+          <p:cNvGrpSpPr/>
+          <p:nvPr/>
+        </p:nvGrpSpPr>
+        <p:grpSpPr>
+          <a:xfrm>
+            <a:off x="1534854" y="5380382"/>
+            <a:ext cx="4077153" cy="73789"/>
+            <a:chOff x="10228870" y="-1876245"/>
+            <a:chExt cx="1109599" cy="49098"/>
+          </a:xfrm>
+        </p:grpSpPr>
+        <p:cxnSp>
+          <p:nvCxnSpPr>
+            <p:cNvPr id="115" name="直接连接符 114"/>
+            <p:cNvCxnSpPr/>
+            <p:nvPr/>
+          </p:nvCxnSpPr>
+          <p:spPr>
+            <a:xfrm>
+              <a:off x="10228870" y="-1827147"/>
+              <a:ext cx="208749" cy="0"/>
+            </a:xfrm>
+            <a:prstGeom prst="line">
+              <a:avLst/>
+            </a:prstGeom>
+            <a:noFill/>
+            <a:ln w="38100" cap="rnd" cmpd="sng" algn="ctr">
+              <a:gradFill flip="none" rotWithShape="1">
+                <a:gsLst>
+                  <a:gs pos="0">
+                    <a:srgbClr val="8EA2A9">
+                      <a:alpha val="0"/>
+                    </a:srgbClr>
+                  </a:gs>
+                  <a:gs pos="100000">
+                    <a:srgbClr val="8EA2A9"/>
+                  </a:gs>
+                </a:gsLst>
+                <a:lin ang="0" scaled="1"/>
+                <a:tileRect/>
+              </a:gradFill>
+              <a:prstDash val="solid"/>
+              <a:round/>
+            </a:ln>
+            <a:effectLst/>
+          </p:spPr>
+        </p:cxnSp>
+        <p:cxnSp>
+          <p:nvCxnSpPr>
+            <p:cNvPr id="116" name="直接连接符 115"/>
+            <p:cNvCxnSpPr/>
+            <p:nvPr/>
+          </p:nvCxnSpPr>
+          <p:spPr>
+            <a:xfrm>
+              <a:off x="10273345" y="-1876245"/>
+              <a:ext cx="1065124" cy="0"/>
+            </a:xfrm>
+            <a:prstGeom prst="line">
+              <a:avLst/>
+            </a:prstGeom>
+            <a:noFill/>
+            <a:ln w="38100" cap="rnd" cmpd="sng" algn="ctr">
+              <a:gradFill flip="none" rotWithShape="1">
+                <a:gsLst>
+                  <a:gs pos="0">
+                    <a:srgbClr val="AD053D">
+                      <a:alpha val="0"/>
+                    </a:srgbClr>
+                  </a:gs>
+                  <a:gs pos="100000">
+                    <a:srgbClr val="AD053D"/>
+                  </a:gs>
+                </a:gsLst>
+                <a:lin ang="0" scaled="1"/>
+                <a:tileRect/>
+              </a:gradFill>
+              <a:prstDash val="solid"/>
+              <a:round/>
+            </a:ln>
+            <a:effectLst/>
+          </p:spPr>
+        </p:cxnSp>
+      </p:grpSp>
+      <p:sp>
+        <p:nvSpPr>
+          <p:cNvPr id="117" name="文本框 116"/>
+          <p:cNvSpPr txBox="1"/>
+          <p:nvPr/>
+        </p:nvSpPr>
+        <p:spPr>
+          <a:xfrm>
+            <a:off x="1518896" y="3435810"/>
+            <a:ext cx="798693" cy="523220"/>
+          </a:xfrm>
+          <a:prstGeom prst="rect">
+            <a:avLst/>
+          </a:prstGeom>
+          <a:noFill/>
+        </p:spPr>
+        <p:txBody>
+          <a:bodyPr wrap="square" rtlCol="0">
+            <a:spAutoFit/>
+          </a:bodyPr>
+          <a:lstStyle/>
+          <a:p>
+            <a:r>
+              <a:rPr lang="en-US" altLang="zh-CN" sz="2800" b="1" dirty="0">
+                <a:gradFill flip="none" rotWithShape="1">
+                  <a:gsLst>
+                    <a:gs pos="0">
+                      <a:srgbClr val="AD053D">
+                        <a:alpha val="0"/>
+                      </a:srgbClr>
+                    </a:gs>
+                    <a:gs pos="100000">
+                      <a:srgbClr val="AD053D"/>
+                    </a:gs>
+                  </a:gsLst>
+                  <a:lin ang="16200000" scaled="1"/>
+                  <a:tileRect/>
+                </a:gradFill>
+                <a:latin typeface="Arial" panose="020B0604020202020204"/>
+                <a:ea typeface="微软雅黑" panose="020B0503020204020204" pitchFamily="34" charset="-122"/>
+              </a:rPr>
+              <a:t>03</a:t>
+            </a:r>
+            <a:endParaRPr lang="zh-CN" altLang="en-US" sz="2800" b="1" dirty="0">
+              <a:gradFill flip="none" rotWithShape="1">
+                <a:gsLst>
+                  <a:gs pos="0">
+                    <a:srgbClr val="AD053D">
+                      <a:alpha val="0"/>
+                    </a:srgbClr>
+                  </a:gs>
+                  <a:gs pos="100000">
+                    <a:srgbClr val="AD053D"/>
+                  </a:gs>
+                </a:gsLst>
+                <a:lin ang="16200000" scaled="1"/>
+                <a:tileRect/>
+              </a:gradFill>
+              <a:latin typeface="Arial" panose="020B0604020202020204"/>
+              <a:ea typeface="微软雅黑" panose="020B0503020204020204" pitchFamily="34" charset="-122"/>
+            </a:endParaRPr>
+          </a:p>
+        </p:txBody>
+      </p:sp>
+      <p:grpSp>
+        <p:nvGrpSpPr>
+          <p:cNvPr id="118" name="组合 117"/>
+          <p:cNvGrpSpPr/>
+          <p:nvPr/>
+        </p:nvGrpSpPr>
+        <p:grpSpPr>
+          <a:xfrm>
+            <a:off x="6834564" y="4083077"/>
+            <a:ext cx="4077153" cy="73789"/>
+            <a:chOff x="10228870" y="-1876245"/>
+            <a:chExt cx="1109599" cy="49098"/>
+          </a:xfrm>
+        </p:grpSpPr>
+        <p:cxnSp>
+          <p:nvCxnSpPr>
+            <p:cNvPr id="119" name="直接连接符 118"/>
+            <p:cNvCxnSpPr/>
+            <p:nvPr/>
+          </p:nvCxnSpPr>
+          <p:spPr>
+            <a:xfrm>
+              <a:off x="10228870" y="-1827147"/>
+              <a:ext cx="208749" cy="0"/>
+            </a:xfrm>
+            <a:prstGeom prst="line">
+              <a:avLst/>
+            </a:prstGeom>
+            <a:noFill/>
+            <a:ln w="38100" cap="rnd" cmpd="sng" algn="ctr">
+              <a:gradFill flip="none" rotWithShape="1">
+                <a:gsLst>
+                  <a:gs pos="0">
+                    <a:srgbClr val="8EA2A9">
+                      <a:alpha val="0"/>
+                    </a:srgbClr>
+                  </a:gs>
+                  <a:gs pos="100000">
+                    <a:srgbClr val="8EA2A9"/>
+                  </a:gs>
+                </a:gsLst>
+                <a:lin ang="0" scaled="1"/>
+                <a:tileRect/>
+              </a:gradFill>
+              <a:prstDash val="solid"/>
+              <a:round/>
+            </a:ln>
+            <a:effectLst/>
+          </p:spPr>
+        </p:cxnSp>
+        <p:cxnSp>
+          <p:nvCxnSpPr>
+            <p:cNvPr id="120" name="直接连接符 119"/>
+            <p:cNvCxnSpPr/>
+            <p:nvPr/>
+          </p:nvCxnSpPr>
+          <p:spPr>
+            <a:xfrm>
+              <a:off x="10273345" y="-1876245"/>
+              <a:ext cx="1065124" cy="0"/>
+            </a:xfrm>
+            <a:prstGeom prst="line">
+              <a:avLst/>
+            </a:prstGeom>
+            <a:noFill/>
+            <a:ln w="38100" cap="rnd" cmpd="sng" algn="ctr">
+              <a:gradFill flip="none" rotWithShape="1">
+                <a:gsLst>
+                  <a:gs pos="0">
+                    <a:srgbClr val="AD053D">
+                      <a:alpha val="0"/>
+                    </a:srgbClr>
+                  </a:gs>
+                  <a:gs pos="100000">
+                    <a:srgbClr val="AD053D"/>
+                  </a:gs>
+                </a:gsLst>
+                <a:lin ang="0" scaled="1"/>
+                <a:tileRect/>
+              </a:gradFill>
+              <a:prstDash val="solid"/>
+              <a:round/>
+            </a:ln>
+            <a:effectLst/>
+          </p:spPr>
+        </p:cxnSp>
+      </p:grpSp>
+      <p:sp>
+        <p:nvSpPr>
+          <p:cNvPr id="121" name="文本框 120"/>
+          <p:cNvSpPr txBox="1"/>
+          <p:nvPr/>
+        </p:nvSpPr>
+        <p:spPr>
+          <a:xfrm>
+            <a:off x="6834481" y="3488515"/>
+            <a:ext cx="798693" cy="521970"/>
+          </a:xfrm>
+          <a:prstGeom prst="rect">
+            <a:avLst/>
+          </a:prstGeom>
+          <a:noFill/>
+        </p:spPr>
+        <p:txBody>
+          <a:bodyPr wrap="square" rtlCol="0">
+            <a:spAutoFit/>
+          </a:bodyPr>
+          <a:lstStyle/>
+          <a:p>
+            <a:r>
+              <a:rPr lang="en-US" altLang="zh-CN" sz="2800" b="1" dirty="0">
+                <a:gradFill flip="none" rotWithShape="1">
+                  <a:gsLst>
+                    <a:gs pos="0">
+                      <a:srgbClr val="AD053D">
+                        <a:alpha val="0"/>
+                      </a:srgbClr>
+                    </a:gs>
+                    <a:gs pos="100000">
+                      <a:srgbClr val="AD053D"/>
+                    </a:gs>
+                  </a:gsLst>
+                  <a:lin ang="16200000" scaled="1"/>
+                  <a:tileRect/>
+                </a:gradFill>
+                <a:latin typeface="Arial" panose="020B0604020202020204"/>
+                <a:ea typeface="微软雅黑" panose="020B0503020204020204" pitchFamily="34" charset="-122"/>
+              </a:rPr>
+              <a:t>04</a:t>
+            </a:r>
+            <a:endParaRPr lang="zh-CN" altLang="en-US" sz="2800" b="1" dirty="0">
+              <a:gradFill flip="none" rotWithShape="1">
+                <a:gsLst>
+                  <a:gs pos="0">
+                    <a:srgbClr val="AD053D">
+                      <a:alpha val="0"/>
+                    </a:srgbClr>
+                  </a:gs>
+                  <a:gs pos="100000">
+                    <a:srgbClr val="AD053D"/>
+                  </a:gs>
+                </a:gsLst>
+                <a:lin ang="16200000" scaled="1"/>
+                <a:tileRect/>
+              </a:gradFill>
+              <a:latin typeface="Arial" panose="020B0604020202020204"/>
+              <a:ea typeface="微软雅黑" panose="020B0503020204020204" pitchFamily="34" charset="-122"/>
+            </a:endParaRPr>
+          </a:p>
+        </p:txBody>
+      </p:sp>
+      <p:sp>
+        <p:nvSpPr>
+          <p:cNvPr id="7" name="文本占位符 1"/>
+          <p:cNvSpPr txBox="1"/>
+          <p:nvPr/>
+        </p:nvSpPr>
+        <p:spPr>
+          <a:xfrm>
+            <a:off x="2124472" y="2306108"/>
+            <a:ext cx="3587261" cy="469616"/>
+          </a:xfrm>
+          <a:prstGeom prst="rect">
+            <a:avLst/>
+          </a:prstGeom>
+          <a:noFill/>
+        </p:spPr>
+        <p:txBody>
+          <a:bodyPr vert="horz" wrap="square" lIns="91440" tIns="45720" rIns="91440" bIns="45720" rtlCol="0">
+            <a:spAutoFit/>
+          </a:bodyPr>
+          <a:lstStyle>
+            <a:defPPr>
+              <a:defRPr lang="zh-CN"/>
+            </a:defPPr>
+            <a:lvl1pPr marR="0" indent="0">
+              <a:lnSpc>
+                <a:spcPct val="110000"/>
+              </a:lnSpc>
+              <a:spcBef>
+                <a:spcPts val="0"/>
+              </a:spcBef>
+              <a:spcAft>
+                <a:spcPts val="0"/>
+              </a:spcAft>
+              <a:buFont typeface="Arial" panose="020B0604020202020204" pitchFamily="34" charset="0"/>
+              <a:buNone/>
+              <a:defRPr sz="2400" spc="100">
+                <a:solidFill>
+                  <a:srgbClr val="B8C4C9"/>
+                </a:solidFill>
+                <a:ea typeface="微软雅黑" panose="020B0503020204020204" pitchFamily="34" charset="-122"/>
+              </a:defRPr>
+            </a:lvl1pPr>
+            <a:lvl2pPr marL="685800" indent="-228600">
+              <a:lnSpc>
+                <a:spcPct val="90000"/>
+              </a:lnSpc>
+              <a:spcBef>
+                <a:spcPts val="500"/>
+              </a:spcBef>
+              <a:buFont typeface="Arial" panose="020B0604020202020204" pitchFamily="34" charset="0"/>
+              <a:buChar char="•"/>
+            </a:lvl2pPr>
+            <a:lvl3pPr marL="1143000" indent="-228600">
+              <a:lnSpc>
+                <a:spcPct val="90000"/>
+              </a:lnSpc>
+              <a:spcBef>
+                <a:spcPts val="500"/>
+              </a:spcBef>
+              <a:buFont typeface="Arial" panose="020B0604020202020204" pitchFamily="34" charset="0"/>
+              <a:buChar char="•"/>
+            </a:lvl3pPr>
+            <a:lvl4pPr marL="1600200" indent="-228600">
+              <a:lnSpc>
+                <a:spcPct val="90000"/>
+              </a:lnSpc>
+              <a:spcBef>
+                <a:spcPts val="500"/>
+              </a:spcBef>
+              <a:buFont typeface="Arial" panose="020B0604020202020204" pitchFamily="34" charset="0"/>
+              <a:buChar char="•"/>
+            </a:lvl4pPr>
+            <a:lvl5pPr marL="2057400" indent="-228600">
+              <a:lnSpc>
+                <a:spcPct val="90000"/>
+              </a:lnSpc>
+              <a:spcBef>
+                <a:spcPts val="500"/>
+              </a:spcBef>
+              <a:buFont typeface="Arial" panose="020B0604020202020204" pitchFamily="34" charset="0"/>
+              <a:buChar char="•"/>
+            </a:lvl5pPr>
+            <a:lvl6pPr marL="2514600" indent="-228600">
+              <a:lnSpc>
+                <a:spcPct val="90000"/>
+              </a:lnSpc>
+              <a:spcBef>
+                <a:spcPts val="500"/>
+              </a:spcBef>
+              <a:buFont typeface="Arial" panose="020B0604020202020204" pitchFamily="34" charset="0"/>
+              <a:buChar char="•"/>
+            </a:lvl6pPr>
+            <a:lvl7pPr marL="2971800" indent="-228600">
+              <a:lnSpc>
+                <a:spcPct val="90000"/>
+              </a:lnSpc>
+              <a:spcBef>
+                <a:spcPts val="500"/>
+              </a:spcBef>
+              <a:buFont typeface="Arial" panose="020B0604020202020204" pitchFamily="34" charset="0"/>
+              <a:buChar char="•"/>
+            </a:lvl7pPr>
+            <a:lvl8pPr marL="3429000" indent="-228600">
+              <a:lnSpc>
+                <a:spcPct val="90000"/>
+              </a:lnSpc>
+              <a:spcBef>
+                <a:spcPts val="500"/>
+              </a:spcBef>
+              <a:buFont typeface="Arial" panose="020B0604020202020204" pitchFamily="34" charset="0"/>
+              <a:buChar char="•"/>
+            </a:lvl8pPr>
+            <a:lvl9pPr marL="3886200" indent="-228600">
+              <a:lnSpc>
+                <a:spcPct val="90000"/>
+              </a:lnSpc>
+              <a:spcBef>
+                <a:spcPts val="500"/>
+              </a:spcBef>
+              <a:buFont typeface="Arial" panose="020B0604020202020204" pitchFamily="34" charset="0"/>
+              <a:buChar char="•"/>
+            </a:lvl9pPr>
+          </a:lstStyle>
+          <a:p>
+            <a:r>
+              <a:rPr lang="zh-CN" altLang="en-US" dirty="0">
+                <a:solidFill>
+                  <a:srgbClr val="AD043D"/>
+                </a:solidFill>
+              </a:rPr>
+              <a:t>赛意公司简介</a:t>
+            </a:r>
+          </a:p>
+        </p:txBody>
+      </p:sp>
+      <p:sp>
+        <p:nvSpPr>
+          <p:cNvPr id="8" name="文本占位符 4"/>
+          <p:cNvSpPr txBox="1"/>
+          <p:nvPr/>
+        </p:nvSpPr>
+        <p:spPr>
+          <a:xfrm>
+            <a:off x="7426888" y="2342710"/>
+            <a:ext cx="3587261" cy="469616"/>
+          </a:xfrm>
+          <a:prstGeom prst="rect">
+            <a:avLst/>
+          </a:prstGeom>
+          <a:noFill/>
+        </p:spPr>
+        <p:txBody>
+          <a:bodyPr vert="horz" wrap="square" lIns="91440" tIns="45720" rIns="91440" bIns="45720" rtlCol="0">
+            <a:spAutoFit/>
+          </a:bodyPr>
+          <a:lstStyle>
+            <a:lvl1pPr marL="0" marR="0" indent="0" algn="l" defTabSz="914400" rtl="0" eaLnBrk="1" latinLnBrk="0" hangingPunct="1">
+              <a:lnSpc>
+                <a:spcPct val="110000"/>
+              </a:lnSpc>
+              <a:spcBef>
+                <a:spcPts val="0"/>
+              </a:spcBef>
+              <a:spcAft>
+                <a:spcPts val="0"/>
+              </a:spcAft>
+              <a:buFont typeface="Arial" panose="020B0604020202020204" pitchFamily="34" charset="0"/>
+              <a:buChar char="•"/>
+              <a:defRPr lang="zh-CN" altLang="en-US" sz="2400" kern="1200" spc="100" smtClean="0">
+                <a:solidFill>
+                  <a:schemeClr val="accent2"/>
+                </a:solidFill>
+                <a:latin typeface="+mn-lt"/>
+                <a:ea typeface="+mn-ea"/>
+                <a:cs typeface="+mn-cs"/>
+              </a:defRPr>
+            </a:lvl1pPr>
+            <a:lvl2pPr marL="685800" indent="-228600" algn="l" defTabSz="914400" rtl="0" eaLnBrk="1" latinLnBrk="0" hangingPunct="1">
+              <a:lnSpc>
+                <a:spcPct val="90000"/>
+              </a:lnSpc>
+              <a:spcBef>
+                <a:spcPts val="500"/>
+              </a:spcBef>
+              <a:buFont typeface="Arial" panose="020B0604020202020204" pitchFamily="34" charset="0"/>
+              <a:buChar char="•"/>
+              <a:defRPr lang="zh-CN" altLang="en-US" sz="1800" kern="1200" smtClean="0">
+                <a:solidFill>
+                  <a:schemeClr val="tx1"/>
+                </a:solidFill>
+                <a:latin typeface="+mn-lt"/>
+                <a:ea typeface="+mn-ea"/>
+                <a:cs typeface="+mn-cs"/>
+              </a:defRPr>
+            </a:lvl2pPr>
+            <a:lvl3pPr marL="1143000" indent="-228600" algn="l" defTabSz="914400" rtl="0" eaLnBrk="1" latinLnBrk="0" hangingPunct="1">
+              <a:lnSpc>
+                <a:spcPct val="90000"/>
+              </a:lnSpc>
+              <a:spcBef>
+                <a:spcPts val="500"/>
+              </a:spcBef>
+              <a:buFont typeface="Arial" panose="020B0604020202020204" pitchFamily="34" charset="0"/>
+              <a:buChar char="•"/>
+              <a:defRPr lang="zh-CN" altLang="en-US" sz="1800" kern="1200" smtClean="0">
+                <a:solidFill>
+                  <a:schemeClr val="tx1"/>
+                </a:solidFill>
+                <a:latin typeface="+mn-lt"/>
+                <a:ea typeface="+mn-ea"/>
+                <a:cs typeface="+mn-cs"/>
+              </a:defRPr>
+            </a:lvl3pPr>
+            <a:lvl4pPr marL="1600200" indent="-228600" algn="l" defTabSz="914400" rtl="0" eaLnBrk="1" latinLnBrk="0" hangingPunct="1">
+              <a:lnSpc>
+                <a:spcPct val="90000"/>
+              </a:lnSpc>
+              <a:spcBef>
+                <a:spcPts val="500"/>
+              </a:spcBef>
+              <a:buFont typeface="Arial" panose="020B0604020202020204" pitchFamily="34" charset="0"/>
+              <a:buChar char="•"/>
+              <a:defRPr lang="zh-CN" altLang="en-US" sz="1800" kern="1200" smtClean="0">
+                <a:solidFill>
+                  <a:schemeClr val="tx1"/>
+                </a:solidFill>
+                <a:latin typeface="+mn-lt"/>
+                <a:ea typeface="+mn-ea"/>
+                <a:cs typeface="+mn-cs"/>
+              </a:defRPr>
+            </a:lvl4pPr>
+            <a:lvl5pPr marL="2057400" indent="-228600" algn="l" defTabSz="914400" rtl="0" eaLnBrk="1" latinLnBrk="0" hangingPunct="1">
+              <a:lnSpc>
+                <a:spcPct val="90000"/>
+              </a:lnSpc>
+              <a:spcBef>
+                <a:spcPts val="500"/>
+              </a:spcBef>
+              <a:buFont typeface="Arial" panose="020B0604020202020204" pitchFamily="34" charset="0"/>
+              <a:buChar char="•"/>
+              <a:defRPr lang="zh-CN" altLang="en-US" sz="1800" kern="1200">
+                <a:solidFill>
+                  <a:schemeClr val="tx1"/>
+                </a:solidFill>
+                <a:latin typeface="+mn-lt"/>
+                <a:ea typeface="+mn-ea"/>
+                <a:cs typeface="+mn-cs"/>
+              </a:defRPr>
+            </a:lvl5pPr>
+            <a:lvl6pPr marL="2514600" indent="-228600" algn="l" defTabSz="914400" rtl="0" eaLnBrk="1" latinLnBrk="0" hangingPunct="1">
+              <a:lnSpc>
+                <a:spcPct val="90000"/>
+              </a:lnSpc>
+              <a:spcBef>
+                <a:spcPts val="500"/>
+              </a:spcBef>
+              <a:buFont typeface="Arial" panose="020B0604020202020204" pitchFamily="34" charset="0"/>
+              <a:buChar char="•"/>
+              <a:defRPr sz="1800" kern="1200">
+                <a:solidFill>
+                  <a:schemeClr val="tx1"/>
+                </a:solidFill>
+                <a:latin typeface="+mn-lt"/>
+                <a:ea typeface="+mn-ea"/>
+                <a:cs typeface="+mn-cs"/>
+              </a:defRPr>
+            </a:lvl6pPr>
+            <a:lvl7pPr marL="2971800" indent="-228600" algn="l" defTabSz="914400" rtl="0" eaLnBrk="1" latinLnBrk="0" hangingPunct="1">
+              <a:lnSpc>
+                <a:spcPct val="90000"/>
+              </a:lnSpc>
+              <a:spcBef>
+                <a:spcPts val="500"/>
+              </a:spcBef>
+              <a:buFont typeface="Arial" panose="020B0604020202020204" pitchFamily="34" charset="0"/>
+              <a:buChar char="•"/>
+              <a:defRPr sz="1800" kern="1200">
+                <a:solidFill>
+                  <a:schemeClr val="tx1"/>
+                </a:solidFill>
+                <a:latin typeface="+mn-lt"/>
+                <a:ea typeface="+mn-ea"/>
+                <a:cs typeface="+mn-cs"/>
+              </a:defRPr>
+            </a:lvl7pPr>
+            <a:lvl8pPr marL="3429000" indent="-228600" algn="l" defTabSz="914400" rtl="0" eaLnBrk="1" latinLnBrk="0" hangingPunct="1">
+              <a:lnSpc>
+                <a:spcPct val="90000"/>
+              </a:lnSpc>
+              <a:spcBef>
+                <a:spcPts val="500"/>
+              </a:spcBef>
+              <a:buFont typeface="Arial" panose="020B0604020202020204" pitchFamily="34" charset="0"/>
+              <a:buChar char="•"/>
+              <a:defRPr sz="1800" kern="1200">
+                <a:solidFill>
+                  <a:schemeClr val="tx1"/>
+                </a:solidFill>
+                <a:latin typeface="+mn-lt"/>
+                <a:ea typeface="+mn-ea"/>
+                <a:cs typeface="+mn-cs"/>
+              </a:defRPr>
+            </a:lvl8pPr>
+            <a:lvl9pPr marL="3886200" indent="-228600" algn="l" defTabSz="914400" rtl="0" eaLnBrk="1" latinLnBrk="0" hangingPunct="1">
+              <a:lnSpc>
+                <a:spcPct val="90000"/>
+              </a:lnSpc>
+              <a:spcBef>
+                <a:spcPts val="500"/>
+              </a:spcBef>
+              <a:buFont typeface="Arial" panose="020B0604020202020204" pitchFamily="34" charset="0"/>
+              <a:buChar char="•"/>
+              <a:defRPr sz="1800" kern="1200">
+                <a:solidFill>
+                  <a:schemeClr val="tx1"/>
+                </a:solidFill>
+                <a:latin typeface="+mn-lt"/>
+                <a:ea typeface="+mn-ea"/>
+                <a:cs typeface="+mn-cs"/>
+              </a:defRPr>
+            </a:lvl9pPr>
+          </a:lstStyle>
+          <a:p>
+            <a:pPr>
+              <a:buNone/>
+              <a:defRPr/>
+            </a:pPr>
+            <a:r>
+              <a:rPr lang="zh-CN" altLang="en-US" dirty="0">
+                <a:solidFill>
+                  <a:srgbClr val="B8C4C9"/>
+                </a:solidFill>
+                <a:ea typeface="微软雅黑" panose="020B0503020204020204" pitchFamily="34" charset="-122"/>
+              </a:rPr>
+              <a:t>需求理解与整体建议</a:t>
+            </a:r>
+            <a:endParaRPr kumimoji="0" lang="zh-CN" altLang="en-US" sz="2400" b="0" i="0" u="none" strike="noStrike" kern="1200" cap="none" spc="100" normalizeH="0" baseline="0" noProof="0" dirty="0">
+              <a:ln>
+                <a:noFill/>
+              </a:ln>
+              <a:solidFill>
+                <a:srgbClr val="8EA2A9"/>
+              </a:solidFill>
+              <a:effectLst/>
+              <a:uLnTx/>
+              <a:uFillTx/>
+              <a:latin typeface="Arial" panose="020B0604020202020204"/>
+              <a:ea typeface="微软雅黑" panose="020B0503020204020204" pitchFamily="34" charset="-122"/>
+              <a:cs typeface="+mn-cs"/>
+            </a:endParaRPr>
+          </a:p>
+        </p:txBody>
+      </p:sp>
+      <p:grpSp>
+        <p:nvGrpSpPr>
+          <p:cNvPr id="9" name="组合 110"/>
+          <p:cNvGrpSpPr/>
+          <p:nvPr/>
+        </p:nvGrpSpPr>
+        <p:grpSpPr>
+          <a:xfrm>
+            <a:off x="1452939" y="2926509"/>
+            <a:ext cx="4077153" cy="73789"/>
+            <a:chOff x="10228870" y="-1876245"/>
+            <a:chExt cx="1109599" cy="49098"/>
+          </a:xfrm>
+        </p:grpSpPr>
+        <p:cxnSp>
+          <p:nvCxnSpPr>
+            <p:cNvPr id="10" name="直接连接符 111"/>
+            <p:cNvCxnSpPr/>
+            <p:nvPr/>
+          </p:nvCxnSpPr>
+          <p:spPr>
+            <a:xfrm>
+              <a:off x="10228870" y="-1827147"/>
+              <a:ext cx="208749" cy="0"/>
+            </a:xfrm>
+            <a:prstGeom prst="line">
+              <a:avLst/>
+            </a:prstGeom>
+            <a:noFill/>
+            <a:ln w="38100" cap="rnd" cmpd="sng" algn="ctr">
+              <a:gradFill flip="none" rotWithShape="1">
+                <a:gsLst>
+                  <a:gs pos="0">
+                    <a:srgbClr val="8EA2A9">
+                      <a:alpha val="0"/>
+                    </a:srgbClr>
+                  </a:gs>
+                  <a:gs pos="100000">
+                    <a:srgbClr val="8EA2A9"/>
+                  </a:gs>
+                </a:gsLst>
+                <a:lin ang="0" scaled="1"/>
+                <a:tileRect/>
+              </a:gradFill>
+              <a:prstDash val="solid"/>
+              <a:round/>
+            </a:ln>
+            <a:effectLst/>
+          </p:spPr>
+        </p:cxnSp>
+        <p:cxnSp>
+          <p:nvCxnSpPr>
+            <p:cNvPr id="11" name="直接连接符 112"/>
+            <p:cNvCxnSpPr/>
+            <p:nvPr/>
+          </p:nvCxnSpPr>
+          <p:spPr>
+            <a:xfrm>
+              <a:off x="10273345" y="-1876245"/>
+              <a:ext cx="1065124" cy="0"/>
+            </a:xfrm>
+            <a:prstGeom prst="line">
+              <a:avLst/>
+            </a:prstGeom>
+            <a:noFill/>
+            <a:ln w="38100" cap="rnd" cmpd="sng" algn="ctr">
+              <a:gradFill flip="none" rotWithShape="1">
+                <a:gsLst>
+                  <a:gs pos="0">
+                    <a:srgbClr val="AD053D">
+                      <a:alpha val="0"/>
+                    </a:srgbClr>
+                  </a:gs>
+                  <a:gs pos="100000">
+                    <a:srgbClr val="AD053D"/>
+                  </a:gs>
+                </a:gsLst>
+                <a:lin ang="0" scaled="1"/>
+                <a:tileRect/>
+              </a:gradFill>
+              <a:prstDash val="solid"/>
+              <a:round/>
+            </a:ln>
+            <a:effectLst/>
+          </p:spPr>
+        </p:cxnSp>
+      </p:grpSp>
+      <p:sp>
+        <p:nvSpPr>
+          <p:cNvPr id="12" name="文本框 116"/>
+          <p:cNvSpPr txBox="1"/>
+          <p:nvPr/>
+        </p:nvSpPr>
+        <p:spPr>
+          <a:xfrm>
+            <a:off x="1518896" y="2279242"/>
+            <a:ext cx="798693" cy="523220"/>
+          </a:xfrm>
+          <a:prstGeom prst="rect">
+            <a:avLst/>
+          </a:prstGeom>
+          <a:noFill/>
+        </p:spPr>
+        <p:txBody>
+          <a:bodyPr wrap="square" rtlCol="0">
+            <a:spAutoFit/>
+          </a:bodyPr>
+          <a:lstStyle/>
+          <a:p>
+            <a:r>
+              <a:rPr lang="en-US" altLang="zh-CN" sz="2800" b="1" dirty="0">
+                <a:gradFill flip="none" rotWithShape="1">
+                  <a:gsLst>
+                    <a:gs pos="0">
+                      <a:srgbClr val="AD053D">
+                        <a:alpha val="0"/>
+                      </a:srgbClr>
+                    </a:gs>
+                    <a:gs pos="100000">
+                      <a:srgbClr val="AD053D"/>
+                    </a:gs>
+                  </a:gsLst>
+                  <a:lin ang="16200000" scaled="1"/>
+                  <a:tileRect/>
+                </a:gradFill>
+                <a:latin typeface="Arial" panose="020B0604020202020204"/>
+                <a:ea typeface="微软雅黑" panose="020B0503020204020204" pitchFamily="34" charset="-122"/>
+              </a:rPr>
+              <a:t>01</a:t>
+            </a:r>
+            <a:endParaRPr lang="zh-CN" altLang="en-US" sz="2800" b="1" dirty="0">
+              <a:gradFill flip="none" rotWithShape="1">
+                <a:gsLst>
+                  <a:gs pos="0">
+                    <a:srgbClr val="AD053D">
+                      <a:alpha val="0"/>
+                    </a:srgbClr>
+                  </a:gs>
+                  <a:gs pos="100000">
+                    <a:srgbClr val="AD053D"/>
+                  </a:gs>
+                </a:gsLst>
+                <a:lin ang="16200000" scaled="1"/>
+                <a:tileRect/>
+              </a:gradFill>
+              <a:latin typeface="Arial" panose="020B0604020202020204"/>
+              <a:ea typeface="微软雅黑" panose="020B0503020204020204" pitchFamily="34" charset="-122"/>
+            </a:endParaRPr>
+          </a:p>
+        </p:txBody>
+      </p:sp>
+      <p:grpSp>
+        <p:nvGrpSpPr>
+          <p:cNvPr id="13" name="组合 117"/>
+          <p:cNvGrpSpPr/>
+          <p:nvPr/>
+        </p:nvGrpSpPr>
+        <p:grpSpPr>
+          <a:xfrm>
+            <a:off x="6834564" y="2926509"/>
+            <a:ext cx="4077153" cy="73789"/>
+            <a:chOff x="10228870" y="-1876245"/>
+            <a:chExt cx="1109599" cy="49098"/>
+          </a:xfrm>
+        </p:grpSpPr>
+        <p:cxnSp>
+          <p:nvCxnSpPr>
+            <p:cNvPr id="14" name="直接连接符 118"/>
+            <p:cNvCxnSpPr/>
+            <p:nvPr/>
+          </p:nvCxnSpPr>
+          <p:spPr>
+            <a:xfrm>
+              <a:off x="10228870" y="-1827147"/>
+              <a:ext cx="208749" cy="0"/>
+            </a:xfrm>
+            <a:prstGeom prst="line">
+              <a:avLst/>
+            </a:prstGeom>
+            <a:noFill/>
+            <a:ln w="38100" cap="rnd" cmpd="sng" algn="ctr">
+              <a:gradFill flip="none" rotWithShape="1">
+                <a:gsLst>
+                  <a:gs pos="0">
+                    <a:srgbClr val="8EA2A9">
+                      <a:alpha val="0"/>
+                    </a:srgbClr>
+                  </a:gs>
+                  <a:gs pos="100000">
+                    <a:srgbClr val="8EA2A9"/>
+                  </a:gs>
+                </a:gsLst>
+                <a:lin ang="0" scaled="1"/>
+                <a:tileRect/>
+              </a:gradFill>
+              <a:prstDash val="solid"/>
+              <a:round/>
+            </a:ln>
+            <a:effectLst/>
+          </p:spPr>
+        </p:cxnSp>
+        <p:cxnSp>
+          <p:nvCxnSpPr>
+            <p:cNvPr id="15" name="直接连接符 119"/>
+            <p:cNvCxnSpPr/>
+            <p:nvPr/>
+          </p:nvCxnSpPr>
+          <p:spPr>
+            <a:xfrm>
+              <a:off x="10273345" y="-1876245"/>
+              <a:ext cx="1065124" cy="0"/>
+            </a:xfrm>
+            <a:prstGeom prst="line">
+              <a:avLst/>
+            </a:prstGeom>
+            <a:noFill/>
+            <a:ln w="38100" cap="rnd" cmpd="sng" algn="ctr">
+              <a:gradFill flip="none" rotWithShape="1">
+                <a:gsLst>
+                  <a:gs pos="0">
+                    <a:srgbClr val="AD053D">
+                      <a:alpha val="0"/>
+                    </a:srgbClr>
+                  </a:gs>
+                  <a:gs pos="100000">
+                    <a:srgbClr val="AD053D"/>
+                  </a:gs>
+                </a:gsLst>
+                <a:lin ang="0" scaled="1"/>
+                <a:tileRect/>
+              </a:gradFill>
+              <a:prstDash val="solid"/>
+              <a:round/>
+            </a:ln>
+            <a:effectLst/>
+          </p:spPr>
+        </p:cxnSp>
+      </p:grpSp>
+      <p:sp>
+        <p:nvSpPr>
+          <p:cNvPr id="16" name="文本框 120"/>
+          <p:cNvSpPr txBox="1"/>
+          <p:nvPr/>
+        </p:nvSpPr>
+        <p:spPr>
+          <a:xfrm>
+            <a:off x="6834481" y="2331947"/>
+            <a:ext cx="798693" cy="521970"/>
+          </a:xfrm>
+          <a:prstGeom prst="rect">
+            <a:avLst/>
+          </a:prstGeom>
+          <a:noFill/>
+        </p:spPr>
+        <p:txBody>
+          <a:bodyPr wrap="square" rtlCol="0">
+            <a:spAutoFit/>
+          </a:bodyPr>
+          <a:lstStyle/>
+          <a:p>
+            <a:r>
+              <a:rPr lang="en-US" altLang="zh-CN" sz="2800" b="1" dirty="0">
+                <a:gradFill flip="none" rotWithShape="1">
+                  <a:gsLst>
+                    <a:gs pos="0">
+                      <a:srgbClr val="AD053D">
+                        <a:alpha val="0"/>
+                      </a:srgbClr>
+                    </a:gs>
+                    <a:gs pos="100000">
+                      <a:srgbClr val="AD053D"/>
+                    </a:gs>
+                  </a:gsLst>
+                  <a:lin ang="16200000" scaled="1"/>
+                  <a:tileRect/>
+                </a:gradFill>
+                <a:latin typeface="Arial" panose="020B0604020202020204"/>
+                <a:ea typeface="微软雅黑" panose="020B0503020204020204" pitchFamily="34" charset="-122"/>
+              </a:rPr>
+              <a:t>02</a:t>
+            </a:r>
+            <a:endParaRPr lang="zh-CN" altLang="en-US" sz="2800" b="1" dirty="0">
+              <a:gradFill flip="none" rotWithShape="1">
+                <a:gsLst>
+                  <a:gs pos="0">
+                    <a:srgbClr val="AD053D">
+                      <a:alpha val="0"/>
+                    </a:srgbClr>
+                  </a:gs>
+                  <a:gs pos="100000">
+                    <a:srgbClr val="AD053D"/>
+                  </a:gs>
+                </a:gsLst>
+                <a:lin ang="16200000" scaled="1"/>
+                <a:tileRect/>
+              </a:gradFill>
+              <a:latin typeface="Arial" panose="020B0604020202020204"/>
+              <a:ea typeface="微软雅黑" panose="020B0503020204020204" pitchFamily="34" charset="-122"/>
+            </a:endParaRPr>
+          </a:p>
+        </p:txBody>
+      </p:sp>
     </p:spTree>
   </p:cSld>
   <p:clrMapOvr>
     <a:masterClrMapping/>
   </p:clrMapOvr>
-  <p:transition spd="slow"/>
+</p:sld>
+</file>
+
+<file path=ppt/slides/slide7.xml><?xml version="1.0" encoding="utf-8"?>
+<ns0:sld xmlns:ns0="http://schemas.openxmlformats.org/presentationml/2006/main" xmlns:ns1="http://schemas.openxmlformats.org/drawingml/2006/main" xmlns:ns2="http://schemas.microsoft.com/office/drawing/2014/main">
+  <ns0:cSld>
+    <ns0:spTree>
+      <ns0:nvGrpSpPr>
+        <ns0:cNvPr id="1" name=""/>
+        <ns0:cNvGrpSpPr/>
+        <ns0:nvPr/>
+      </ns0:nvGrpSpPr>
+      <ns0:grpSpPr/>
+      <ns0:sp>
+        <ns0:nvSpPr>
+          <ns0:cNvPr id="2" name="标题 1">
+            <ns1:extLst>
+              <ns1:ext uri="{FF2B5EF4-FFF2-40B4-BE49-F238E27FC236}">
+                <ns2:creationId id="{01767E06-9427-7B8F-F9AB-5190D68AD0E9}"/>
+              </ns1:ext>
+            </ns1:extLst>
+          </ns0:cNvPr>
+          <ns0:cNvSpPr>
+            <ns1:spLocks noGrp="1"/>
+          </ns0:cNvSpPr>
+          <ns0:nvPr>
+            <ns0:ph type="title"/>
+          </ns0:nvPr>
+        </ns0:nvSpPr>
+        <ns0:spPr>
+          <ns1:xfrm>
+            <ns1:off x="166370" y="36830"/>
+            <ns1:ext cx="10034086" cy="480060"/>
+          </ns1:xfrm>
+        </ns0:spPr>
+        <ns0:txBody>
+          <ns1:bodyPr/>
+          <ns1:lstStyle/>
+          <ns1:p>
+            <ns1:r>
+              <ns1:rPr lang="zh-CN" altLang="en-US" dirty="0">
+                <ns1:solidFill>
+                  <ns1:srgbClr val="9F2240"/>
+                </ns1:solidFill>
+                <ns1:cs typeface="+mn-ea"/>
+                <ns1:sym typeface="微软雅黑" panose="020B0503020204020204" pitchFamily="34" charset="-122"/>
+              </ns1:rPr>
+              <ns1:t>标题：</ns1:t>
+            </ns1:r>
+          </ns1:p>
+        </ns0:txBody>
+      </ns0:sp>
+    </ns0:spTree>
+  </ns0:cSld>
+  <ns0:clrMapOvr>
+    <ns1:masterClrMapping/>
+  </ns0:clrMapOvr>
+</ns0:sld>
+</file>
+
+<file path=ppt/slides/slide8.xml><?xml version="1.0" encoding="utf-8"?>
+<p:sld xmlns:a="http://schemas.openxmlformats.org/drawingml/2006/main" xmlns:p="http://schemas.openxmlformats.org/presentationml/2006/main" xmlns:r="http://schemas.openxmlformats.org/officeDocument/2006/relationships">
+  <p:cSld>
+    <p:spTree>
+      <p:nvGrpSpPr>
+        <p:cNvPr id="1" name=""/>
+        <p:cNvGrpSpPr/>
+        <p:nvPr/>
+      </p:nvGrpSpPr>
+      <p:grpSpPr/>
+      <p:sp>
+        <p:nvSpPr>
+          <p:cNvPr id="65" name="矩形 64"/>
+          <p:cNvSpPr/>
+          <p:nvPr/>
+        </p:nvSpPr>
+        <p:spPr>
+          <a:xfrm>
+            <a:off x="0" y="0"/>
+            <a:ext cx="3173449" cy="6858000"/>
+          </a:xfrm>
+          <a:prstGeom prst="rect">
+            <a:avLst/>
+          </a:prstGeom>
+          <a:solidFill>
+            <a:srgbClr val="8EA2A9"/>
+          </a:solidFill>
+          <a:ln w="12700" cap="flat" cmpd="sng" algn="ctr">
+            <a:noFill/>
+            <a:prstDash val="solid"/>
+            <a:miter lim="800000"/>
+          </a:ln>
+          <a:effectLst/>
+        </p:spPr>
+        <p:txBody>
+          <a:bodyPr rtlCol="0" anchor="ctr"/>
+          <a:lstStyle/>
+          <a:p>
+            <a:pPr marL="0" marR="0" lvl="0" indent="0" algn="ctr" defTabSz="914400" eaLnBrk="1" fontAlgn="auto" latinLnBrk="0" hangingPunct="1">
+              <a:lnSpc>
+                <a:spcPct val="100000"/>
+              </a:lnSpc>
+              <a:spcBef>
+                <a:spcPts val="0"/>
+              </a:spcBef>
+              <a:spcAft>
+                <a:spcPts val="0"/>
+              </a:spcAft>
+              <a:buClrTx/>
+              <a:buSzTx/>
+              <a:buFontTx/>
+              <a:buNone/>
+              <a:defRPr/>
+            </a:pPr>
+            <a:endParaRPr kumimoji="0" lang="zh-CN" altLang="en-US" sz="1800" b="0" i="0" u="none" strike="noStrike" kern="0" cap="none" spc="0" normalizeH="0" baseline="0" noProof="0">
+              <a:ln>
+                <a:noFill/>
+              </a:ln>
+              <a:solidFill>
+                <a:srgbClr val="FFFFFF"/>
+              </a:solidFill>
+              <a:effectLst/>
+              <a:uLnTx/>
+              <a:uFillTx/>
+              <a:latin typeface="Arial" panose="020B0604020202020204"/>
+              <a:ea typeface="微软雅黑" panose="020B0503020204020204" pitchFamily="34" charset="-122"/>
+              <a:cs typeface="+mn-cs"/>
+            </a:endParaRPr>
+          </a:p>
+        </p:txBody>
+      </p:sp>
+      <p:sp>
+        <p:nvSpPr>
+          <p:cNvPr id="66" name="文本框 65"/>
+          <p:cNvSpPr txBox="1"/>
+          <p:nvPr/>
+        </p:nvSpPr>
+        <p:spPr>
+          <a:xfrm>
+            <a:off x="630515" y="606355"/>
+            <a:ext cx="1334442" cy="728661"/>
+          </a:xfrm>
+          <a:prstGeom prst="rect">
+            <a:avLst/>
+          </a:prstGeom>
+          <a:noFill/>
+        </p:spPr>
+        <p:txBody>
+          <a:bodyPr wrap="square">
+            <a:spAutoFit/>
+          </a:bodyPr>
+          <a:lstStyle/>
+          <a:p>
+            <a:pPr>
+              <a:lnSpc>
+                <a:spcPct val="110000"/>
+              </a:lnSpc>
+            </a:pPr>
+            <a:r>
+              <a:rPr lang="zh-CN" altLang="en-US" sz="4000" spc="100" dirty="0">
+                <a:solidFill>
+                  <a:srgbClr val="FFFFFF"/>
+                </a:solidFill>
+                <a:latin typeface="Arial" panose="020B0604020202020204"/>
+                <a:ea typeface="微软雅黑" panose="020B0503020204020204" pitchFamily="34" charset="-122"/>
+              </a:rPr>
+              <a:t>目录</a:t>
+            </a:r>
+            <a:endParaRPr lang="en-US" altLang="zh-CN" sz="4000" spc="100" dirty="0">
+              <a:solidFill>
+                <a:srgbClr val="FFFFFF"/>
+              </a:solidFill>
+              <a:latin typeface="Arial" panose="020B0604020202020204"/>
+              <a:ea typeface="微软雅黑" panose="020B0503020204020204" pitchFamily="34" charset="-122"/>
+            </a:endParaRPr>
+          </a:p>
+        </p:txBody>
+      </p:sp>
+      <p:sp>
+        <p:nvSpPr>
+          <p:cNvPr id="67" name="文本框 66"/>
+          <p:cNvSpPr txBox="1"/>
+          <p:nvPr/>
+        </p:nvSpPr>
+        <p:spPr>
+          <a:xfrm>
+            <a:off x="720140" y="1273953"/>
+            <a:ext cx="2029767" cy="378693"/>
+          </a:xfrm>
+          <a:prstGeom prst="rect">
+            <a:avLst/>
+          </a:prstGeom>
+          <a:noFill/>
+        </p:spPr>
+        <p:txBody>
+          <a:bodyPr wrap="square">
+            <a:spAutoFit/>
+          </a:bodyPr>
+          <a:lstStyle/>
+          <a:p>
+            <a:pPr>
+              <a:lnSpc>
+                <a:spcPct val="110000"/>
+              </a:lnSpc>
+            </a:pPr>
+            <a:r>
+              <a:rPr lang="en-US" altLang="zh-CN" spc="100" dirty="0">
+                <a:solidFill>
+                  <a:srgbClr val="FFFFFF"/>
+                </a:solidFill>
+                <a:latin typeface="Arial" panose="020B0604020202020204"/>
+                <a:ea typeface="微软雅黑" panose="020B0503020204020204" pitchFamily="34" charset="-122"/>
+              </a:rPr>
+              <a:t>Content</a:t>
+            </a:r>
+          </a:p>
+        </p:txBody>
+      </p:sp>
+      <p:cxnSp>
+        <p:nvCxnSpPr>
+          <p:cNvPr id="68" name="直接连接符 67"/>
+          <p:cNvCxnSpPr/>
+          <p:nvPr/>
+        </p:nvCxnSpPr>
+        <p:spPr>
+          <a:xfrm>
+            <a:off x="10827696" y="5646150"/>
+            <a:ext cx="0" cy="335775"/>
+          </a:xfrm>
+          <a:prstGeom prst="line">
+            <a:avLst/>
+          </a:prstGeom>
+          <a:noFill/>
+          <a:ln w="38100" cap="rnd" cmpd="sng" algn="ctr">
+            <a:gradFill flip="none" rotWithShape="1">
+              <a:gsLst>
+                <a:gs pos="0">
+                  <a:srgbClr val="8EA2A9">
+                    <a:alpha val="0"/>
+                  </a:srgbClr>
+                </a:gs>
+                <a:gs pos="100000">
+                  <a:srgbClr val="8EA2A9"/>
+                </a:gs>
+              </a:gsLst>
+              <a:lin ang="16200000" scaled="1"/>
+              <a:tileRect/>
+            </a:gradFill>
+            <a:prstDash val="solid"/>
+            <a:round/>
+          </a:ln>
+          <a:effectLst/>
+        </p:spPr>
+      </p:cxnSp>
+      <p:sp>
+        <p:nvSpPr>
+          <p:cNvPr id="69" name="椭圆 68"/>
+          <p:cNvSpPr/>
+          <p:nvPr/>
+        </p:nvSpPr>
+        <p:spPr>
+          <a:xfrm>
+            <a:off x="11252343" y="5706115"/>
+            <a:ext cx="72000" cy="72000"/>
+          </a:xfrm>
+          <a:prstGeom prst="ellipse">
+            <a:avLst/>
+          </a:prstGeom>
+          <a:solidFill>
+            <a:srgbClr val="AD053D"/>
+          </a:solidFill>
+          <a:ln w="12700" cap="flat" cmpd="sng" algn="ctr">
+            <a:noFill/>
+            <a:prstDash val="solid"/>
+            <a:miter lim="800000"/>
+          </a:ln>
+          <a:effectLst/>
+        </p:spPr>
+        <p:txBody>
+          <a:bodyPr rtlCol="0" anchor="ctr"/>
+          <a:lstStyle/>
+          <a:p>
+            <a:pPr marL="0" marR="0" lvl="0" indent="0" algn="ctr" defTabSz="914400" eaLnBrk="1" fontAlgn="auto" latinLnBrk="0" hangingPunct="1">
+              <a:lnSpc>
+                <a:spcPct val="100000"/>
+              </a:lnSpc>
+              <a:spcBef>
+                <a:spcPts val="0"/>
+              </a:spcBef>
+              <a:spcAft>
+                <a:spcPts val="0"/>
+              </a:spcAft>
+              <a:buClrTx/>
+              <a:buSzTx/>
+              <a:buFontTx/>
+              <a:buNone/>
+              <a:defRPr/>
+            </a:pPr>
+            <a:endParaRPr kumimoji="0" lang="zh-CN" altLang="en-US" sz="1800" b="0" i="0" u="none" strike="noStrike" kern="0" cap="none" spc="0" normalizeH="0" baseline="0" noProof="0">
+              <a:ln>
+                <a:noFill/>
+              </a:ln>
+              <a:solidFill>
+                <a:srgbClr val="FFFFFF"/>
+              </a:solidFill>
+              <a:effectLst/>
+              <a:uLnTx/>
+              <a:uFillTx/>
+              <a:latin typeface="Arial" panose="020B0604020202020204"/>
+              <a:ea typeface="微软雅黑" panose="020B0503020204020204" pitchFamily="34" charset="-122"/>
+              <a:cs typeface="+mn-cs"/>
+            </a:endParaRPr>
+          </a:p>
+        </p:txBody>
+      </p:sp>
+      <p:sp>
+        <p:nvSpPr>
+          <p:cNvPr id="70" name="椭圆 69"/>
+          <p:cNvSpPr/>
+          <p:nvPr/>
+        </p:nvSpPr>
+        <p:spPr>
+          <a:xfrm>
+            <a:off x="10623061" y="5866482"/>
+            <a:ext cx="36000" cy="36000"/>
+          </a:xfrm>
+          <a:prstGeom prst="ellipse">
+            <a:avLst/>
+          </a:prstGeom>
+          <a:solidFill>
+            <a:srgbClr val="AD053D"/>
+          </a:solidFill>
+          <a:ln w="12700" cap="flat" cmpd="sng" algn="ctr">
+            <a:noFill/>
+            <a:prstDash val="solid"/>
+            <a:miter lim="800000"/>
+          </a:ln>
+          <a:effectLst/>
+        </p:spPr>
+        <p:txBody>
+          <a:bodyPr rtlCol="0" anchor="ctr"/>
+          <a:lstStyle/>
+          <a:p>
+            <a:pPr marL="0" marR="0" lvl="0" indent="0" algn="ctr" defTabSz="914400" eaLnBrk="1" fontAlgn="auto" latinLnBrk="0" hangingPunct="1">
+              <a:lnSpc>
+                <a:spcPct val="100000"/>
+              </a:lnSpc>
+              <a:spcBef>
+                <a:spcPts val="0"/>
+              </a:spcBef>
+              <a:spcAft>
+                <a:spcPts val="0"/>
+              </a:spcAft>
+              <a:buClrTx/>
+              <a:buSzTx/>
+              <a:buFontTx/>
+              <a:buNone/>
+              <a:defRPr/>
+            </a:pPr>
+            <a:endParaRPr kumimoji="0" lang="zh-CN" altLang="en-US" sz="1800" b="0" i="0" u="none" strike="noStrike" kern="0" cap="none" spc="0" normalizeH="0" baseline="0" noProof="0">
+              <a:ln>
+                <a:noFill/>
+              </a:ln>
+              <a:solidFill>
+                <a:srgbClr val="FFFFFF"/>
+              </a:solidFill>
+              <a:effectLst/>
+              <a:uLnTx/>
+              <a:uFillTx/>
+              <a:latin typeface="Arial" panose="020B0604020202020204"/>
+              <a:ea typeface="微软雅黑" panose="020B0503020204020204" pitchFamily="34" charset="-122"/>
+              <a:cs typeface="+mn-cs"/>
+            </a:endParaRPr>
+          </a:p>
+        </p:txBody>
+      </p:sp>
+      <p:grpSp>
+        <p:nvGrpSpPr>
+          <p:cNvPr id="71" name="组合 70"/>
+          <p:cNvGrpSpPr/>
+          <p:nvPr/>
+        </p:nvGrpSpPr>
+        <p:grpSpPr>
+          <a:xfrm>
+            <a:off x="10803102" y="4768117"/>
+            <a:ext cx="894951" cy="2153732"/>
+            <a:chOff x="7932383" y="1237483"/>
+            <a:chExt cx="1656167" cy="3985627"/>
+          </a:xfrm>
+        </p:grpSpPr>
+        <p:grpSp>
+          <p:nvGrpSpPr>
+            <p:cNvPr id="72" name="组合 71"/>
+            <p:cNvGrpSpPr/>
+            <p:nvPr/>
+          </p:nvGrpSpPr>
+          <p:grpSpPr>
+            <a:xfrm>
+              <a:off x="7932383" y="1237483"/>
+              <a:ext cx="1656167" cy="3985627"/>
+              <a:chOff x="8854316" y="1476349"/>
+              <a:chExt cx="1656167" cy="3985627"/>
+            </a:xfrm>
+          </p:grpSpPr>
+          <p:sp>
+            <p:nvSpPr>
+              <p:cNvPr id="77" name="六边形 76"/>
+              <p:cNvSpPr/>
+              <p:nvPr/>
+            </p:nvSpPr>
+            <p:spPr>
+              <a:xfrm rot="5400000">
+                <a:off x="7705005" y="2689240"/>
+                <a:ext cx="3952238" cy="1593233"/>
+              </a:xfrm>
+              <a:prstGeom prst="hexagon">
+                <a:avLst>
+                  <a:gd name="adj" fmla="val 20346"/>
+                  <a:gd name="vf" fmla="val 115470"/>
+                </a:avLst>
+              </a:prstGeom>
+              <a:gradFill flip="none" rotWithShape="1">
+                <a:gsLst>
+                  <a:gs pos="3000">
+                    <a:srgbClr val="AD053D">
+                      <a:alpha val="0"/>
+                    </a:srgbClr>
+                  </a:gs>
+                  <a:gs pos="100000">
+                    <a:srgbClr val="AD053D">
+                      <a:alpha val="13000"/>
+                    </a:srgbClr>
+                  </a:gs>
+                </a:gsLst>
+                <a:lin ang="10800000" scaled="1"/>
+                <a:tileRect/>
+              </a:gradFill>
+              <a:ln w="12700" cap="flat" cmpd="sng" algn="ctr">
+                <a:gradFill flip="none" rotWithShape="1">
+                  <a:gsLst>
+                    <a:gs pos="0">
+                      <a:srgbClr val="AD053D">
+                        <a:alpha val="0"/>
+                      </a:srgbClr>
+                    </a:gs>
+                    <a:gs pos="100000">
+                      <a:srgbClr val="AD053D">
+                        <a:alpha val="55000"/>
+                      </a:srgbClr>
+                    </a:gs>
+                  </a:gsLst>
+                  <a:lin ang="10800000" scaled="1"/>
+                  <a:tileRect/>
+                </a:gradFill>
+                <a:prstDash val="solid"/>
+                <a:miter lim="800000"/>
+              </a:ln>
+              <a:effectLst/>
+            </p:spPr>
+            <p:txBody>
+              <a:bodyPr rtlCol="0" anchor="ctr"/>
+              <a:lstStyle/>
+              <a:p>
+                <a:pPr marL="0" marR="0" lvl="0" indent="0" algn="ctr" defTabSz="914400" eaLnBrk="1" fontAlgn="auto" latinLnBrk="0" hangingPunct="1">
+                  <a:lnSpc>
+                    <a:spcPct val="100000"/>
+                  </a:lnSpc>
+                  <a:spcBef>
+                    <a:spcPts val="0"/>
+                  </a:spcBef>
+                  <a:spcAft>
+                    <a:spcPts val="0"/>
+                  </a:spcAft>
+                  <a:buClrTx/>
+                  <a:buSzTx/>
+                  <a:buFontTx/>
+                  <a:buNone/>
+                  <a:defRPr/>
+                </a:pPr>
+                <a:endParaRPr kumimoji="0" lang="zh-CN" altLang="en-US" sz="1800" b="0" i="0" u="none" strike="noStrike" kern="0" cap="none" spc="0" normalizeH="0" baseline="0" noProof="0" dirty="0">
+                  <a:ln>
+                    <a:noFill/>
+                  </a:ln>
+                  <a:solidFill>
+                    <a:srgbClr val="FFFFFF"/>
+                  </a:solidFill>
+                  <a:effectLst/>
+                  <a:uLnTx/>
+                  <a:uFillTx/>
+                  <a:latin typeface="Arial" panose="020B0604020202020204"/>
+                  <a:ea typeface="微软雅黑" panose="020B0503020204020204" pitchFamily="34" charset="-122"/>
+                  <a:cs typeface="+mn-cs"/>
+                </a:endParaRPr>
+              </a:p>
+            </p:txBody>
+          </p:sp>
+          <p:sp>
+            <p:nvSpPr>
+              <p:cNvPr id="78" name="椭圆 77"/>
+              <p:cNvSpPr/>
+              <p:nvPr/>
+            </p:nvSpPr>
+            <p:spPr>
+              <a:xfrm>
+                <a:off x="9641624" y="1476349"/>
+                <a:ext cx="72000" cy="72000"/>
+              </a:xfrm>
+              <a:prstGeom prst="ellipse">
+                <a:avLst/>
+              </a:prstGeom>
+              <a:solidFill>
+                <a:srgbClr val="AD053D"/>
+              </a:solidFill>
+              <a:ln w="12700" cap="flat" cmpd="sng" algn="ctr">
+                <a:noFill/>
+                <a:prstDash val="solid"/>
+                <a:miter lim="800000"/>
+              </a:ln>
+              <a:effectLst/>
+            </p:spPr>
+            <p:txBody>
+              <a:bodyPr rtlCol="0" anchor="ctr"/>
+              <a:lstStyle/>
+              <a:p>
+                <a:pPr marL="0" marR="0" lvl="0" indent="0" algn="ctr" defTabSz="914400" eaLnBrk="1" fontAlgn="auto" latinLnBrk="0" hangingPunct="1">
+                  <a:lnSpc>
+                    <a:spcPct val="100000"/>
+                  </a:lnSpc>
+                  <a:spcBef>
+                    <a:spcPts val="0"/>
+                  </a:spcBef>
+                  <a:spcAft>
+                    <a:spcPts val="0"/>
+                  </a:spcAft>
+                  <a:buClrTx/>
+                  <a:buSzTx/>
+                  <a:buFontTx/>
+                  <a:buNone/>
+                  <a:defRPr/>
+                </a:pPr>
+                <a:endParaRPr kumimoji="0" lang="zh-CN" altLang="en-US" sz="1800" b="0" i="0" u="none" strike="noStrike" kern="0" cap="none" spc="0" normalizeH="0" baseline="0" noProof="0">
+                  <a:ln>
+                    <a:noFill/>
+                  </a:ln>
+                  <a:solidFill>
+                    <a:srgbClr val="FFFFFF"/>
+                  </a:solidFill>
+                  <a:effectLst/>
+                  <a:uLnTx/>
+                  <a:uFillTx/>
+                  <a:latin typeface="Arial" panose="020B0604020202020204"/>
+                  <a:ea typeface="微软雅黑" panose="020B0503020204020204" pitchFamily="34" charset="-122"/>
+                  <a:cs typeface="+mn-cs"/>
+                </a:endParaRPr>
+              </a:p>
+            </p:txBody>
+          </p:sp>
+          <p:sp>
+            <p:nvSpPr>
+              <p:cNvPr id="79" name="椭圆 78"/>
+              <p:cNvSpPr/>
+              <p:nvPr/>
+            </p:nvSpPr>
+            <p:spPr>
+              <a:xfrm>
+                <a:off x="8854316" y="1808324"/>
+                <a:ext cx="72000" cy="72000"/>
+              </a:xfrm>
+              <a:prstGeom prst="ellipse">
+                <a:avLst/>
+              </a:prstGeom>
+              <a:solidFill>
+                <a:srgbClr val="AD053D"/>
+              </a:solidFill>
+              <a:ln w="12700" cap="flat" cmpd="sng" algn="ctr">
+                <a:noFill/>
+                <a:prstDash val="solid"/>
+                <a:miter lim="800000"/>
+              </a:ln>
+              <a:effectLst/>
+            </p:spPr>
+            <p:txBody>
+              <a:bodyPr rtlCol="0" anchor="ctr"/>
+              <a:lstStyle/>
+              <a:p>
+                <a:pPr marL="0" marR="0" lvl="0" indent="0" algn="ctr" defTabSz="914400" eaLnBrk="1" fontAlgn="auto" latinLnBrk="0" hangingPunct="1">
+                  <a:lnSpc>
+                    <a:spcPct val="100000"/>
+                  </a:lnSpc>
+                  <a:spcBef>
+                    <a:spcPts val="0"/>
+                  </a:spcBef>
+                  <a:spcAft>
+                    <a:spcPts val="0"/>
+                  </a:spcAft>
+                  <a:buClrTx/>
+                  <a:buSzTx/>
+                  <a:buFontTx/>
+                  <a:buNone/>
+                  <a:defRPr/>
+                </a:pPr>
+                <a:endParaRPr kumimoji="0" lang="zh-CN" altLang="en-US" sz="1800" b="0" i="0" u="none" strike="noStrike" kern="0" cap="none" spc="0" normalizeH="0" baseline="0" noProof="0">
+                  <a:ln>
+                    <a:noFill/>
+                  </a:ln>
+                  <a:solidFill>
+                    <a:srgbClr val="FFFFFF"/>
+                  </a:solidFill>
+                  <a:effectLst/>
+                  <a:uLnTx/>
+                  <a:uFillTx/>
+                  <a:latin typeface="Arial" panose="020B0604020202020204"/>
+                  <a:ea typeface="微软雅黑" panose="020B0503020204020204" pitchFamily="34" charset="-122"/>
+                  <a:cs typeface="+mn-cs"/>
+                </a:endParaRPr>
+              </a:p>
+            </p:txBody>
+          </p:sp>
+          <p:sp>
+            <p:nvSpPr>
+              <p:cNvPr id="80" name="椭圆 79"/>
+              <p:cNvSpPr/>
+              <p:nvPr/>
+            </p:nvSpPr>
+            <p:spPr>
+              <a:xfrm>
+                <a:off x="10438483" y="1806315"/>
+                <a:ext cx="72000" cy="72000"/>
+              </a:xfrm>
+              <a:prstGeom prst="ellipse">
+                <a:avLst/>
+              </a:prstGeom>
+              <a:solidFill>
+                <a:srgbClr val="AD053D"/>
+              </a:solidFill>
+              <a:ln w="12700" cap="flat" cmpd="sng" algn="ctr">
+                <a:noFill/>
+                <a:prstDash val="solid"/>
+                <a:miter lim="800000"/>
+              </a:ln>
+              <a:effectLst/>
+            </p:spPr>
+            <p:txBody>
+              <a:bodyPr rtlCol="0" anchor="ctr"/>
+              <a:lstStyle/>
+              <a:p>
+                <a:pPr marL="0" marR="0" lvl="0" indent="0" algn="ctr" defTabSz="914400" eaLnBrk="1" fontAlgn="auto" latinLnBrk="0" hangingPunct="1">
+                  <a:lnSpc>
+                    <a:spcPct val="100000"/>
+                  </a:lnSpc>
+                  <a:spcBef>
+                    <a:spcPts val="0"/>
+                  </a:spcBef>
+                  <a:spcAft>
+                    <a:spcPts val="0"/>
+                  </a:spcAft>
+                  <a:buClrTx/>
+                  <a:buSzTx/>
+                  <a:buFontTx/>
+                  <a:buNone/>
+                  <a:defRPr/>
+                </a:pPr>
+                <a:endParaRPr kumimoji="0" lang="zh-CN" altLang="en-US" sz="1800" b="0" i="0" u="none" strike="noStrike" kern="0" cap="none" spc="0" normalizeH="0" baseline="0" noProof="0">
+                  <a:ln>
+                    <a:noFill/>
+                  </a:ln>
+                  <a:solidFill>
+                    <a:srgbClr val="FFFFFF"/>
+                  </a:solidFill>
+                  <a:effectLst/>
+                  <a:uLnTx/>
+                  <a:uFillTx/>
+                  <a:latin typeface="Arial" panose="020B0604020202020204"/>
+                  <a:ea typeface="微软雅黑" panose="020B0503020204020204" pitchFamily="34" charset="-122"/>
+                  <a:cs typeface="+mn-cs"/>
+                </a:endParaRPr>
+              </a:p>
+            </p:txBody>
+          </p:sp>
+        </p:grpSp>
+        <p:grpSp>
+          <p:nvGrpSpPr>
+            <p:cNvPr id="73" name="组合 72"/>
+            <p:cNvGrpSpPr/>
+            <p:nvPr/>
+          </p:nvGrpSpPr>
+          <p:grpSpPr>
+            <a:xfrm>
+              <a:off x="8133347" y="1502482"/>
+              <a:ext cx="1250009" cy="3670942"/>
+              <a:chOff x="9680544" y="2138994"/>
+              <a:chExt cx="1250009" cy="3670942"/>
+            </a:xfrm>
+          </p:grpSpPr>
+          <p:sp>
+            <p:nvSpPr>
+              <p:cNvPr id="74" name="矩形 73"/>
+              <p:cNvSpPr/>
+              <p:nvPr/>
+            </p:nvSpPr>
+            <p:spPr>
+              <a:xfrm>
+                <a:off x="9680800" y="2399981"/>
+                <a:ext cx="625794" cy="3409955"/>
+              </a:xfrm>
+              <a:prstGeom prst="rect">
+                <a:avLst/>
+              </a:prstGeom>
+              <a:gradFill flip="none" rotWithShape="1">
+                <a:gsLst>
+                  <a:gs pos="24000">
+                    <a:srgbClr val="AD053D">
+                      <a:alpha val="0"/>
+                    </a:srgbClr>
+                  </a:gs>
+                  <a:gs pos="76000">
+                    <a:srgbClr val="AD053D"/>
+                  </a:gs>
+                </a:gsLst>
+                <a:lin ang="16200000" scaled="1"/>
+                <a:tileRect/>
+              </a:gradFill>
+              <a:ln w="12700" cap="flat" cmpd="sng" algn="ctr">
+                <a:noFill/>
+                <a:prstDash val="solid"/>
+                <a:miter lim="800000"/>
+              </a:ln>
+              <a:effectLst/>
+            </p:spPr>
+            <p:txBody>
+              <a:bodyPr rtlCol="0" anchor="ctr"/>
+              <a:lstStyle/>
+              <a:p>
+                <a:pPr marL="0" marR="0" lvl="0" indent="0" algn="ctr" defTabSz="914400" eaLnBrk="1" fontAlgn="auto" latinLnBrk="0" hangingPunct="1">
+                  <a:lnSpc>
+                    <a:spcPct val="100000"/>
+                  </a:lnSpc>
+                  <a:spcBef>
+                    <a:spcPts val="0"/>
+                  </a:spcBef>
+                  <a:spcAft>
+                    <a:spcPts val="0"/>
+                  </a:spcAft>
+                  <a:buClrTx/>
+                  <a:buSzTx/>
+                  <a:buFontTx/>
+                  <a:buNone/>
+                  <a:defRPr/>
+                </a:pPr>
+                <a:endParaRPr kumimoji="0" lang="zh-CN" altLang="en-US" sz="1800" b="0" i="0" u="none" strike="noStrike" kern="0" cap="none" spc="0" normalizeH="0" baseline="0" noProof="0" dirty="0">
+                  <a:ln>
+                    <a:noFill/>
+                  </a:ln>
+                  <a:solidFill>
+                    <a:srgbClr val="FFFFFF"/>
+                  </a:solidFill>
+                  <a:effectLst/>
+                  <a:uLnTx/>
+                  <a:uFillTx/>
+                  <a:latin typeface="Arial" panose="020B0604020202020204"/>
+                  <a:ea typeface="微软雅黑" panose="020B0503020204020204" pitchFamily="34" charset="-122"/>
+                  <a:cs typeface="+mn-cs"/>
+                </a:endParaRPr>
+              </a:p>
+            </p:txBody>
+          </p:sp>
+          <p:sp>
+            <p:nvSpPr>
+              <p:cNvPr id="75" name="矩形 74"/>
+              <p:cNvSpPr/>
+              <p:nvPr/>
+            </p:nvSpPr>
+            <p:spPr>
+              <a:xfrm>
+                <a:off x="10297986" y="2399981"/>
+                <a:ext cx="625794" cy="3409955"/>
+              </a:xfrm>
+              <a:prstGeom prst="rect">
+                <a:avLst/>
+              </a:prstGeom>
+              <a:gradFill flip="none" rotWithShape="1">
+                <a:gsLst>
+                  <a:gs pos="23000">
+                    <a:srgbClr val="EE004A">
+                      <a:alpha val="0"/>
+                    </a:srgbClr>
+                  </a:gs>
+                  <a:gs pos="63000">
+                    <a:srgbClr val="EE004A"/>
+                  </a:gs>
+                </a:gsLst>
+                <a:lin ang="16200000" scaled="1"/>
+                <a:tileRect/>
+              </a:gradFill>
+              <a:ln w="12700" cap="flat" cmpd="sng" algn="ctr">
+                <a:noFill/>
+                <a:prstDash val="solid"/>
+                <a:miter lim="800000"/>
+              </a:ln>
+              <a:effectLst/>
+            </p:spPr>
+            <p:txBody>
+              <a:bodyPr rtlCol="0" anchor="ctr"/>
+              <a:lstStyle/>
+              <a:p>
+                <a:pPr marL="0" marR="0" lvl="0" indent="0" algn="ctr" defTabSz="914400" eaLnBrk="1" fontAlgn="auto" latinLnBrk="0" hangingPunct="1">
+                  <a:lnSpc>
+                    <a:spcPct val="100000"/>
+                  </a:lnSpc>
+                  <a:spcBef>
+                    <a:spcPts val="0"/>
+                  </a:spcBef>
+                  <a:spcAft>
+                    <a:spcPts val="0"/>
+                  </a:spcAft>
+                  <a:buClrTx/>
+                  <a:buSzTx/>
+                  <a:buFontTx/>
+                  <a:buNone/>
+                  <a:defRPr/>
+                </a:pPr>
+                <a:endParaRPr kumimoji="0" lang="zh-CN" altLang="en-US" sz="1800" b="0" i="0" u="none" strike="noStrike" kern="0" cap="none" spc="0" normalizeH="0" baseline="0" noProof="0">
+                  <a:ln>
+                    <a:noFill/>
+                  </a:ln>
+                  <a:solidFill>
+                    <a:srgbClr val="FFFFFF"/>
+                  </a:solidFill>
+                  <a:effectLst/>
+                  <a:uLnTx/>
+                  <a:uFillTx/>
+                  <a:latin typeface="Arial" panose="020B0604020202020204"/>
+                  <a:ea typeface="微软雅黑" panose="020B0503020204020204" pitchFamily="34" charset="-122"/>
+                  <a:cs typeface="+mn-cs"/>
+                </a:endParaRPr>
+              </a:p>
+            </p:txBody>
+          </p:sp>
+          <p:sp>
+            <p:nvSpPr>
+              <p:cNvPr id="76" name="菱形 75"/>
+              <p:cNvSpPr/>
+              <p:nvPr/>
+            </p:nvSpPr>
+            <p:spPr>
+              <a:xfrm>
+                <a:off x="9680544" y="2138994"/>
+                <a:ext cx="1250009" cy="521116"/>
+              </a:xfrm>
+              <a:prstGeom prst="diamond">
+                <a:avLst/>
+              </a:prstGeom>
+              <a:gradFill flip="none" rotWithShape="1">
+                <a:gsLst>
+                  <a:gs pos="0">
+                    <a:srgbClr val="AD053D"/>
+                  </a:gs>
+                  <a:gs pos="100000">
+                    <a:srgbClr val="EE004A"/>
+                  </a:gs>
+                </a:gsLst>
+                <a:lin ang="10800000" scaled="1"/>
+                <a:tileRect/>
+              </a:gradFill>
+              <a:ln w="12700" cap="flat" cmpd="sng" algn="ctr">
+                <a:noFill/>
+                <a:prstDash val="solid"/>
+                <a:miter lim="800000"/>
+              </a:ln>
+              <a:effectLst/>
+            </p:spPr>
+            <p:txBody>
+              <a:bodyPr rtlCol="0" anchor="ctr"/>
+              <a:lstStyle/>
+              <a:p>
+                <a:pPr marL="0" marR="0" lvl="0" indent="0" algn="ctr" defTabSz="914400" eaLnBrk="1" fontAlgn="auto" latinLnBrk="0" hangingPunct="1">
+                  <a:lnSpc>
+                    <a:spcPct val="100000"/>
+                  </a:lnSpc>
+                  <a:spcBef>
+                    <a:spcPts val="0"/>
+                  </a:spcBef>
+                  <a:spcAft>
+                    <a:spcPts val="0"/>
+                  </a:spcAft>
+                  <a:buClrTx/>
+                  <a:buSzTx/>
+                  <a:buFontTx/>
+                  <a:buNone/>
+                  <a:defRPr/>
+                </a:pPr>
+                <a:endParaRPr kumimoji="0" lang="zh-CN" altLang="en-US" sz="1800" b="0" i="0" u="none" strike="noStrike" kern="0" cap="none" spc="0" normalizeH="0" baseline="0" noProof="0">
+                  <a:ln>
+                    <a:noFill/>
+                  </a:ln>
+                  <a:solidFill>
+                    <a:srgbClr val="FFFFFF"/>
+                  </a:solidFill>
+                  <a:effectLst/>
+                  <a:uLnTx/>
+                  <a:uFillTx/>
+                  <a:latin typeface="Arial" panose="020B0604020202020204"/>
+                  <a:ea typeface="微软雅黑" panose="020B0503020204020204" pitchFamily="34" charset="-122"/>
+                  <a:cs typeface="+mn-cs"/>
+                </a:endParaRPr>
+              </a:p>
+            </p:txBody>
+          </p:sp>
+        </p:grpSp>
+      </p:grpSp>
+      <p:grpSp>
+        <p:nvGrpSpPr>
+          <p:cNvPr id="81" name="组合 80"/>
+          <p:cNvGrpSpPr/>
+          <p:nvPr/>
+        </p:nvGrpSpPr>
+        <p:grpSpPr>
+          <a:xfrm>
+            <a:off x="10340196" y="5573612"/>
+            <a:ext cx="754426" cy="1361660"/>
+            <a:chOff x="7860291" y="7394087"/>
+            <a:chExt cx="1110550" cy="2004428"/>
+          </a:xfrm>
+        </p:grpSpPr>
+        <p:grpSp>
+          <p:nvGrpSpPr>
+            <p:cNvPr id="82" name="组合 81"/>
+            <p:cNvGrpSpPr/>
+            <p:nvPr/>
+          </p:nvGrpSpPr>
+          <p:grpSpPr>
+            <a:xfrm>
+              <a:off x="7860291" y="7394087"/>
+              <a:ext cx="1110550" cy="2004428"/>
+              <a:chOff x="8854316" y="1476349"/>
+              <a:chExt cx="1656165" cy="2989207"/>
+            </a:xfrm>
+          </p:grpSpPr>
+          <p:sp>
+            <p:nvSpPr>
+              <p:cNvPr id="87" name="六边形 86"/>
+              <p:cNvSpPr/>
+              <p:nvPr/>
+            </p:nvSpPr>
+            <p:spPr>
+              <a:xfrm rot="5400000">
+                <a:off x="8203213" y="2191032"/>
+                <a:ext cx="2955817" cy="1593232"/>
+              </a:xfrm>
+              <a:prstGeom prst="hexagon">
+                <a:avLst>
+                  <a:gd name="adj" fmla="val 20346"/>
+                  <a:gd name="vf" fmla="val 115470"/>
+                </a:avLst>
+              </a:prstGeom>
+              <a:gradFill flip="none" rotWithShape="1">
+                <a:gsLst>
+                  <a:gs pos="0">
+                    <a:srgbClr val="8EA2A9">
+                      <a:alpha val="0"/>
+                    </a:srgbClr>
+                  </a:gs>
+                  <a:gs pos="100000">
+                    <a:srgbClr val="8EA2A9">
+                      <a:alpha val="13000"/>
+                    </a:srgbClr>
+                  </a:gs>
+                </a:gsLst>
+                <a:lin ang="10800000" scaled="1"/>
+                <a:tileRect/>
+              </a:gradFill>
+              <a:ln w="12700" cap="flat" cmpd="sng" algn="ctr">
+                <a:gradFill flip="none" rotWithShape="1">
+                  <a:gsLst>
+                    <a:gs pos="0">
+                      <a:srgbClr val="8EA2A9">
+                        <a:alpha val="0"/>
+                      </a:srgbClr>
+                    </a:gs>
+                    <a:gs pos="100000">
+                      <a:srgbClr val="8EA2A9"/>
+                    </a:gs>
+                  </a:gsLst>
+                  <a:lin ang="10800000" scaled="1"/>
+                  <a:tileRect/>
+                </a:gradFill>
+                <a:prstDash val="solid"/>
+                <a:miter lim="800000"/>
+              </a:ln>
+              <a:effectLst/>
+            </p:spPr>
+            <p:txBody>
+              <a:bodyPr rtlCol="0" anchor="ctr"/>
+              <a:lstStyle/>
+              <a:p>
+                <a:pPr marL="0" marR="0" lvl="0" indent="0" algn="ctr" defTabSz="914400" eaLnBrk="1" fontAlgn="auto" latinLnBrk="0" hangingPunct="1">
+                  <a:lnSpc>
+                    <a:spcPct val="100000"/>
+                  </a:lnSpc>
+                  <a:spcBef>
+                    <a:spcPts val="0"/>
+                  </a:spcBef>
+                  <a:spcAft>
+                    <a:spcPts val="0"/>
+                  </a:spcAft>
+                  <a:buClrTx/>
+                  <a:buSzTx/>
+                  <a:buFontTx/>
+                  <a:buNone/>
+                  <a:defRPr/>
+                </a:pPr>
+                <a:endParaRPr kumimoji="0" lang="zh-CN" altLang="en-US" sz="1800" b="0" i="0" u="none" strike="noStrike" kern="0" cap="none" spc="0" normalizeH="0" baseline="0" noProof="0">
+                  <a:ln>
+                    <a:noFill/>
+                  </a:ln>
+                  <a:solidFill>
+                    <a:srgbClr val="FFFFFF"/>
+                  </a:solidFill>
+                  <a:effectLst/>
+                  <a:uLnTx/>
+                  <a:uFillTx/>
+                  <a:latin typeface="Arial" panose="020B0604020202020204"/>
+                  <a:ea typeface="微软雅黑" panose="020B0503020204020204" pitchFamily="34" charset="-122"/>
+                  <a:cs typeface="+mn-cs"/>
+                </a:endParaRPr>
+              </a:p>
+            </p:txBody>
+          </p:sp>
+          <p:sp>
+            <p:nvSpPr>
+              <p:cNvPr id="88" name="椭圆 87"/>
+              <p:cNvSpPr/>
+              <p:nvPr/>
+            </p:nvSpPr>
+            <p:spPr>
+              <a:xfrm>
+                <a:off x="9641624" y="1476349"/>
+                <a:ext cx="72000" cy="72000"/>
+              </a:xfrm>
+              <a:prstGeom prst="ellipse">
+                <a:avLst/>
+              </a:prstGeom>
+              <a:solidFill>
+                <a:srgbClr val="8EA2A9"/>
+              </a:solidFill>
+              <a:ln w="12700" cap="flat" cmpd="sng" algn="ctr">
+                <a:noFill/>
+                <a:prstDash val="solid"/>
+                <a:miter lim="800000"/>
+              </a:ln>
+              <a:effectLst/>
+            </p:spPr>
+            <p:txBody>
+              <a:bodyPr rtlCol="0" anchor="ctr"/>
+              <a:lstStyle/>
+              <a:p>
+                <a:pPr marL="0" marR="0" lvl="0" indent="0" algn="ctr" defTabSz="914400" eaLnBrk="1" fontAlgn="auto" latinLnBrk="0" hangingPunct="1">
+                  <a:lnSpc>
+                    <a:spcPct val="100000"/>
+                  </a:lnSpc>
+                  <a:spcBef>
+                    <a:spcPts val="0"/>
+                  </a:spcBef>
+                  <a:spcAft>
+                    <a:spcPts val="0"/>
+                  </a:spcAft>
+                  <a:buClrTx/>
+                  <a:buSzTx/>
+                  <a:buFontTx/>
+                  <a:buNone/>
+                  <a:defRPr/>
+                </a:pPr>
+                <a:endParaRPr kumimoji="0" lang="zh-CN" altLang="en-US" sz="1800" b="0" i="0" u="none" strike="noStrike" kern="0" cap="none" spc="0" normalizeH="0" baseline="0" noProof="0">
+                  <a:ln>
+                    <a:noFill/>
+                  </a:ln>
+                  <a:solidFill>
+                    <a:srgbClr val="FFFFFF"/>
+                  </a:solidFill>
+                  <a:effectLst/>
+                  <a:uLnTx/>
+                  <a:uFillTx/>
+                  <a:latin typeface="Arial" panose="020B0604020202020204"/>
+                  <a:ea typeface="微软雅黑" panose="020B0503020204020204" pitchFamily="34" charset="-122"/>
+                  <a:cs typeface="+mn-cs"/>
+                </a:endParaRPr>
+              </a:p>
+            </p:txBody>
+          </p:sp>
+          <p:sp>
+            <p:nvSpPr>
+              <p:cNvPr id="89" name="椭圆 88"/>
+              <p:cNvSpPr/>
+              <p:nvPr/>
+            </p:nvSpPr>
+            <p:spPr>
+              <a:xfrm>
+                <a:off x="8854316" y="1808323"/>
+                <a:ext cx="72000" cy="72000"/>
+              </a:xfrm>
+              <a:prstGeom prst="ellipse">
+                <a:avLst/>
+              </a:prstGeom>
+              <a:solidFill>
+                <a:srgbClr val="8EA2A9"/>
+              </a:solidFill>
+              <a:ln w="12700" cap="flat" cmpd="sng" algn="ctr">
+                <a:noFill/>
+                <a:prstDash val="solid"/>
+                <a:miter lim="800000"/>
+              </a:ln>
+              <a:effectLst/>
+            </p:spPr>
+            <p:txBody>
+              <a:bodyPr rtlCol="0" anchor="ctr"/>
+              <a:lstStyle/>
+              <a:p>
+                <a:pPr marL="0" marR="0" lvl="0" indent="0" algn="ctr" defTabSz="914400" eaLnBrk="1" fontAlgn="auto" latinLnBrk="0" hangingPunct="1">
+                  <a:lnSpc>
+                    <a:spcPct val="100000"/>
+                  </a:lnSpc>
+                  <a:spcBef>
+                    <a:spcPts val="0"/>
+                  </a:spcBef>
+                  <a:spcAft>
+                    <a:spcPts val="0"/>
+                  </a:spcAft>
+                  <a:buClrTx/>
+                  <a:buSzTx/>
+                  <a:buFontTx/>
+                  <a:buNone/>
+                  <a:defRPr/>
+                </a:pPr>
+                <a:endParaRPr kumimoji="0" lang="zh-CN" altLang="en-US" sz="1800" b="0" i="0" u="none" strike="noStrike" kern="0" cap="none" spc="0" normalizeH="0" baseline="0" noProof="0">
+                  <a:ln>
+                    <a:noFill/>
+                  </a:ln>
+                  <a:solidFill>
+                    <a:srgbClr val="FFFFFF"/>
+                  </a:solidFill>
+                  <a:effectLst/>
+                  <a:uLnTx/>
+                  <a:uFillTx/>
+                  <a:latin typeface="Arial" panose="020B0604020202020204"/>
+                  <a:ea typeface="微软雅黑" panose="020B0503020204020204" pitchFamily="34" charset="-122"/>
+                  <a:cs typeface="+mn-cs"/>
+                </a:endParaRPr>
+              </a:p>
+            </p:txBody>
+          </p:sp>
+          <p:sp>
+            <p:nvSpPr>
+              <p:cNvPr id="90" name="椭圆 89"/>
+              <p:cNvSpPr/>
+              <p:nvPr/>
+            </p:nvSpPr>
+            <p:spPr>
+              <a:xfrm>
+                <a:off x="10438481" y="1806314"/>
+                <a:ext cx="72000" cy="72000"/>
+              </a:xfrm>
+              <a:prstGeom prst="ellipse">
+                <a:avLst/>
+              </a:prstGeom>
+              <a:solidFill>
+                <a:srgbClr val="8EA2A9"/>
+              </a:solidFill>
+              <a:ln w="12700" cap="flat" cmpd="sng" algn="ctr">
+                <a:noFill/>
+                <a:prstDash val="solid"/>
+                <a:miter lim="800000"/>
+              </a:ln>
+              <a:effectLst/>
+            </p:spPr>
+            <p:txBody>
+              <a:bodyPr rtlCol="0" anchor="ctr"/>
+              <a:lstStyle/>
+              <a:p>
+                <a:pPr marL="0" marR="0" lvl="0" indent="0" algn="ctr" defTabSz="914400" eaLnBrk="1" fontAlgn="auto" latinLnBrk="0" hangingPunct="1">
+                  <a:lnSpc>
+                    <a:spcPct val="100000"/>
+                  </a:lnSpc>
+                  <a:spcBef>
+                    <a:spcPts val="0"/>
+                  </a:spcBef>
+                  <a:spcAft>
+                    <a:spcPts val="0"/>
+                  </a:spcAft>
+                  <a:buClrTx/>
+                  <a:buSzTx/>
+                  <a:buFontTx/>
+                  <a:buNone/>
+                  <a:defRPr/>
+                </a:pPr>
+                <a:endParaRPr kumimoji="0" lang="zh-CN" altLang="en-US" sz="1800" b="0" i="0" u="none" strike="noStrike" kern="0" cap="none" spc="0" normalizeH="0" baseline="0" noProof="0">
+                  <a:ln>
+                    <a:noFill/>
+                  </a:ln>
+                  <a:solidFill>
+                    <a:srgbClr val="FFFFFF"/>
+                  </a:solidFill>
+                  <a:effectLst/>
+                  <a:uLnTx/>
+                  <a:uFillTx/>
+                  <a:latin typeface="Arial" panose="020B0604020202020204"/>
+                  <a:ea typeface="微软雅黑" panose="020B0503020204020204" pitchFamily="34" charset="-122"/>
+                  <a:cs typeface="+mn-cs"/>
+                </a:endParaRPr>
+              </a:p>
+            </p:txBody>
+          </p:sp>
+        </p:grpSp>
+        <p:grpSp>
+          <p:nvGrpSpPr>
+            <p:cNvPr id="83" name="组合 82"/>
+            <p:cNvGrpSpPr/>
+            <p:nvPr/>
+          </p:nvGrpSpPr>
+          <p:grpSpPr>
+            <a:xfrm>
+              <a:off x="8017668" y="7543760"/>
+              <a:ext cx="845627" cy="1617055"/>
+              <a:chOff x="8160309" y="3595151"/>
+              <a:chExt cx="845627" cy="1617055"/>
+            </a:xfrm>
+          </p:grpSpPr>
+          <p:sp>
+            <p:nvSpPr>
+              <p:cNvPr id="84" name="矩形 83"/>
+              <p:cNvSpPr/>
+              <p:nvPr/>
+            </p:nvSpPr>
+            <p:spPr>
+              <a:xfrm>
+                <a:off x="8160309" y="3777038"/>
+                <a:ext cx="418042" cy="1435168"/>
+              </a:xfrm>
+              <a:prstGeom prst="rect">
+                <a:avLst/>
+              </a:prstGeom>
+              <a:gradFill flip="none" rotWithShape="1">
+                <a:gsLst>
+                  <a:gs pos="3000">
+                    <a:srgbClr val="8EA2A9">
+                      <a:alpha val="0"/>
+                    </a:srgbClr>
+                  </a:gs>
+                  <a:gs pos="100000">
+                    <a:srgbClr val="8EA2A9">
+                      <a:lumMod val="75000"/>
+                    </a:srgbClr>
+                  </a:gs>
+                </a:gsLst>
+                <a:lin ang="16200000" scaled="1"/>
+                <a:tileRect/>
+              </a:gradFill>
+              <a:ln w="12700" cap="flat" cmpd="sng" algn="ctr">
+                <a:noFill/>
+                <a:prstDash val="solid"/>
+                <a:miter lim="800000"/>
+              </a:ln>
+              <a:effectLst/>
+            </p:spPr>
+            <p:txBody>
+              <a:bodyPr rtlCol="0" anchor="ctr"/>
+              <a:lstStyle/>
+              <a:p>
+                <a:pPr marL="0" marR="0" lvl="0" indent="0" algn="ctr" defTabSz="914400" eaLnBrk="1" fontAlgn="auto" latinLnBrk="0" hangingPunct="1">
+                  <a:lnSpc>
+                    <a:spcPct val="100000"/>
+                  </a:lnSpc>
+                  <a:spcBef>
+                    <a:spcPts val="0"/>
+                  </a:spcBef>
+                  <a:spcAft>
+                    <a:spcPts val="0"/>
+                  </a:spcAft>
+                  <a:buClrTx/>
+                  <a:buSzTx/>
+                  <a:buFontTx/>
+                  <a:buNone/>
+                  <a:defRPr/>
+                </a:pPr>
+                <a:endParaRPr kumimoji="0" lang="zh-CN" altLang="en-US" sz="1800" b="0" i="0" u="none" strike="noStrike" kern="0" cap="none" spc="0" normalizeH="0" baseline="0" noProof="0">
+                  <a:ln>
+                    <a:noFill/>
+                  </a:ln>
+                  <a:solidFill>
+                    <a:srgbClr val="FFFFFF"/>
+                  </a:solidFill>
+                  <a:effectLst/>
+                  <a:uLnTx/>
+                  <a:uFillTx/>
+                  <a:latin typeface="Arial" panose="020B0604020202020204"/>
+                  <a:ea typeface="微软雅黑" panose="020B0503020204020204" pitchFamily="34" charset="-122"/>
+                  <a:cs typeface="+mn-cs"/>
+                </a:endParaRPr>
+              </a:p>
+            </p:txBody>
+          </p:sp>
+          <p:sp>
+            <p:nvSpPr>
+              <p:cNvPr id="85" name="矩形 84"/>
+              <p:cNvSpPr/>
+              <p:nvPr/>
+            </p:nvSpPr>
+            <p:spPr>
+              <a:xfrm>
+                <a:off x="8577125" y="3767457"/>
+                <a:ext cx="418042" cy="1435168"/>
+              </a:xfrm>
+              <a:prstGeom prst="rect">
+                <a:avLst/>
+              </a:prstGeom>
+              <a:gradFill flip="none" rotWithShape="1">
+                <a:gsLst>
+                  <a:gs pos="13000">
+                    <a:srgbClr val="8EA2A9">
+                      <a:lumMod val="60000"/>
+                      <a:lumOff val="40000"/>
+                      <a:alpha val="0"/>
+                    </a:srgbClr>
+                  </a:gs>
+                  <a:gs pos="100000">
+                    <a:srgbClr val="8EA2A9">
+                      <a:lumMod val="60000"/>
+                      <a:lumOff val="40000"/>
+                    </a:srgbClr>
+                  </a:gs>
+                </a:gsLst>
+                <a:lin ang="16200000" scaled="1"/>
+                <a:tileRect/>
+              </a:gradFill>
+              <a:ln w="12700" cap="flat" cmpd="sng" algn="ctr">
+                <a:noFill/>
+                <a:prstDash val="solid"/>
+                <a:miter lim="800000"/>
+              </a:ln>
+              <a:effectLst/>
+            </p:spPr>
+            <p:txBody>
+              <a:bodyPr rtlCol="0" anchor="ctr"/>
+              <a:lstStyle/>
+              <a:p>
+                <a:pPr marL="0" marR="0" lvl="0" indent="0" algn="ctr" defTabSz="914400" eaLnBrk="1" fontAlgn="auto" latinLnBrk="0" hangingPunct="1">
+                  <a:lnSpc>
+                    <a:spcPct val="100000"/>
+                  </a:lnSpc>
+                  <a:spcBef>
+                    <a:spcPts val="0"/>
+                  </a:spcBef>
+                  <a:spcAft>
+                    <a:spcPts val="0"/>
+                  </a:spcAft>
+                  <a:buClrTx/>
+                  <a:buSzTx/>
+                  <a:buFontTx/>
+                  <a:buNone/>
+                  <a:defRPr/>
+                </a:pPr>
+                <a:endParaRPr kumimoji="0" lang="zh-CN" altLang="en-US" sz="1800" b="0" i="0" u="none" strike="noStrike" kern="0" cap="none" spc="0" normalizeH="0" baseline="0" noProof="0">
+                  <a:ln>
+                    <a:noFill/>
+                  </a:ln>
+                  <a:solidFill>
+                    <a:srgbClr val="FFFFFF"/>
+                  </a:solidFill>
+                  <a:effectLst/>
+                  <a:uLnTx/>
+                  <a:uFillTx/>
+                  <a:latin typeface="Arial" panose="020B0604020202020204"/>
+                  <a:ea typeface="微软雅黑" panose="020B0503020204020204" pitchFamily="34" charset="-122"/>
+                  <a:cs typeface="+mn-cs"/>
+                </a:endParaRPr>
+              </a:p>
+            </p:txBody>
+          </p:sp>
+          <p:sp>
+            <p:nvSpPr>
+              <p:cNvPr id="86" name="菱形 85"/>
+              <p:cNvSpPr/>
+              <p:nvPr/>
+            </p:nvSpPr>
+            <p:spPr>
+              <a:xfrm>
+                <a:off x="8160309" y="3595151"/>
+                <a:ext cx="845627" cy="363763"/>
+              </a:xfrm>
+              <a:prstGeom prst="diamond">
+                <a:avLst/>
+              </a:prstGeom>
+              <a:gradFill flip="none" rotWithShape="1">
+                <a:gsLst>
+                  <a:gs pos="0">
+                    <a:srgbClr val="8EA2A9"/>
+                  </a:gs>
+                  <a:gs pos="100000">
+                    <a:srgbClr val="8EA2A9">
+                      <a:lumMod val="60000"/>
+                      <a:lumOff val="40000"/>
+                    </a:srgbClr>
+                  </a:gs>
+                </a:gsLst>
+                <a:lin ang="10800000" scaled="1"/>
+                <a:tileRect/>
+              </a:gradFill>
+              <a:ln w="12700" cap="flat" cmpd="sng" algn="ctr">
+                <a:noFill/>
+                <a:prstDash val="solid"/>
+                <a:miter lim="800000"/>
+              </a:ln>
+              <a:effectLst/>
+            </p:spPr>
+            <p:txBody>
+              <a:bodyPr rtlCol="0" anchor="ctr"/>
+              <a:lstStyle/>
+              <a:p>
+                <a:pPr marL="0" marR="0" lvl="0" indent="0" algn="ctr" defTabSz="914400" eaLnBrk="1" fontAlgn="auto" latinLnBrk="0" hangingPunct="1">
+                  <a:lnSpc>
+                    <a:spcPct val="100000"/>
+                  </a:lnSpc>
+                  <a:spcBef>
+                    <a:spcPts val="0"/>
+                  </a:spcBef>
+                  <a:spcAft>
+                    <a:spcPts val="0"/>
+                  </a:spcAft>
+                  <a:buClrTx/>
+                  <a:buSzTx/>
+                  <a:buFontTx/>
+                  <a:buNone/>
+                  <a:defRPr/>
+                </a:pPr>
+                <a:endParaRPr kumimoji="0" lang="zh-CN" altLang="en-US" sz="1800" b="0" i="0" u="none" strike="noStrike" kern="0" cap="none" spc="0" normalizeH="0" baseline="0" noProof="0">
+                  <a:ln>
+                    <a:noFill/>
+                  </a:ln>
+                  <a:solidFill>
+                    <a:srgbClr val="FFFFFF"/>
+                  </a:solidFill>
+                  <a:effectLst/>
+                  <a:uLnTx/>
+                  <a:uFillTx/>
+                  <a:latin typeface="Arial" panose="020B0604020202020204"/>
+                  <a:ea typeface="微软雅黑" panose="020B0503020204020204" pitchFamily="34" charset="-122"/>
+                  <a:cs typeface="+mn-cs"/>
+                </a:endParaRPr>
+              </a:p>
+            </p:txBody>
+          </p:sp>
+        </p:grpSp>
+      </p:grpSp>
+      <p:grpSp>
+        <p:nvGrpSpPr>
+          <p:cNvPr id="91" name="组合 90"/>
+          <p:cNvGrpSpPr/>
+          <p:nvPr/>
+        </p:nvGrpSpPr>
+        <p:grpSpPr>
+          <a:xfrm>
+            <a:off x="11444407" y="5619972"/>
+            <a:ext cx="632266" cy="1141175"/>
+            <a:chOff x="7860291" y="7394087"/>
+            <a:chExt cx="1110550" cy="2004428"/>
+          </a:xfrm>
+        </p:grpSpPr>
+        <p:grpSp>
+          <p:nvGrpSpPr>
+            <p:cNvPr id="92" name="组合 91"/>
+            <p:cNvGrpSpPr/>
+            <p:nvPr/>
+          </p:nvGrpSpPr>
+          <p:grpSpPr>
+            <a:xfrm>
+              <a:off x="7860291" y="7394087"/>
+              <a:ext cx="1110550" cy="2004428"/>
+              <a:chOff x="8854316" y="1476349"/>
+              <a:chExt cx="1656165" cy="2989207"/>
+            </a:xfrm>
+          </p:grpSpPr>
+          <p:sp>
+            <p:nvSpPr>
+              <p:cNvPr id="97" name="六边形 96"/>
+              <p:cNvSpPr/>
+              <p:nvPr/>
+            </p:nvSpPr>
+            <p:spPr>
+              <a:xfrm rot="5400000">
+                <a:off x="8203213" y="2191032"/>
+                <a:ext cx="2955817" cy="1593232"/>
+              </a:xfrm>
+              <a:prstGeom prst="hexagon">
+                <a:avLst>
+                  <a:gd name="adj" fmla="val 20346"/>
+                  <a:gd name="vf" fmla="val 115470"/>
+                </a:avLst>
+              </a:prstGeom>
+              <a:gradFill flip="none" rotWithShape="1">
+                <a:gsLst>
+                  <a:gs pos="0">
+                    <a:srgbClr val="8EA2A9">
+                      <a:alpha val="0"/>
+                    </a:srgbClr>
+                  </a:gs>
+                  <a:gs pos="100000">
+                    <a:srgbClr val="8EA2A9">
+                      <a:alpha val="13000"/>
+                    </a:srgbClr>
+                  </a:gs>
+                </a:gsLst>
+                <a:lin ang="10800000" scaled="1"/>
+                <a:tileRect/>
+              </a:gradFill>
+              <a:ln w="12700" cap="flat" cmpd="sng" algn="ctr">
+                <a:gradFill flip="none" rotWithShape="1">
+                  <a:gsLst>
+                    <a:gs pos="0">
+                      <a:srgbClr val="8EA2A9">
+                        <a:alpha val="0"/>
+                      </a:srgbClr>
+                    </a:gs>
+                    <a:gs pos="100000">
+                      <a:srgbClr val="8EA2A9"/>
+                    </a:gs>
+                  </a:gsLst>
+                  <a:lin ang="10800000" scaled="1"/>
+                  <a:tileRect/>
+                </a:gradFill>
+                <a:prstDash val="solid"/>
+                <a:miter lim="800000"/>
+              </a:ln>
+              <a:effectLst/>
+            </p:spPr>
+            <p:txBody>
+              <a:bodyPr rtlCol="0" anchor="ctr"/>
+              <a:lstStyle/>
+              <a:p>
+                <a:pPr marL="0" marR="0" lvl="0" indent="0" algn="ctr" defTabSz="914400" eaLnBrk="1" fontAlgn="auto" latinLnBrk="0" hangingPunct="1">
+                  <a:lnSpc>
+                    <a:spcPct val="100000"/>
+                  </a:lnSpc>
+                  <a:spcBef>
+                    <a:spcPts val="0"/>
+                  </a:spcBef>
+                  <a:spcAft>
+                    <a:spcPts val="0"/>
+                  </a:spcAft>
+                  <a:buClrTx/>
+                  <a:buSzTx/>
+                  <a:buFontTx/>
+                  <a:buNone/>
+                  <a:defRPr/>
+                </a:pPr>
+                <a:endParaRPr kumimoji="0" lang="zh-CN" altLang="en-US" sz="1800" b="0" i="0" u="none" strike="noStrike" kern="0" cap="none" spc="0" normalizeH="0" baseline="0" noProof="0">
+                  <a:ln>
+                    <a:noFill/>
+                  </a:ln>
+                  <a:solidFill>
+                    <a:srgbClr val="FFFFFF"/>
+                  </a:solidFill>
+                  <a:effectLst/>
+                  <a:uLnTx/>
+                  <a:uFillTx/>
+                  <a:latin typeface="Arial" panose="020B0604020202020204"/>
+                  <a:ea typeface="微软雅黑" panose="020B0503020204020204" pitchFamily="34" charset="-122"/>
+                  <a:cs typeface="+mn-cs"/>
+                </a:endParaRPr>
+              </a:p>
+            </p:txBody>
+          </p:sp>
+          <p:sp>
+            <p:nvSpPr>
+              <p:cNvPr id="98" name="椭圆 97"/>
+              <p:cNvSpPr/>
+              <p:nvPr/>
+            </p:nvSpPr>
+            <p:spPr>
+              <a:xfrm>
+                <a:off x="9641624" y="1476349"/>
+                <a:ext cx="72000" cy="72000"/>
+              </a:xfrm>
+              <a:prstGeom prst="ellipse">
+                <a:avLst/>
+              </a:prstGeom>
+              <a:solidFill>
+                <a:srgbClr val="8EA2A9"/>
+              </a:solidFill>
+              <a:ln w="12700" cap="flat" cmpd="sng" algn="ctr">
+                <a:noFill/>
+                <a:prstDash val="solid"/>
+                <a:miter lim="800000"/>
+              </a:ln>
+              <a:effectLst/>
+            </p:spPr>
+            <p:txBody>
+              <a:bodyPr rtlCol="0" anchor="ctr"/>
+              <a:lstStyle/>
+              <a:p>
+                <a:pPr marL="0" marR="0" lvl="0" indent="0" algn="ctr" defTabSz="914400" eaLnBrk="1" fontAlgn="auto" latinLnBrk="0" hangingPunct="1">
+                  <a:lnSpc>
+                    <a:spcPct val="100000"/>
+                  </a:lnSpc>
+                  <a:spcBef>
+                    <a:spcPts val="0"/>
+                  </a:spcBef>
+                  <a:spcAft>
+                    <a:spcPts val="0"/>
+                  </a:spcAft>
+                  <a:buClrTx/>
+                  <a:buSzTx/>
+                  <a:buFontTx/>
+                  <a:buNone/>
+                  <a:defRPr/>
+                </a:pPr>
+                <a:endParaRPr kumimoji="0" lang="zh-CN" altLang="en-US" sz="1800" b="0" i="0" u="none" strike="noStrike" kern="0" cap="none" spc="0" normalizeH="0" baseline="0" noProof="0">
+                  <a:ln>
+                    <a:noFill/>
+                  </a:ln>
+                  <a:solidFill>
+                    <a:srgbClr val="FFFFFF"/>
+                  </a:solidFill>
+                  <a:effectLst/>
+                  <a:uLnTx/>
+                  <a:uFillTx/>
+                  <a:latin typeface="Arial" panose="020B0604020202020204"/>
+                  <a:ea typeface="微软雅黑" panose="020B0503020204020204" pitchFamily="34" charset="-122"/>
+                  <a:cs typeface="+mn-cs"/>
+                </a:endParaRPr>
+              </a:p>
+            </p:txBody>
+          </p:sp>
+          <p:sp>
+            <p:nvSpPr>
+              <p:cNvPr id="99" name="椭圆 98"/>
+              <p:cNvSpPr/>
+              <p:nvPr/>
+            </p:nvSpPr>
+            <p:spPr>
+              <a:xfrm>
+                <a:off x="8854316" y="1808323"/>
+                <a:ext cx="72000" cy="72000"/>
+              </a:xfrm>
+              <a:prstGeom prst="ellipse">
+                <a:avLst/>
+              </a:prstGeom>
+              <a:solidFill>
+                <a:srgbClr val="8EA2A9"/>
+              </a:solidFill>
+              <a:ln w="12700" cap="flat" cmpd="sng" algn="ctr">
+                <a:noFill/>
+                <a:prstDash val="solid"/>
+                <a:miter lim="800000"/>
+              </a:ln>
+              <a:effectLst/>
+            </p:spPr>
+            <p:txBody>
+              <a:bodyPr rtlCol="0" anchor="ctr"/>
+              <a:lstStyle/>
+              <a:p>
+                <a:pPr marL="0" marR="0" lvl="0" indent="0" algn="ctr" defTabSz="914400" eaLnBrk="1" fontAlgn="auto" latinLnBrk="0" hangingPunct="1">
+                  <a:lnSpc>
+                    <a:spcPct val="100000"/>
+                  </a:lnSpc>
+                  <a:spcBef>
+                    <a:spcPts val="0"/>
+                  </a:spcBef>
+                  <a:spcAft>
+                    <a:spcPts val="0"/>
+                  </a:spcAft>
+                  <a:buClrTx/>
+                  <a:buSzTx/>
+                  <a:buFontTx/>
+                  <a:buNone/>
+                  <a:defRPr/>
+                </a:pPr>
+                <a:endParaRPr kumimoji="0" lang="zh-CN" altLang="en-US" sz="1800" b="0" i="0" u="none" strike="noStrike" kern="0" cap="none" spc="0" normalizeH="0" baseline="0" noProof="0">
+                  <a:ln>
+                    <a:noFill/>
+                  </a:ln>
+                  <a:solidFill>
+                    <a:srgbClr val="FFFFFF"/>
+                  </a:solidFill>
+                  <a:effectLst/>
+                  <a:uLnTx/>
+                  <a:uFillTx/>
+                  <a:latin typeface="Arial" panose="020B0604020202020204"/>
+                  <a:ea typeface="微软雅黑" panose="020B0503020204020204" pitchFamily="34" charset="-122"/>
+                  <a:cs typeface="+mn-cs"/>
+                </a:endParaRPr>
+              </a:p>
+            </p:txBody>
+          </p:sp>
+          <p:sp>
+            <p:nvSpPr>
+              <p:cNvPr id="100" name="椭圆 99"/>
+              <p:cNvSpPr/>
+              <p:nvPr/>
+            </p:nvSpPr>
+            <p:spPr>
+              <a:xfrm>
+                <a:off x="10438481" y="1806314"/>
+                <a:ext cx="72000" cy="72000"/>
+              </a:xfrm>
+              <a:prstGeom prst="ellipse">
+                <a:avLst/>
+              </a:prstGeom>
+              <a:solidFill>
+                <a:srgbClr val="8EA2A9"/>
+              </a:solidFill>
+              <a:ln w="12700" cap="flat" cmpd="sng" algn="ctr">
+                <a:noFill/>
+                <a:prstDash val="solid"/>
+                <a:miter lim="800000"/>
+              </a:ln>
+              <a:effectLst/>
+            </p:spPr>
+            <p:txBody>
+              <a:bodyPr rtlCol="0" anchor="ctr"/>
+              <a:lstStyle/>
+              <a:p>
+                <a:pPr marL="0" marR="0" lvl="0" indent="0" algn="ctr" defTabSz="914400" eaLnBrk="1" fontAlgn="auto" latinLnBrk="0" hangingPunct="1">
+                  <a:lnSpc>
+                    <a:spcPct val="100000"/>
+                  </a:lnSpc>
+                  <a:spcBef>
+                    <a:spcPts val="0"/>
+                  </a:spcBef>
+                  <a:spcAft>
+                    <a:spcPts val="0"/>
+                  </a:spcAft>
+                  <a:buClrTx/>
+                  <a:buSzTx/>
+                  <a:buFontTx/>
+                  <a:buNone/>
+                  <a:defRPr/>
+                </a:pPr>
+                <a:endParaRPr kumimoji="0" lang="zh-CN" altLang="en-US" sz="1800" b="0" i="0" u="none" strike="noStrike" kern="0" cap="none" spc="0" normalizeH="0" baseline="0" noProof="0">
+                  <a:ln>
+                    <a:noFill/>
+                  </a:ln>
+                  <a:solidFill>
+                    <a:srgbClr val="FFFFFF"/>
+                  </a:solidFill>
+                  <a:effectLst/>
+                  <a:uLnTx/>
+                  <a:uFillTx/>
+                  <a:latin typeface="Arial" panose="020B0604020202020204"/>
+                  <a:ea typeface="微软雅黑" panose="020B0503020204020204" pitchFamily="34" charset="-122"/>
+                  <a:cs typeface="+mn-cs"/>
+                </a:endParaRPr>
+              </a:p>
+            </p:txBody>
+          </p:sp>
+        </p:grpSp>
+        <p:grpSp>
+          <p:nvGrpSpPr>
+            <p:cNvPr id="93" name="组合 92"/>
+            <p:cNvGrpSpPr/>
+            <p:nvPr/>
+          </p:nvGrpSpPr>
+          <p:grpSpPr>
+            <a:xfrm>
+              <a:off x="8017668" y="7543760"/>
+              <a:ext cx="845627" cy="1617055"/>
+              <a:chOff x="8160309" y="3595151"/>
+              <a:chExt cx="845627" cy="1617055"/>
+            </a:xfrm>
+          </p:grpSpPr>
+          <p:sp>
+            <p:nvSpPr>
+              <p:cNvPr id="94" name="矩形 93"/>
+              <p:cNvSpPr/>
+              <p:nvPr/>
+            </p:nvSpPr>
+            <p:spPr>
+              <a:xfrm>
+                <a:off x="8160309" y="3777038"/>
+                <a:ext cx="418042" cy="1435168"/>
+              </a:xfrm>
+              <a:prstGeom prst="rect">
+                <a:avLst/>
+              </a:prstGeom>
+              <a:gradFill flip="none" rotWithShape="1">
+                <a:gsLst>
+                  <a:gs pos="3000">
+                    <a:srgbClr val="8EA2A9">
+                      <a:alpha val="0"/>
+                    </a:srgbClr>
+                  </a:gs>
+                  <a:gs pos="100000">
+                    <a:srgbClr val="8EA2A9">
+                      <a:lumMod val="75000"/>
+                    </a:srgbClr>
+                  </a:gs>
+                </a:gsLst>
+                <a:lin ang="16200000" scaled="1"/>
+                <a:tileRect/>
+              </a:gradFill>
+              <a:ln w="12700" cap="flat" cmpd="sng" algn="ctr">
+                <a:noFill/>
+                <a:prstDash val="solid"/>
+                <a:miter lim="800000"/>
+              </a:ln>
+              <a:effectLst/>
+            </p:spPr>
+            <p:txBody>
+              <a:bodyPr rtlCol="0" anchor="ctr"/>
+              <a:lstStyle/>
+              <a:p>
+                <a:pPr marL="0" marR="0" lvl="0" indent="0" algn="ctr" defTabSz="914400" eaLnBrk="1" fontAlgn="auto" latinLnBrk="0" hangingPunct="1">
+                  <a:lnSpc>
+                    <a:spcPct val="100000"/>
+                  </a:lnSpc>
+                  <a:spcBef>
+                    <a:spcPts val="0"/>
+                  </a:spcBef>
+                  <a:spcAft>
+                    <a:spcPts val="0"/>
+                  </a:spcAft>
+                  <a:buClrTx/>
+                  <a:buSzTx/>
+                  <a:buFontTx/>
+                  <a:buNone/>
+                  <a:defRPr/>
+                </a:pPr>
+                <a:endParaRPr kumimoji="0" lang="zh-CN" altLang="en-US" sz="1800" b="0" i="0" u="none" strike="noStrike" kern="0" cap="none" spc="0" normalizeH="0" baseline="0" noProof="0">
+                  <a:ln>
+                    <a:noFill/>
+                  </a:ln>
+                  <a:solidFill>
+                    <a:srgbClr val="FFFFFF"/>
+                  </a:solidFill>
+                  <a:effectLst/>
+                  <a:uLnTx/>
+                  <a:uFillTx/>
+                  <a:latin typeface="Arial" panose="020B0604020202020204"/>
+                  <a:ea typeface="微软雅黑" panose="020B0503020204020204" pitchFamily="34" charset="-122"/>
+                  <a:cs typeface="+mn-cs"/>
+                </a:endParaRPr>
+              </a:p>
+            </p:txBody>
+          </p:sp>
+          <p:sp>
+            <p:nvSpPr>
+              <p:cNvPr id="95" name="矩形 94"/>
+              <p:cNvSpPr/>
+              <p:nvPr/>
+            </p:nvSpPr>
+            <p:spPr>
+              <a:xfrm>
+                <a:off x="8577125" y="3767457"/>
+                <a:ext cx="418042" cy="1435168"/>
+              </a:xfrm>
+              <a:prstGeom prst="rect">
+                <a:avLst/>
+              </a:prstGeom>
+              <a:gradFill flip="none" rotWithShape="1">
+                <a:gsLst>
+                  <a:gs pos="13000">
+                    <a:srgbClr val="8EA2A9">
+                      <a:lumMod val="60000"/>
+                      <a:lumOff val="40000"/>
+                      <a:alpha val="0"/>
+                    </a:srgbClr>
+                  </a:gs>
+                  <a:gs pos="100000">
+                    <a:srgbClr val="8EA2A9">
+                      <a:lumMod val="60000"/>
+                      <a:lumOff val="40000"/>
+                    </a:srgbClr>
+                  </a:gs>
+                </a:gsLst>
+                <a:lin ang="16200000" scaled="1"/>
+                <a:tileRect/>
+              </a:gradFill>
+              <a:ln w="12700" cap="flat" cmpd="sng" algn="ctr">
+                <a:noFill/>
+                <a:prstDash val="solid"/>
+                <a:miter lim="800000"/>
+              </a:ln>
+              <a:effectLst/>
+            </p:spPr>
+            <p:txBody>
+              <a:bodyPr rtlCol="0" anchor="ctr"/>
+              <a:lstStyle/>
+              <a:p>
+                <a:pPr marL="0" marR="0" lvl="0" indent="0" algn="ctr" defTabSz="914400" eaLnBrk="1" fontAlgn="auto" latinLnBrk="0" hangingPunct="1">
+                  <a:lnSpc>
+                    <a:spcPct val="100000"/>
+                  </a:lnSpc>
+                  <a:spcBef>
+                    <a:spcPts val="0"/>
+                  </a:spcBef>
+                  <a:spcAft>
+                    <a:spcPts val="0"/>
+                  </a:spcAft>
+                  <a:buClrTx/>
+                  <a:buSzTx/>
+                  <a:buFontTx/>
+                  <a:buNone/>
+                  <a:defRPr/>
+                </a:pPr>
+                <a:endParaRPr kumimoji="0" lang="zh-CN" altLang="en-US" sz="1800" b="0" i="0" u="none" strike="noStrike" kern="0" cap="none" spc="0" normalizeH="0" baseline="0" noProof="0">
+                  <a:ln>
+                    <a:noFill/>
+                  </a:ln>
+                  <a:solidFill>
+                    <a:srgbClr val="FFFFFF"/>
+                  </a:solidFill>
+                  <a:effectLst/>
+                  <a:uLnTx/>
+                  <a:uFillTx/>
+                  <a:latin typeface="Arial" panose="020B0604020202020204"/>
+                  <a:ea typeface="微软雅黑" panose="020B0503020204020204" pitchFamily="34" charset="-122"/>
+                  <a:cs typeface="+mn-cs"/>
+                </a:endParaRPr>
+              </a:p>
+            </p:txBody>
+          </p:sp>
+          <p:sp>
+            <p:nvSpPr>
+              <p:cNvPr id="96" name="菱形 95"/>
+              <p:cNvSpPr/>
+              <p:nvPr/>
+            </p:nvSpPr>
+            <p:spPr>
+              <a:xfrm>
+                <a:off x="8160309" y="3595151"/>
+                <a:ext cx="845627" cy="363763"/>
+              </a:xfrm>
+              <a:prstGeom prst="diamond">
+                <a:avLst/>
+              </a:prstGeom>
+              <a:gradFill flip="none" rotWithShape="1">
+                <a:gsLst>
+                  <a:gs pos="0">
+                    <a:srgbClr val="8EA2A9"/>
+                  </a:gs>
+                  <a:gs pos="100000">
+                    <a:srgbClr val="8EA2A9">
+                      <a:lumMod val="60000"/>
+                      <a:lumOff val="40000"/>
+                    </a:srgbClr>
+                  </a:gs>
+                </a:gsLst>
+                <a:lin ang="10800000" scaled="1"/>
+                <a:tileRect/>
+              </a:gradFill>
+              <a:ln w="12700" cap="flat" cmpd="sng" algn="ctr">
+                <a:noFill/>
+                <a:prstDash val="solid"/>
+                <a:miter lim="800000"/>
+              </a:ln>
+              <a:effectLst/>
+            </p:spPr>
+            <p:txBody>
+              <a:bodyPr rtlCol="0" anchor="ctr"/>
+              <a:lstStyle/>
+              <a:p>
+                <a:pPr marL="0" marR="0" lvl="0" indent="0" algn="ctr" defTabSz="914400" eaLnBrk="1" fontAlgn="auto" latinLnBrk="0" hangingPunct="1">
+                  <a:lnSpc>
+                    <a:spcPct val="100000"/>
+                  </a:lnSpc>
+                  <a:spcBef>
+                    <a:spcPts val="0"/>
+                  </a:spcBef>
+                  <a:spcAft>
+                    <a:spcPts val="0"/>
+                  </a:spcAft>
+                  <a:buClrTx/>
+                  <a:buSzTx/>
+                  <a:buFontTx/>
+                  <a:buNone/>
+                  <a:defRPr/>
+                </a:pPr>
+                <a:endParaRPr kumimoji="0" lang="zh-CN" altLang="en-US" sz="1800" b="0" i="0" u="none" strike="noStrike" kern="0" cap="none" spc="0" normalizeH="0" baseline="0" noProof="0">
+                  <a:ln>
+                    <a:noFill/>
+                  </a:ln>
+                  <a:solidFill>
+                    <a:srgbClr val="FFFFFF"/>
+                  </a:solidFill>
+                  <a:effectLst/>
+                  <a:uLnTx/>
+                  <a:uFillTx/>
+                  <a:latin typeface="Arial" panose="020B0604020202020204"/>
+                  <a:ea typeface="微软雅黑" panose="020B0503020204020204" pitchFamily="34" charset="-122"/>
+                  <a:cs typeface="+mn-cs"/>
+                </a:endParaRPr>
+              </a:p>
+            </p:txBody>
+          </p:sp>
+        </p:grpSp>
+      </p:grpSp>
+      <p:sp>
+        <p:nvSpPr>
+          <p:cNvPr id="101" name="矩形 100"/>
+          <p:cNvSpPr/>
+          <p:nvPr/>
+        </p:nvSpPr>
+        <p:spPr>
+          <a:xfrm>
+            <a:off x="900874" y="1578707"/>
+            <a:ext cx="10490446" cy="4193295"/>
+          </a:xfrm>
+          <a:prstGeom prst="rect">
+            <a:avLst/>
+          </a:prstGeom>
+          <a:solidFill>
+            <a:srgbClr val="FFFFFF"/>
+          </a:solidFill>
+          <a:ln w="12700" cap="flat" cmpd="sng" algn="ctr">
+            <a:solidFill>
+              <a:srgbClr val="8EA2A9">
+                <a:alpha val="44000"/>
+              </a:srgbClr>
+            </a:solidFill>
+            <a:prstDash val="solid"/>
+            <a:miter lim="800000"/>
+          </a:ln>
+          <a:effectLst>
+            <a:outerShdw blurRad="254000" dist="38100" dir="5400000" algn="t" rotWithShape="0">
+              <a:srgbClr val="8EA2A9">
+                <a:lumMod val="50000"/>
+                <a:alpha val="35000"/>
+              </a:srgbClr>
+            </a:outerShdw>
+          </a:effectLst>
+        </p:spPr>
+        <p:txBody>
+          <a:bodyPr rtlCol="0" anchor="ctr"/>
+          <a:lstStyle/>
+          <a:p>
+            <a:pPr marL="0" marR="0" lvl="0" indent="0" algn="ctr" defTabSz="914400" eaLnBrk="1" fontAlgn="auto" latinLnBrk="0" hangingPunct="1">
+              <a:lnSpc>
+                <a:spcPct val="100000"/>
+              </a:lnSpc>
+              <a:spcBef>
+                <a:spcPts val="0"/>
+              </a:spcBef>
+              <a:spcAft>
+                <a:spcPts val="0"/>
+              </a:spcAft>
+              <a:buClrTx/>
+              <a:buSzTx/>
+              <a:buFontTx/>
+              <a:buNone/>
+              <a:defRPr/>
+            </a:pPr>
+            <a:endParaRPr kumimoji="0" lang="zh-CN" altLang="en-US" sz="1800" b="0" i="0" u="none" strike="noStrike" kern="0" cap="none" spc="0" normalizeH="0" baseline="0" noProof="0">
+              <a:ln>
+                <a:noFill/>
+              </a:ln>
+              <a:solidFill>
+                <a:srgbClr val="FFFFFF"/>
+              </a:solidFill>
+              <a:effectLst/>
+              <a:uLnTx/>
+              <a:uFillTx/>
+              <a:latin typeface="Arial" panose="020B0604020202020204"/>
+              <a:ea typeface="微软雅黑" panose="020B0503020204020204" pitchFamily="34" charset="-122"/>
+              <a:cs typeface="+mn-cs"/>
+            </a:endParaRPr>
+          </a:p>
+        </p:txBody>
+      </p:sp>
+      <p:sp>
+        <p:nvSpPr>
+          <p:cNvPr id="102" name="文本占位符 1"/>
+          <p:cNvSpPr txBox="1"/>
+          <p:nvPr/>
+        </p:nvSpPr>
+        <p:spPr>
+          <a:xfrm>
+            <a:off x="2124472" y="3462676"/>
+            <a:ext cx="4446556" cy="469616"/>
+          </a:xfrm>
+          <a:prstGeom prst="rect">
+            <a:avLst/>
+          </a:prstGeom>
+          <a:noFill/>
+        </p:spPr>
+        <p:txBody>
+          <a:bodyPr vert="horz" wrap="square" lIns="91440" tIns="45720" rIns="91440" bIns="45720" rtlCol="0">
+            <a:spAutoFit/>
+          </a:bodyPr>
+          <a:lstStyle>
+            <a:defPPr>
+              <a:defRPr lang="zh-CN"/>
+            </a:defPPr>
+            <a:lvl1pPr marR="0" indent="0">
+              <a:lnSpc>
+                <a:spcPct val="110000"/>
+              </a:lnSpc>
+              <a:spcBef>
+                <a:spcPts val="0"/>
+              </a:spcBef>
+              <a:spcAft>
+                <a:spcPts val="0"/>
+              </a:spcAft>
+              <a:buFont typeface="Arial" panose="020B0604020202020204" pitchFamily="34" charset="0"/>
+              <a:buNone/>
+              <a:defRPr sz="2400" spc="100">
+                <a:solidFill>
+                  <a:srgbClr val="B8C4C9"/>
+                </a:solidFill>
+                <a:ea typeface="微软雅黑" panose="020B0503020204020204" pitchFamily="34" charset="-122"/>
+              </a:defRPr>
+            </a:lvl1pPr>
+            <a:lvl2pPr marL="685800" indent="-228600">
+              <a:lnSpc>
+                <a:spcPct val="90000"/>
+              </a:lnSpc>
+              <a:spcBef>
+                <a:spcPts val="500"/>
+              </a:spcBef>
+              <a:buFont typeface="Arial" panose="020B0604020202020204" pitchFamily="34" charset="0"/>
+              <a:buChar char="•"/>
+            </a:lvl2pPr>
+            <a:lvl3pPr marL="1143000" indent="-228600">
+              <a:lnSpc>
+                <a:spcPct val="90000"/>
+              </a:lnSpc>
+              <a:spcBef>
+                <a:spcPts val="500"/>
+              </a:spcBef>
+              <a:buFont typeface="Arial" panose="020B0604020202020204" pitchFamily="34" charset="0"/>
+              <a:buChar char="•"/>
+            </a:lvl3pPr>
+            <a:lvl4pPr marL="1600200" indent="-228600">
+              <a:lnSpc>
+                <a:spcPct val="90000"/>
+              </a:lnSpc>
+              <a:spcBef>
+                <a:spcPts val="500"/>
+              </a:spcBef>
+              <a:buFont typeface="Arial" panose="020B0604020202020204" pitchFamily="34" charset="0"/>
+              <a:buChar char="•"/>
+            </a:lvl4pPr>
+            <a:lvl5pPr marL="2057400" indent="-228600">
+              <a:lnSpc>
+                <a:spcPct val="90000"/>
+              </a:lnSpc>
+              <a:spcBef>
+                <a:spcPts val="500"/>
+              </a:spcBef>
+              <a:buFont typeface="Arial" panose="020B0604020202020204" pitchFamily="34" charset="0"/>
+              <a:buChar char="•"/>
+            </a:lvl5pPr>
+            <a:lvl6pPr marL="2514600" indent="-228600">
+              <a:lnSpc>
+                <a:spcPct val="90000"/>
+              </a:lnSpc>
+              <a:spcBef>
+                <a:spcPts val="500"/>
+              </a:spcBef>
+              <a:buFont typeface="Arial" panose="020B0604020202020204" pitchFamily="34" charset="0"/>
+              <a:buChar char="•"/>
+            </a:lvl6pPr>
+            <a:lvl7pPr marL="2971800" indent="-228600">
+              <a:lnSpc>
+                <a:spcPct val="90000"/>
+              </a:lnSpc>
+              <a:spcBef>
+                <a:spcPts val="500"/>
+              </a:spcBef>
+              <a:buFont typeface="Arial" panose="020B0604020202020204" pitchFamily="34" charset="0"/>
+              <a:buChar char="•"/>
+            </a:lvl7pPr>
+            <a:lvl8pPr marL="3429000" indent="-228600">
+              <a:lnSpc>
+                <a:spcPct val="90000"/>
+              </a:lnSpc>
+              <a:spcBef>
+                <a:spcPts val="500"/>
+              </a:spcBef>
+              <a:buFont typeface="Arial" panose="020B0604020202020204" pitchFamily="34" charset="0"/>
+              <a:buChar char="•"/>
+            </a:lvl8pPr>
+            <a:lvl9pPr marL="3886200" indent="-228600">
+              <a:lnSpc>
+                <a:spcPct val="90000"/>
+              </a:lnSpc>
+              <a:spcBef>
+                <a:spcPts val="500"/>
+              </a:spcBef>
+              <a:buFont typeface="Arial" panose="020B0604020202020204" pitchFamily="34" charset="0"/>
+              <a:buChar char="•"/>
+            </a:lvl9pPr>
+          </a:lstStyle>
+          <a:p>
+            <a:r>
+              <a:rPr lang="zh-CN" altLang="en-US" dirty="0"/>
+              <a:t>核心解决方案</a:t>
+            </a:r>
+          </a:p>
+        </p:txBody>
+      </p:sp>
+      <p:sp>
+        <p:nvSpPr>
+          <p:cNvPr id="103" name="文本占位符 2"/>
+          <p:cNvSpPr txBox="1"/>
+          <p:nvPr/>
+        </p:nvSpPr>
+        <p:spPr>
+          <a:xfrm>
+            <a:off x="2124472" y="4804965"/>
+            <a:ext cx="3727688" cy="469616"/>
+          </a:xfrm>
+          <a:prstGeom prst="rect">
+            <a:avLst/>
+          </a:prstGeom>
+          <a:noFill/>
+        </p:spPr>
+        <p:txBody>
+          <a:bodyPr vert="horz" wrap="square" lIns="91440" tIns="45720" rIns="91440" bIns="45720" rtlCol="0">
+            <a:spAutoFit/>
+          </a:bodyPr>
+          <a:lstStyle>
+            <a:defPPr>
+              <a:defRPr lang="zh-CN"/>
+            </a:defPPr>
+            <a:lvl1pPr marR="0" indent="0">
+              <a:lnSpc>
+                <a:spcPct val="110000"/>
+              </a:lnSpc>
+              <a:spcBef>
+                <a:spcPts val="0"/>
+              </a:spcBef>
+              <a:spcAft>
+                <a:spcPts val="0"/>
+              </a:spcAft>
+              <a:buFont typeface="Arial" panose="020B0604020202020204" pitchFamily="34" charset="0"/>
+              <a:buNone/>
+              <a:defRPr sz="2400" spc="100">
+                <a:solidFill>
+                  <a:srgbClr val="B8C4C9"/>
+                </a:solidFill>
+                <a:ea typeface="微软雅黑" panose="020B0503020204020204" pitchFamily="34" charset="-122"/>
+              </a:defRPr>
+            </a:lvl1pPr>
+            <a:lvl2pPr marL="685800" indent="-228600">
+              <a:lnSpc>
+                <a:spcPct val="90000"/>
+              </a:lnSpc>
+              <a:spcBef>
+                <a:spcPts val="500"/>
+              </a:spcBef>
+              <a:buFont typeface="Arial" panose="020B0604020202020204" pitchFamily="34" charset="0"/>
+              <a:buChar char="•"/>
+            </a:lvl2pPr>
+            <a:lvl3pPr marL="1143000" indent="-228600">
+              <a:lnSpc>
+                <a:spcPct val="90000"/>
+              </a:lnSpc>
+              <a:spcBef>
+                <a:spcPts val="500"/>
+              </a:spcBef>
+              <a:buFont typeface="Arial" panose="020B0604020202020204" pitchFamily="34" charset="0"/>
+              <a:buChar char="•"/>
+            </a:lvl3pPr>
+            <a:lvl4pPr marL="1600200" indent="-228600">
+              <a:lnSpc>
+                <a:spcPct val="90000"/>
+              </a:lnSpc>
+              <a:spcBef>
+                <a:spcPts val="500"/>
+              </a:spcBef>
+              <a:buFont typeface="Arial" panose="020B0604020202020204" pitchFamily="34" charset="0"/>
+              <a:buChar char="•"/>
+            </a:lvl4pPr>
+            <a:lvl5pPr marL="2057400" indent="-228600">
+              <a:lnSpc>
+                <a:spcPct val="90000"/>
+              </a:lnSpc>
+              <a:spcBef>
+                <a:spcPts val="500"/>
+              </a:spcBef>
+              <a:buFont typeface="Arial" panose="020B0604020202020204" pitchFamily="34" charset="0"/>
+              <a:buChar char="•"/>
+            </a:lvl5pPr>
+            <a:lvl6pPr marL="2514600" indent="-228600">
+              <a:lnSpc>
+                <a:spcPct val="90000"/>
+              </a:lnSpc>
+              <a:spcBef>
+                <a:spcPts val="500"/>
+              </a:spcBef>
+              <a:buFont typeface="Arial" panose="020B0604020202020204" pitchFamily="34" charset="0"/>
+              <a:buChar char="•"/>
+            </a:lvl6pPr>
+            <a:lvl7pPr marL="2971800" indent="-228600">
+              <a:lnSpc>
+                <a:spcPct val="90000"/>
+              </a:lnSpc>
+              <a:spcBef>
+                <a:spcPts val="500"/>
+              </a:spcBef>
+              <a:buFont typeface="Arial" panose="020B0604020202020204" pitchFamily="34" charset="0"/>
+              <a:buChar char="•"/>
+            </a:lvl7pPr>
+            <a:lvl8pPr marL="3429000" indent="-228600">
+              <a:lnSpc>
+                <a:spcPct val="90000"/>
+              </a:lnSpc>
+              <a:spcBef>
+                <a:spcPts val="500"/>
+              </a:spcBef>
+              <a:buFont typeface="Arial" panose="020B0604020202020204" pitchFamily="34" charset="0"/>
+              <a:buChar char="•"/>
+            </a:lvl8pPr>
+            <a:lvl9pPr marL="3886200" indent="-228600">
+              <a:lnSpc>
+                <a:spcPct val="90000"/>
+              </a:lnSpc>
+              <a:spcBef>
+                <a:spcPts val="500"/>
+              </a:spcBef>
+              <a:buFont typeface="Arial" panose="020B0604020202020204" pitchFamily="34" charset="0"/>
+              <a:buChar char="•"/>
+            </a:lvl9pPr>
+          </a:lstStyle>
+          <a:p>
+            <a:r>
+              <a:rPr lang="zh-CN" altLang="en-US" dirty="0"/>
+              <a:t>沟通</a:t>
+            </a:r>
+            <a:r>
+              <a:rPr lang="zh-CN" altLang="en-US"/>
+              <a:t>及探讨</a:t>
+            </a:r>
+            <a:endParaRPr lang="zh-CN" altLang="en-US" dirty="0"/>
+          </a:p>
+        </p:txBody>
+      </p:sp>
+      <p:sp>
+        <p:nvSpPr>
+          <p:cNvPr id="105" name="文本占位符 4"/>
+          <p:cNvSpPr txBox="1"/>
+          <p:nvPr/>
+        </p:nvSpPr>
+        <p:spPr>
+          <a:xfrm>
+            <a:off x="7426888" y="3488344"/>
+            <a:ext cx="3587261" cy="467051"/>
+          </a:xfrm>
+          <a:prstGeom prst="rect">
+            <a:avLst/>
+          </a:prstGeom>
+          <a:noFill/>
+        </p:spPr>
+        <p:txBody>
+          <a:bodyPr vert="horz" wrap="square" lIns="91440" tIns="45720" rIns="91440" bIns="45720" rtlCol="0">
+            <a:spAutoFit/>
+          </a:bodyPr>
+          <a:lstStyle>
+            <a:lvl1pPr marL="0" marR="0" indent="0" algn="l" defTabSz="914400" rtl="0" eaLnBrk="1" latinLnBrk="0" hangingPunct="1">
+              <a:lnSpc>
+                <a:spcPct val="110000"/>
+              </a:lnSpc>
+              <a:spcBef>
+                <a:spcPts val="0"/>
+              </a:spcBef>
+              <a:spcAft>
+                <a:spcPts val="0"/>
+              </a:spcAft>
+              <a:buFont typeface="Arial" panose="020B0604020202020204" pitchFamily="34" charset="0"/>
+              <a:buChar char="•"/>
+              <a:defRPr lang="zh-CN" altLang="en-US" sz="2400" kern="1200" spc="100" smtClean="0">
+                <a:solidFill>
+                  <a:schemeClr val="accent2"/>
+                </a:solidFill>
+                <a:latin typeface="+mn-lt"/>
+                <a:ea typeface="+mn-ea"/>
+                <a:cs typeface="+mn-cs"/>
+              </a:defRPr>
+            </a:lvl1pPr>
+            <a:lvl2pPr marL="685800" indent="-228600" algn="l" defTabSz="914400" rtl="0" eaLnBrk="1" latinLnBrk="0" hangingPunct="1">
+              <a:lnSpc>
+                <a:spcPct val="90000"/>
+              </a:lnSpc>
+              <a:spcBef>
+                <a:spcPts val="500"/>
+              </a:spcBef>
+              <a:buFont typeface="Arial" panose="020B0604020202020204" pitchFamily="34" charset="0"/>
+              <a:buChar char="•"/>
+              <a:defRPr lang="zh-CN" altLang="en-US" sz="1800" kern="1200" smtClean="0">
+                <a:solidFill>
+                  <a:schemeClr val="tx1"/>
+                </a:solidFill>
+                <a:latin typeface="+mn-lt"/>
+                <a:ea typeface="+mn-ea"/>
+                <a:cs typeface="+mn-cs"/>
+              </a:defRPr>
+            </a:lvl2pPr>
+            <a:lvl3pPr marL="1143000" indent="-228600" algn="l" defTabSz="914400" rtl="0" eaLnBrk="1" latinLnBrk="0" hangingPunct="1">
+              <a:lnSpc>
+                <a:spcPct val="90000"/>
+              </a:lnSpc>
+              <a:spcBef>
+                <a:spcPts val="500"/>
+              </a:spcBef>
+              <a:buFont typeface="Arial" panose="020B0604020202020204" pitchFamily="34" charset="0"/>
+              <a:buChar char="•"/>
+              <a:defRPr lang="zh-CN" altLang="en-US" sz="1800" kern="1200" smtClean="0">
+                <a:solidFill>
+                  <a:schemeClr val="tx1"/>
+                </a:solidFill>
+                <a:latin typeface="+mn-lt"/>
+                <a:ea typeface="+mn-ea"/>
+                <a:cs typeface="+mn-cs"/>
+              </a:defRPr>
+            </a:lvl3pPr>
+            <a:lvl4pPr marL="1600200" indent="-228600" algn="l" defTabSz="914400" rtl="0" eaLnBrk="1" latinLnBrk="0" hangingPunct="1">
+              <a:lnSpc>
+                <a:spcPct val="90000"/>
+              </a:lnSpc>
+              <a:spcBef>
+                <a:spcPts val="500"/>
+              </a:spcBef>
+              <a:buFont typeface="Arial" panose="020B0604020202020204" pitchFamily="34" charset="0"/>
+              <a:buChar char="•"/>
+              <a:defRPr lang="zh-CN" altLang="en-US" sz="1800" kern="1200" smtClean="0">
+                <a:solidFill>
+                  <a:schemeClr val="tx1"/>
+                </a:solidFill>
+                <a:latin typeface="+mn-lt"/>
+                <a:ea typeface="+mn-ea"/>
+                <a:cs typeface="+mn-cs"/>
+              </a:defRPr>
+            </a:lvl4pPr>
+            <a:lvl5pPr marL="2057400" indent="-228600" algn="l" defTabSz="914400" rtl="0" eaLnBrk="1" latinLnBrk="0" hangingPunct="1">
+              <a:lnSpc>
+                <a:spcPct val="90000"/>
+              </a:lnSpc>
+              <a:spcBef>
+                <a:spcPts val="500"/>
+              </a:spcBef>
+              <a:buFont typeface="Arial" panose="020B0604020202020204" pitchFamily="34" charset="0"/>
+              <a:buChar char="•"/>
+              <a:defRPr lang="zh-CN" altLang="en-US" sz="1800" kern="1200">
+                <a:solidFill>
+                  <a:schemeClr val="tx1"/>
+                </a:solidFill>
+                <a:latin typeface="+mn-lt"/>
+                <a:ea typeface="+mn-ea"/>
+                <a:cs typeface="+mn-cs"/>
+              </a:defRPr>
+            </a:lvl5pPr>
+            <a:lvl6pPr marL="2514600" indent="-228600" algn="l" defTabSz="914400" rtl="0" eaLnBrk="1" latinLnBrk="0" hangingPunct="1">
+              <a:lnSpc>
+                <a:spcPct val="90000"/>
+              </a:lnSpc>
+              <a:spcBef>
+                <a:spcPts val="500"/>
+              </a:spcBef>
+              <a:buFont typeface="Arial" panose="020B0604020202020204" pitchFamily="34" charset="0"/>
+              <a:buChar char="•"/>
+              <a:defRPr sz="1800" kern="1200">
+                <a:solidFill>
+                  <a:schemeClr val="tx1"/>
+                </a:solidFill>
+                <a:latin typeface="+mn-lt"/>
+                <a:ea typeface="+mn-ea"/>
+                <a:cs typeface="+mn-cs"/>
+              </a:defRPr>
+            </a:lvl6pPr>
+            <a:lvl7pPr marL="2971800" indent="-228600" algn="l" defTabSz="914400" rtl="0" eaLnBrk="1" latinLnBrk="0" hangingPunct="1">
+              <a:lnSpc>
+                <a:spcPct val="90000"/>
+              </a:lnSpc>
+              <a:spcBef>
+                <a:spcPts val="500"/>
+              </a:spcBef>
+              <a:buFont typeface="Arial" panose="020B0604020202020204" pitchFamily="34" charset="0"/>
+              <a:buChar char="•"/>
+              <a:defRPr sz="1800" kern="1200">
+                <a:solidFill>
+                  <a:schemeClr val="tx1"/>
+                </a:solidFill>
+                <a:latin typeface="+mn-lt"/>
+                <a:ea typeface="+mn-ea"/>
+                <a:cs typeface="+mn-cs"/>
+              </a:defRPr>
+            </a:lvl7pPr>
+            <a:lvl8pPr marL="3429000" indent="-228600" algn="l" defTabSz="914400" rtl="0" eaLnBrk="1" latinLnBrk="0" hangingPunct="1">
+              <a:lnSpc>
+                <a:spcPct val="90000"/>
+              </a:lnSpc>
+              <a:spcBef>
+                <a:spcPts val="500"/>
+              </a:spcBef>
+              <a:buFont typeface="Arial" panose="020B0604020202020204" pitchFamily="34" charset="0"/>
+              <a:buChar char="•"/>
+              <a:defRPr sz="1800" kern="1200">
+                <a:solidFill>
+                  <a:schemeClr val="tx1"/>
+                </a:solidFill>
+                <a:latin typeface="+mn-lt"/>
+                <a:ea typeface="+mn-ea"/>
+                <a:cs typeface="+mn-cs"/>
+              </a:defRPr>
+            </a:lvl8pPr>
+            <a:lvl9pPr marL="3886200" indent="-228600" algn="l" defTabSz="914400" rtl="0" eaLnBrk="1" latinLnBrk="0" hangingPunct="1">
+              <a:lnSpc>
+                <a:spcPct val="90000"/>
+              </a:lnSpc>
+              <a:spcBef>
+                <a:spcPts val="500"/>
+              </a:spcBef>
+              <a:buFont typeface="Arial" panose="020B0604020202020204" pitchFamily="34" charset="0"/>
+              <a:buChar char="•"/>
+              <a:defRPr sz="1800" kern="1200">
+                <a:solidFill>
+                  <a:schemeClr val="tx1"/>
+                </a:solidFill>
+                <a:latin typeface="+mn-lt"/>
+                <a:ea typeface="+mn-ea"/>
+                <a:cs typeface="+mn-cs"/>
+              </a:defRPr>
+            </a:lvl9pPr>
+          </a:lstStyle>
+          <a:p>
+            <a:pPr>
+              <a:buNone/>
+              <a:defRPr/>
+            </a:pPr>
+            <a:r>
+              <a:rPr lang="zh-CN" altLang="en-US" dirty="0">
+                <a:solidFill>
+                  <a:srgbClr val="B8C4C9"/>
+                </a:solidFill>
+                <a:ea typeface="微软雅黑" panose="020B0503020204020204" pitchFamily="34" charset="-122"/>
+              </a:rPr>
+              <a:t>项目实施方法</a:t>
+            </a:r>
+            <a:endParaRPr kumimoji="0" lang="zh-CN" altLang="en-US" sz="2400" b="0" i="0" u="none" strike="noStrike" kern="1200" cap="none" spc="100" normalizeH="0" baseline="0" noProof="0" dirty="0">
+              <a:ln>
+                <a:noFill/>
+              </a:ln>
+              <a:solidFill>
+                <a:srgbClr val="8EA2A9"/>
+              </a:solidFill>
+              <a:effectLst/>
+              <a:uLnTx/>
+              <a:uFillTx/>
+              <a:latin typeface="Arial" panose="020B0604020202020204"/>
+              <a:ea typeface="微软雅黑" panose="020B0503020204020204" pitchFamily="34" charset="-122"/>
+              <a:cs typeface="+mn-cs"/>
+            </a:endParaRPr>
+          </a:p>
+        </p:txBody>
+      </p:sp>
+      <p:grpSp>
+        <p:nvGrpSpPr>
+          <p:cNvPr id="106" name="组合 105"/>
+          <p:cNvGrpSpPr/>
+          <p:nvPr/>
+        </p:nvGrpSpPr>
+        <p:grpSpPr>
+          <a:xfrm>
+            <a:off x="8865235" y="100330"/>
+            <a:ext cx="3552190" cy="718820"/>
+            <a:chOff x="13142" y="1264"/>
+            <a:chExt cx="5594" cy="1132"/>
+          </a:xfrm>
+        </p:grpSpPr>
+        <p:pic>
+          <p:nvPicPr>
+            <p:cNvPr id="107" name="图片 106"/>
+            <p:cNvPicPr>
+              <a:picLocks noChangeAspect="1"/>
+            </p:cNvPicPr>
+            <p:nvPr userDrawn="1"/>
+          </p:nvPicPr>
+          <p:blipFill rotWithShape="1">
+            <a:blip r:embed="rId2"/>
+            <a:srcRect r="24054"/>
+            <a:stretch>
+              <a:fillRect/>
+            </a:stretch>
+          </p:blipFill>
+          <p:spPr>
+            <a:xfrm>
+              <a:off x="13142" y="1264"/>
+              <a:ext cx="2742" cy="1133"/>
+            </a:xfrm>
+            <a:prstGeom prst="rect">
+              <a:avLst/>
+            </a:prstGeom>
+          </p:spPr>
+        </p:pic>
+        <p:sp>
+          <p:nvSpPr>
+            <p:cNvPr id="108" name="文本框 107"/>
+            <p:cNvSpPr txBox="1"/>
+            <p:nvPr userDrawn="1"/>
+          </p:nvSpPr>
+          <p:spPr>
+            <a:xfrm>
+              <a:off x="15976" y="1452"/>
+              <a:ext cx="2761" cy="758"/>
+            </a:xfrm>
+            <a:prstGeom prst="rect">
+              <a:avLst/>
+            </a:prstGeom>
+            <a:noFill/>
+          </p:spPr>
+          <p:txBody>
+            <a:bodyPr wrap="square">
+              <a:spAutoFit/>
+            </a:bodyPr>
+            <a:lstStyle/>
+            <a:p>
+              <a:pPr marL="0" marR="0" lvl="0" indent="0" defTabSz="914400" eaLnBrk="1" fontAlgn="auto" latinLnBrk="0" hangingPunct="1">
+                <a:lnSpc>
+                  <a:spcPct val="120000"/>
+                </a:lnSpc>
+                <a:spcBef>
+                  <a:spcPts val="0"/>
+                </a:spcBef>
+                <a:spcAft>
+                  <a:spcPts val="0"/>
+                </a:spcAft>
+                <a:buClrTx/>
+                <a:buSzTx/>
+                <a:buFontTx/>
+                <a:buNone/>
+                <a:defRPr/>
+              </a:pPr>
+              <a:r>
+                <a:rPr kumimoji="0" lang="zh-CN" altLang="en-US" sz="1050" b="0" i="0" u="none" strike="noStrike" kern="0" cap="none" spc="0" normalizeH="0" baseline="0" noProof="0" dirty="0">
+                  <a:ln>
+                    <a:noFill/>
+                  </a:ln>
+                  <a:solidFill>
+                    <a:srgbClr val="8EA2A9"/>
+                  </a:solidFill>
+                  <a:effectLst/>
+                  <a:uLnTx/>
+                  <a:uFillTx/>
+                  <a:latin typeface="Arial" panose="020B0604020202020204"/>
+                  <a:ea typeface="微软雅黑" panose="020B0503020204020204" pitchFamily="34" charset="-122"/>
+                </a:rPr>
+                <a:t>企业数字化赋能者 </a:t>
+              </a:r>
+              <a:endParaRPr kumimoji="0" lang="en-US" altLang="zh-CN" sz="1050" b="0" i="0" u="none" strike="noStrike" kern="0" cap="none" spc="0" normalizeH="0" baseline="0" noProof="0" dirty="0">
+                <a:ln>
+                  <a:noFill/>
+                </a:ln>
+                <a:solidFill>
+                  <a:srgbClr val="8EA2A9"/>
+                </a:solidFill>
+                <a:effectLst/>
+                <a:uLnTx/>
+                <a:uFillTx/>
+                <a:latin typeface="Arial" panose="020B0604020202020204"/>
+                <a:ea typeface="微软雅黑" panose="020B0503020204020204" pitchFamily="34" charset="-122"/>
+              </a:endParaRPr>
+            </a:p>
+            <a:p>
+              <a:pPr marL="0" marR="0" lvl="0" indent="0" defTabSz="914400" eaLnBrk="1" fontAlgn="auto" latinLnBrk="0" hangingPunct="1">
+                <a:lnSpc>
+                  <a:spcPct val="120000"/>
+                </a:lnSpc>
+                <a:spcBef>
+                  <a:spcPts val="0"/>
+                </a:spcBef>
+                <a:spcAft>
+                  <a:spcPts val="0"/>
+                </a:spcAft>
+                <a:buClrTx/>
+                <a:buSzTx/>
+                <a:buFontTx/>
+                <a:buNone/>
+                <a:defRPr/>
+              </a:pPr>
+              <a:r>
+                <a:rPr kumimoji="0" lang="zh-CN" altLang="en-US" sz="1050" b="0" i="0" u="none" strike="noStrike" kern="0" cap="none" spc="0" normalizeH="0" baseline="0" noProof="0" dirty="0">
+                  <a:ln>
+                    <a:noFill/>
+                  </a:ln>
+                  <a:solidFill>
+                    <a:srgbClr val="8EA2A9"/>
+                  </a:solidFill>
+                  <a:effectLst/>
+                  <a:uLnTx/>
+                  <a:uFillTx/>
+                  <a:latin typeface="Arial" panose="020B0604020202020204"/>
+                  <a:ea typeface="微软雅黑" panose="020B0503020204020204" pitchFamily="34" charset="-122"/>
+                </a:rPr>
+                <a:t>工业管理软件践行者</a:t>
+              </a:r>
+            </a:p>
+          </p:txBody>
+        </p:sp>
+        <p:cxnSp>
+          <p:nvCxnSpPr>
+            <p:cNvPr id="109" name="直接连接符 108"/>
+            <p:cNvCxnSpPr/>
+            <p:nvPr userDrawn="1"/>
+          </p:nvCxnSpPr>
+          <p:spPr>
+            <a:xfrm>
+              <a:off x="15886" y="1599"/>
+              <a:ext cx="0" cy="478"/>
+            </a:xfrm>
+            <a:prstGeom prst="line">
+              <a:avLst/>
+            </a:prstGeom>
+            <a:noFill/>
+            <a:ln w="12700" cap="flat" cmpd="sng" algn="ctr">
+              <a:solidFill>
+                <a:srgbClr val="8EA2A9"/>
+              </a:solidFill>
+              <a:prstDash val="solid"/>
+              <a:miter lim="800000"/>
+            </a:ln>
+            <a:effectLst/>
+          </p:spPr>
+        </p:cxnSp>
+      </p:grpSp>
+      <p:sp>
+        <p:nvSpPr>
+          <p:cNvPr id="110" name="文本框 109"/>
+          <p:cNvSpPr txBox="1"/>
+          <p:nvPr/>
+        </p:nvSpPr>
+        <p:spPr>
+          <a:xfrm>
+            <a:off x="1503021" y="4783280"/>
+            <a:ext cx="798693" cy="521970"/>
+          </a:xfrm>
+          <a:prstGeom prst="rect">
+            <a:avLst/>
+          </a:prstGeom>
+          <a:noFill/>
+        </p:spPr>
+        <p:txBody>
+          <a:bodyPr wrap="square" rtlCol="0">
+            <a:spAutoFit/>
+          </a:bodyPr>
+          <a:lstStyle/>
+          <a:p>
+            <a:r>
+              <a:rPr lang="en-US" altLang="zh-CN" sz="2800" b="1" dirty="0">
+                <a:gradFill flip="none" rotWithShape="1">
+                  <a:gsLst>
+                    <a:gs pos="0">
+                      <a:srgbClr val="AD053D">
+                        <a:alpha val="0"/>
+                      </a:srgbClr>
+                    </a:gs>
+                    <a:gs pos="100000">
+                      <a:srgbClr val="AD053D"/>
+                    </a:gs>
+                  </a:gsLst>
+                  <a:lin ang="16200000" scaled="1"/>
+                  <a:tileRect/>
+                </a:gradFill>
+                <a:latin typeface="Arial" panose="020B0604020202020204"/>
+                <a:ea typeface="微软雅黑" panose="020B0503020204020204" pitchFamily="34" charset="-122"/>
+              </a:rPr>
+              <a:t>05</a:t>
+            </a:r>
+            <a:endParaRPr lang="zh-CN" altLang="en-US" sz="2800" b="1" dirty="0">
+              <a:gradFill flip="none" rotWithShape="1">
+                <a:gsLst>
+                  <a:gs pos="0">
+                    <a:srgbClr val="AD053D">
+                      <a:alpha val="0"/>
+                    </a:srgbClr>
+                  </a:gs>
+                  <a:gs pos="100000">
+                    <a:srgbClr val="AD053D"/>
+                  </a:gs>
+                </a:gsLst>
+                <a:lin ang="16200000" scaled="1"/>
+                <a:tileRect/>
+              </a:gradFill>
+              <a:latin typeface="Arial" panose="020B0604020202020204"/>
+              <a:ea typeface="微软雅黑" panose="020B0503020204020204" pitchFamily="34" charset="-122"/>
+            </a:endParaRPr>
+          </a:p>
+        </p:txBody>
+      </p:sp>
+      <p:grpSp>
+        <p:nvGrpSpPr>
+          <p:cNvPr id="111" name="组合 110"/>
+          <p:cNvGrpSpPr/>
+          <p:nvPr/>
+        </p:nvGrpSpPr>
+        <p:grpSpPr>
+          <a:xfrm>
+            <a:off x="1452939" y="4083077"/>
+            <a:ext cx="4077153" cy="73789"/>
+            <a:chOff x="10228870" y="-1876245"/>
+            <a:chExt cx="1109599" cy="49098"/>
+          </a:xfrm>
+        </p:grpSpPr>
+        <p:cxnSp>
+          <p:nvCxnSpPr>
+            <p:cNvPr id="112" name="直接连接符 111"/>
+            <p:cNvCxnSpPr/>
+            <p:nvPr/>
+          </p:nvCxnSpPr>
+          <p:spPr>
+            <a:xfrm>
+              <a:off x="10228870" y="-1827147"/>
+              <a:ext cx="208749" cy="0"/>
+            </a:xfrm>
+            <a:prstGeom prst="line">
+              <a:avLst/>
+            </a:prstGeom>
+            <a:noFill/>
+            <a:ln w="38100" cap="rnd" cmpd="sng" algn="ctr">
+              <a:gradFill flip="none" rotWithShape="1">
+                <a:gsLst>
+                  <a:gs pos="0">
+                    <a:srgbClr val="8EA2A9">
+                      <a:alpha val="0"/>
+                    </a:srgbClr>
+                  </a:gs>
+                  <a:gs pos="100000">
+                    <a:srgbClr val="8EA2A9"/>
+                  </a:gs>
+                </a:gsLst>
+                <a:lin ang="0" scaled="1"/>
+                <a:tileRect/>
+              </a:gradFill>
+              <a:prstDash val="solid"/>
+              <a:round/>
+            </a:ln>
+            <a:effectLst/>
+          </p:spPr>
+        </p:cxnSp>
+        <p:cxnSp>
+          <p:nvCxnSpPr>
+            <p:cNvPr id="113" name="直接连接符 112"/>
+            <p:cNvCxnSpPr/>
+            <p:nvPr/>
+          </p:nvCxnSpPr>
+          <p:spPr>
+            <a:xfrm>
+              <a:off x="10273345" y="-1876245"/>
+              <a:ext cx="1065124" cy="0"/>
+            </a:xfrm>
+            <a:prstGeom prst="line">
+              <a:avLst/>
+            </a:prstGeom>
+            <a:noFill/>
+            <a:ln w="38100" cap="rnd" cmpd="sng" algn="ctr">
+              <a:gradFill flip="none" rotWithShape="1">
+                <a:gsLst>
+                  <a:gs pos="0">
+                    <a:srgbClr val="AD053D">
+                      <a:alpha val="0"/>
+                    </a:srgbClr>
+                  </a:gs>
+                  <a:gs pos="100000">
+                    <a:srgbClr val="AD053D"/>
+                  </a:gs>
+                </a:gsLst>
+                <a:lin ang="0" scaled="1"/>
+                <a:tileRect/>
+              </a:gradFill>
+              <a:prstDash val="solid"/>
+              <a:round/>
+            </a:ln>
+            <a:effectLst/>
+          </p:spPr>
+        </p:cxnSp>
+      </p:grpSp>
+      <p:grpSp>
+        <p:nvGrpSpPr>
+          <p:cNvPr id="114" name="组合 113"/>
+          <p:cNvGrpSpPr/>
+          <p:nvPr/>
+        </p:nvGrpSpPr>
+        <p:grpSpPr>
+          <a:xfrm>
+            <a:off x="1534854" y="5380382"/>
+            <a:ext cx="4077153" cy="73789"/>
+            <a:chOff x="10228870" y="-1876245"/>
+            <a:chExt cx="1109599" cy="49098"/>
+          </a:xfrm>
+        </p:grpSpPr>
+        <p:cxnSp>
+          <p:nvCxnSpPr>
+            <p:cNvPr id="115" name="直接连接符 114"/>
+            <p:cNvCxnSpPr/>
+            <p:nvPr/>
+          </p:nvCxnSpPr>
+          <p:spPr>
+            <a:xfrm>
+              <a:off x="10228870" y="-1827147"/>
+              <a:ext cx="208749" cy="0"/>
+            </a:xfrm>
+            <a:prstGeom prst="line">
+              <a:avLst/>
+            </a:prstGeom>
+            <a:noFill/>
+            <a:ln w="38100" cap="rnd" cmpd="sng" algn="ctr">
+              <a:gradFill flip="none" rotWithShape="1">
+                <a:gsLst>
+                  <a:gs pos="0">
+                    <a:srgbClr val="8EA2A9">
+                      <a:alpha val="0"/>
+                    </a:srgbClr>
+                  </a:gs>
+                  <a:gs pos="100000">
+                    <a:srgbClr val="8EA2A9"/>
+                  </a:gs>
+                </a:gsLst>
+                <a:lin ang="0" scaled="1"/>
+                <a:tileRect/>
+              </a:gradFill>
+              <a:prstDash val="solid"/>
+              <a:round/>
+            </a:ln>
+            <a:effectLst/>
+          </p:spPr>
+        </p:cxnSp>
+        <p:cxnSp>
+          <p:nvCxnSpPr>
+            <p:cNvPr id="116" name="直接连接符 115"/>
+            <p:cNvCxnSpPr/>
+            <p:nvPr/>
+          </p:nvCxnSpPr>
+          <p:spPr>
+            <a:xfrm>
+              <a:off x="10273345" y="-1876245"/>
+              <a:ext cx="1065124" cy="0"/>
+            </a:xfrm>
+            <a:prstGeom prst="line">
+              <a:avLst/>
+            </a:prstGeom>
+            <a:noFill/>
+            <a:ln w="38100" cap="rnd" cmpd="sng" algn="ctr">
+              <a:gradFill flip="none" rotWithShape="1">
+                <a:gsLst>
+                  <a:gs pos="0">
+                    <a:srgbClr val="AD053D">
+                      <a:alpha val="0"/>
+                    </a:srgbClr>
+                  </a:gs>
+                  <a:gs pos="100000">
+                    <a:srgbClr val="AD053D"/>
+                  </a:gs>
+                </a:gsLst>
+                <a:lin ang="0" scaled="1"/>
+                <a:tileRect/>
+              </a:gradFill>
+              <a:prstDash val="solid"/>
+              <a:round/>
+            </a:ln>
+            <a:effectLst/>
+          </p:spPr>
+        </p:cxnSp>
+      </p:grpSp>
+      <p:sp>
+        <p:nvSpPr>
+          <p:cNvPr id="117" name="文本框 116"/>
+          <p:cNvSpPr txBox="1"/>
+          <p:nvPr/>
+        </p:nvSpPr>
+        <p:spPr>
+          <a:xfrm>
+            <a:off x="1518896" y="3435810"/>
+            <a:ext cx="798693" cy="523220"/>
+          </a:xfrm>
+          <a:prstGeom prst="rect">
+            <a:avLst/>
+          </a:prstGeom>
+          <a:noFill/>
+        </p:spPr>
+        <p:txBody>
+          <a:bodyPr wrap="square" rtlCol="0">
+            <a:spAutoFit/>
+          </a:bodyPr>
+          <a:lstStyle/>
+          <a:p>
+            <a:r>
+              <a:rPr lang="en-US" altLang="zh-CN" sz="2800" b="1" dirty="0">
+                <a:gradFill flip="none" rotWithShape="1">
+                  <a:gsLst>
+                    <a:gs pos="0">
+                      <a:srgbClr val="AD053D">
+                        <a:alpha val="0"/>
+                      </a:srgbClr>
+                    </a:gs>
+                    <a:gs pos="100000">
+                      <a:srgbClr val="AD053D"/>
+                    </a:gs>
+                  </a:gsLst>
+                  <a:lin ang="16200000" scaled="1"/>
+                  <a:tileRect/>
+                </a:gradFill>
+                <a:latin typeface="Arial" panose="020B0604020202020204"/>
+                <a:ea typeface="微软雅黑" panose="020B0503020204020204" pitchFamily="34" charset="-122"/>
+              </a:rPr>
+              <a:t>03</a:t>
+            </a:r>
+            <a:endParaRPr lang="zh-CN" altLang="en-US" sz="2800" b="1" dirty="0">
+              <a:gradFill flip="none" rotWithShape="1">
+                <a:gsLst>
+                  <a:gs pos="0">
+                    <a:srgbClr val="AD053D">
+                      <a:alpha val="0"/>
+                    </a:srgbClr>
+                  </a:gs>
+                  <a:gs pos="100000">
+                    <a:srgbClr val="AD053D"/>
+                  </a:gs>
+                </a:gsLst>
+                <a:lin ang="16200000" scaled="1"/>
+                <a:tileRect/>
+              </a:gradFill>
+              <a:latin typeface="Arial" panose="020B0604020202020204"/>
+              <a:ea typeface="微软雅黑" panose="020B0503020204020204" pitchFamily="34" charset="-122"/>
+            </a:endParaRPr>
+          </a:p>
+        </p:txBody>
+      </p:sp>
+      <p:grpSp>
+        <p:nvGrpSpPr>
+          <p:cNvPr id="118" name="组合 117"/>
+          <p:cNvGrpSpPr/>
+          <p:nvPr/>
+        </p:nvGrpSpPr>
+        <p:grpSpPr>
+          <a:xfrm>
+            <a:off x="6834564" y="4083077"/>
+            <a:ext cx="4077153" cy="73789"/>
+            <a:chOff x="10228870" y="-1876245"/>
+            <a:chExt cx="1109599" cy="49098"/>
+          </a:xfrm>
+        </p:grpSpPr>
+        <p:cxnSp>
+          <p:nvCxnSpPr>
+            <p:cNvPr id="119" name="直接连接符 118"/>
+            <p:cNvCxnSpPr/>
+            <p:nvPr/>
+          </p:nvCxnSpPr>
+          <p:spPr>
+            <a:xfrm>
+              <a:off x="10228870" y="-1827147"/>
+              <a:ext cx="208749" cy="0"/>
+            </a:xfrm>
+            <a:prstGeom prst="line">
+              <a:avLst/>
+            </a:prstGeom>
+            <a:noFill/>
+            <a:ln w="38100" cap="rnd" cmpd="sng" algn="ctr">
+              <a:gradFill flip="none" rotWithShape="1">
+                <a:gsLst>
+                  <a:gs pos="0">
+                    <a:srgbClr val="8EA2A9">
+                      <a:alpha val="0"/>
+                    </a:srgbClr>
+                  </a:gs>
+                  <a:gs pos="100000">
+                    <a:srgbClr val="8EA2A9"/>
+                  </a:gs>
+                </a:gsLst>
+                <a:lin ang="0" scaled="1"/>
+                <a:tileRect/>
+              </a:gradFill>
+              <a:prstDash val="solid"/>
+              <a:round/>
+            </a:ln>
+            <a:effectLst/>
+          </p:spPr>
+        </p:cxnSp>
+        <p:cxnSp>
+          <p:nvCxnSpPr>
+            <p:cNvPr id="120" name="直接连接符 119"/>
+            <p:cNvCxnSpPr/>
+            <p:nvPr/>
+          </p:nvCxnSpPr>
+          <p:spPr>
+            <a:xfrm>
+              <a:off x="10273345" y="-1876245"/>
+              <a:ext cx="1065124" cy="0"/>
+            </a:xfrm>
+            <a:prstGeom prst="line">
+              <a:avLst/>
+            </a:prstGeom>
+            <a:noFill/>
+            <a:ln w="38100" cap="rnd" cmpd="sng" algn="ctr">
+              <a:gradFill flip="none" rotWithShape="1">
+                <a:gsLst>
+                  <a:gs pos="0">
+                    <a:srgbClr val="AD053D">
+                      <a:alpha val="0"/>
+                    </a:srgbClr>
+                  </a:gs>
+                  <a:gs pos="100000">
+                    <a:srgbClr val="AD053D"/>
+                  </a:gs>
+                </a:gsLst>
+                <a:lin ang="0" scaled="1"/>
+                <a:tileRect/>
+              </a:gradFill>
+              <a:prstDash val="solid"/>
+              <a:round/>
+            </a:ln>
+            <a:effectLst/>
+          </p:spPr>
+        </p:cxnSp>
+      </p:grpSp>
+      <p:sp>
+        <p:nvSpPr>
+          <p:cNvPr id="121" name="文本框 120"/>
+          <p:cNvSpPr txBox="1"/>
+          <p:nvPr/>
+        </p:nvSpPr>
+        <p:spPr>
+          <a:xfrm>
+            <a:off x="6834481" y="3488515"/>
+            <a:ext cx="798693" cy="521970"/>
+          </a:xfrm>
+          <a:prstGeom prst="rect">
+            <a:avLst/>
+          </a:prstGeom>
+          <a:noFill/>
+        </p:spPr>
+        <p:txBody>
+          <a:bodyPr wrap="square" rtlCol="0">
+            <a:spAutoFit/>
+          </a:bodyPr>
+          <a:lstStyle/>
+          <a:p>
+            <a:r>
+              <a:rPr lang="en-US" altLang="zh-CN" sz="2800" b="1" dirty="0">
+                <a:gradFill flip="none" rotWithShape="1">
+                  <a:gsLst>
+                    <a:gs pos="0">
+                      <a:srgbClr val="AD053D">
+                        <a:alpha val="0"/>
+                      </a:srgbClr>
+                    </a:gs>
+                    <a:gs pos="100000">
+                      <a:srgbClr val="AD053D"/>
+                    </a:gs>
+                  </a:gsLst>
+                  <a:lin ang="16200000" scaled="1"/>
+                  <a:tileRect/>
+                </a:gradFill>
+                <a:latin typeface="Arial" panose="020B0604020202020204"/>
+                <a:ea typeface="微软雅黑" panose="020B0503020204020204" pitchFamily="34" charset="-122"/>
+              </a:rPr>
+              <a:t>04</a:t>
+            </a:r>
+            <a:endParaRPr lang="zh-CN" altLang="en-US" sz="2800" b="1" dirty="0">
+              <a:gradFill flip="none" rotWithShape="1">
+                <a:gsLst>
+                  <a:gs pos="0">
+                    <a:srgbClr val="AD053D">
+                      <a:alpha val="0"/>
+                    </a:srgbClr>
+                  </a:gs>
+                  <a:gs pos="100000">
+                    <a:srgbClr val="AD053D"/>
+                  </a:gs>
+                </a:gsLst>
+                <a:lin ang="16200000" scaled="1"/>
+                <a:tileRect/>
+              </a:gradFill>
+              <a:latin typeface="Arial" panose="020B0604020202020204"/>
+              <a:ea typeface="微软雅黑" panose="020B0503020204020204" pitchFamily="34" charset="-122"/>
+            </a:endParaRPr>
+          </a:p>
+        </p:txBody>
+      </p:sp>
+      <p:sp>
+        <p:nvSpPr>
+          <p:cNvPr id="7" name="文本占位符 1"/>
+          <p:cNvSpPr txBox="1"/>
+          <p:nvPr/>
+        </p:nvSpPr>
+        <p:spPr>
+          <a:xfrm>
+            <a:off x="2124472" y="2306108"/>
+            <a:ext cx="3587261" cy="469616"/>
+          </a:xfrm>
+          <a:prstGeom prst="rect">
+            <a:avLst/>
+          </a:prstGeom>
+          <a:noFill/>
+        </p:spPr>
+        <p:txBody>
+          <a:bodyPr vert="horz" wrap="square" lIns="91440" tIns="45720" rIns="91440" bIns="45720" rtlCol="0">
+            <a:spAutoFit/>
+          </a:bodyPr>
+          <a:lstStyle>
+            <a:defPPr>
+              <a:defRPr lang="zh-CN"/>
+            </a:defPPr>
+            <a:lvl1pPr marR="0" indent="0">
+              <a:lnSpc>
+                <a:spcPct val="110000"/>
+              </a:lnSpc>
+              <a:spcBef>
+                <a:spcPts val="0"/>
+              </a:spcBef>
+              <a:spcAft>
+                <a:spcPts val="0"/>
+              </a:spcAft>
+              <a:buFont typeface="Arial" panose="020B0604020202020204" pitchFamily="34" charset="0"/>
+              <a:buNone/>
+              <a:defRPr sz="2400" spc="100">
+                <a:solidFill>
+                  <a:srgbClr val="B8C4C9"/>
+                </a:solidFill>
+                <a:ea typeface="微软雅黑" panose="020B0503020204020204" pitchFamily="34" charset="-122"/>
+              </a:defRPr>
+            </a:lvl1pPr>
+            <a:lvl2pPr marL="685800" indent="-228600">
+              <a:lnSpc>
+                <a:spcPct val="90000"/>
+              </a:lnSpc>
+              <a:spcBef>
+                <a:spcPts val="500"/>
+              </a:spcBef>
+              <a:buFont typeface="Arial" panose="020B0604020202020204" pitchFamily="34" charset="0"/>
+              <a:buChar char="•"/>
+            </a:lvl2pPr>
+            <a:lvl3pPr marL="1143000" indent="-228600">
+              <a:lnSpc>
+                <a:spcPct val="90000"/>
+              </a:lnSpc>
+              <a:spcBef>
+                <a:spcPts val="500"/>
+              </a:spcBef>
+              <a:buFont typeface="Arial" panose="020B0604020202020204" pitchFamily="34" charset="0"/>
+              <a:buChar char="•"/>
+            </a:lvl3pPr>
+            <a:lvl4pPr marL="1600200" indent="-228600">
+              <a:lnSpc>
+                <a:spcPct val="90000"/>
+              </a:lnSpc>
+              <a:spcBef>
+                <a:spcPts val="500"/>
+              </a:spcBef>
+              <a:buFont typeface="Arial" panose="020B0604020202020204" pitchFamily="34" charset="0"/>
+              <a:buChar char="•"/>
+            </a:lvl4pPr>
+            <a:lvl5pPr marL="2057400" indent="-228600">
+              <a:lnSpc>
+                <a:spcPct val="90000"/>
+              </a:lnSpc>
+              <a:spcBef>
+                <a:spcPts val="500"/>
+              </a:spcBef>
+              <a:buFont typeface="Arial" panose="020B0604020202020204" pitchFamily="34" charset="0"/>
+              <a:buChar char="•"/>
+            </a:lvl5pPr>
+            <a:lvl6pPr marL="2514600" indent="-228600">
+              <a:lnSpc>
+                <a:spcPct val="90000"/>
+              </a:lnSpc>
+              <a:spcBef>
+                <a:spcPts val="500"/>
+              </a:spcBef>
+              <a:buFont typeface="Arial" panose="020B0604020202020204" pitchFamily="34" charset="0"/>
+              <a:buChar char="•"/>
+            </a:lvl6pPr>
+            <a:lvl7pPr marL="2971800" indent="-228600">
+              <a:lnSpc>
+                <a:spcPct val="90000"/>
+              </a:lnSpc>
+              <a:spcBef>
+                <a:spcPts val="500"/>
+              </a:spcBef>
+              <a:buFont typeface="Arial" panose="020B0604020202020204" pitchFamily="34" charset="0"/>
+              <a:buChar char="•"/>
+            </a:lvl7pPr>
+            <a:lvl8pPr marL="3429000" indent="-228600">
+              <a:lnSpc>
+                <a:spcPct val="90000"/>
+              </a:lnSpc>
+              <a:spcBef>
+                <a:spcPts val="500"/>
+              </a:spcBef>
+              <a:buFont typeface="Arial" panose="020B0604020202020204" pitchFamily="34" charset="0"/>
+              <a:buChar char="•"/>
+            </a:lvl8pPr>
+            <a:lvl9pPr marL="3886200" indent="-228600">
+              <a:lnSpc>
+                <a:spcPct val="90000"/>
+              </a:lnSpc>
+              <a:spcBef>
+                <a:spcPts val="500"/>
+              </a:spcBef>
+              <a:buFont typeface="Arial" panose="020B0604020202020204" pitchFamily="34" charset="0"/>
+              <a:buChar char="•"/>
+            </a:lvl9pPr>
+          </a:lstStyle>
+          <a:p>
+            <a:r>
+              <a:rPr lang="zh-CN" altLang="en-US" dirty="0">
+                <a:solidFill>
+                  <a:srgbClr val="AD043D"/>
+                </a:solidFill>
+              </a:rPr>
+              <a:t>赛意公司简介</a:t>
+            </a:r>
+          </a:p>
+        </p:txBody>
+      </p:sp>
+      <p:sp>
+        <p:nvSpPr>
+          <p:cNvPr id="8" name="文本占位符 4"/>
+          <p:cNvSpPr txBox="1"/>
+          <p:nvPr/>
+        </p:nvSpPr>
+        <p:spPr>
+          <a:xfrm>
+            <a:off x="7426888" y="2342710"/>
+            <a:ext cx="3587261" cy="469616"/>
+          </a:xfrm>
+          <a:prstGeom prst="rect">
+            <a:avLst/>
+          </a:prstGeom>
+          <a:noFill/>
+        </p:spPr>
+        <p:txBody>
+          <a:bodyPr vert="horz" wrap="square" lIns="91440" tIns="45720" rIns="91440" bIns="45720" rtlCol="0">
+            <a:spAutoFit/>
+          </a:bodyPr>
+          <a:lstStyle>
+            <a:lvl1pPr marL="0" marR="0" indent="0" algn="l" defTabSz="914400" rtl="0" eaLnBrk="1" latinLnBrk="0" hangingPunct="1">
+              <a:lnSpc>
+                <a:spcPct val="110000"/>
+              </a:lnSpc>
+              <a:spcBef>
+                <a:spcPts val="0"/>
+              </a:spcBef>
+              <a:spcAft>
+                <a:spcPts val="0"/>
+              </a:spcAft>
+              <a:buFont typeface="Arial" panose="020B0604020202020204" pitchFamily="34" charset="0"/>
+              <a:buChar char="•"/>
+              <a:defRPr lang="zh-CN" altLang="en-US" sz="2400" kern="1200" spc="100" smtClean="0">
+                <a:solidFill>
+                  <a:schemeClr val="accent2"/>
+                </a:solidFill>
+                <a:latin typeface="+mn-lt"/>
+                <a:ea typeface="+mn-ea"/>
+                <a:cs typeface="+mn-cs"/>
+              </a:defRPr>
+            </a:lvl1pPr>
+            <a:lvl2pPr marL="685800" indent="-228600" algn="l" defTabSz="914400" rtl="0" eaLnBrk="1" latinLnBrk="0" hangingPunct="1">
+              <a:lnSpc>
+                <a:spcPct val="90000"/>
+              </a:lnSpc>
+              <a:spcBef>
+                <a:spcPts val="500"/>
+              </a:spcBef>
+              <a:buFont typeface="Arial" panose="020B0604020202020204" pitchFamily="34" charset="0"/>
+              <a:buChar char="•"/>
+              <a:defRPr lang="zh-CN" altLang="en-US" sz="1800" kern="1200" smtClean="0">
+                <a:solidFill>
+                  <a:schemeClr val="tx1"/>
+                </a:solidFill>
+                <a:latin typeface="+mn-lt"/>
+                <a:ea typeface="+mn-ea"/>
+                <a:cs typeface="+mn-cs"/>
+              </a:defRPr>
+            </a:lvl2pPr>
+            <a:lvl3pPr marL="1143000" indent="-228600" algn="l" defTabSz="914400" rtl="0" eaLnBrk="1" latinLnBrk="0" hangingPunct="1">
+              <a:lnSpc>
+                <a:spcPct val="90000"/>
+              </a:lnSpc>
+              <a:spcBef>
+                <a:spcPts val="500"/>
+              </a:spcBef>
+              <a:buFont typeface="Arial" panose="020B0604020202020204" pitchFamily="34" charset="0"/>
+              <a:buChar char="•"/>
+              <a:defRPr lang="zh-CN" altLang="en-US" sz="1800" kern="1200" smtClean="0">
+                <a:solidFill>
+                  <a:schemeClr val="tx1"/>
+                </a:solidFill>
+                <a:latin typeface="+mn-lt"/>
+                <a:ea typeface="+mn-ea"/>
+                <a:cs typeface="+mn-cs"/>
+              </a:defRPr>
+            </a:lvl3pPr>
+            <a:lvl4pPr marL="1600200" indent="-228600" algn="l" defTabSz="914400" rtl="0" eaLnBrk="1" latinLnBrk="0" hangingPunct="1">
+              <a:lnSpc>
+                <a:spcPct val="90000"/>
+              </a:lnSpc>
+              <a:spcBef>
+                <a:spcPts val="500"/>
+              </a:spcBef>
+              <a:buFont typeface="Arial" panose="020B0604020202020204" pitchFamily="34" charset="0"/>
+              <a:buChar char="•"/>
+              <a:defRPr lang="zh-CN" altLang="en-US" sz="1800" kern="1200" smtClean="0">
+                <a:solidFill>
+                  <a:schemeClr val="tx1"/>
+                </a:solidFill>
+                <a:latin typeface="+mn-lt"/>
+                <a:ea typeface="+mn-ea"/>
+                <a:cs typeface="+mn-cs"/>
+              </a:defRPr>
+            </a:lvl4pPr>
+            <a:lvl5pPr marL="2057400" indent="-228600" algn="l" defTabSz="914400" rtl="0" eaLnBrk="1" latinLnBrk="0" hangingPunct="1">
+              <a:lnSpc>
+                <a:spcPct val="90000"/>
+              </a:lnSpc>
+              <a:spcBef>
+                <a:spcPts val="500"/>
+              </a:spcBef>
+              <a:buFont typeface="Arial" panose="020B0604020202020204" pitchFamily="34" charset="0"/>
+              <a:buChar char="•"/>
+              <a:defRPr lang="zh-CN" altLang="en-US" sz="1800" kern="1200">
+                <a:solidFill>
+                  <a:schemeClr val="tx1"/>
+                </a:solidFill>
+                <a:latin typeface="+mn-lt"/>
+                <a:ea typeface="+mn-ea"/>
+                <a:cs typeface="+mn-cs"/>
+              </a:defRPr>
+            </a:lvl5pPr>
+            <a:lvl6pPr marL="2514600" indent="-228600" algn="l" defTabSz="914400" rtl="0" eaLnBrk="1" latinLnBrk="0" hangingPunct="1">
+              <a:lnSpc>
+                <a:spcPct val="90000"/>
+              </a:lnSpc>
+              <a:spcBef>
+                <a:spcPts val="500"/>
+              </a:spcBef>
+              <a:buFont typeface="Arial" panose="020B0604020202020204" pitchFamily="34" charset="0"/>
+              <a:buChar char="•"/>
+              <a:defRPr sz="1800" kern="1200">
+                <a:solidFill>
+                  <a:schemeClr val="tx1"/>
+                </a:solidFill>
+                <a:latin typeface="+mn-lt"/>
+                <a:ea typeface="+mn-ea"/>
+                <a:cs typeface="+mn-cs"/>
+              </a:defRPr>
+            </a:lvl6pPr>
+            <a:lvl7pPr marL="2971800" indent="-228600" algn="l" defTabSz="914400" rtl="0" eaLnBrk="1" latinLnBrk="0" hangingPunct="1">
+              <a:lnSpc>
+                <a:spcPct val="90000"/>
+              </a:lnSpc>
+              <a:spcBef>
+                <a:spcPts val="500"/>
+              </a:spcBef>
+              <a:buFont typeface="Arial" panose="020B0604020202020204" pitchFamily="34" charset="0"/>
+              <a:buChar char="•"/>
+              <a:defRPr sz="1800" kern="1200">
+                <a:solidFill>
+                  <a:schemeClr val="tx1"/>
+                </a:solidFill>
+                <a:latin typeface="+mn-lt"/>
+                <a:ea typeface="+mn-ea"/>
+                <a:cs typeface="+mn-cs"/>
+              </a:defRPr>
+            </a:lvl7pPr>
+            <a:lvl8pPr marL="3429000" indent="-228600" algn="l" defTabSz="914400" rtl="0" eaLnBrk="1" latinLnBrk="0" hangingPunct="1">
+              <a:lnSpc>
+                <a:spcPct val="90000"/>
+              </a:lnSpc>
+              <a:spcBef>
+                <a:spcPts val="500"/>
+              </a:spcBef>
+              <a:buFont typeface="Arial" panose="020B0604020202020204" pitchFamily="34" charset="0"/>
+              <a:buChar char="•"/>
+              <a:defRPr sz="1800" kern="1200">
+                <a:solidFill>
+                  <a:schemeClr val="tx1"/>
+                </a:solidFill>
+                <a:latin typeface="+mn-lt"/>
+                <a:ea typeface="+mn-ea"/>
+                <a:cs typeface="+mn-cs"/>
+              </a:defRPr>
+            </a:lvl8pPr>
+            <a:lvl9pPr marL="3886200" indent="-228600" algn="l" defTabSz="914400" rtl="0" eaLnBrk="1" latinLnBrk="0" hangingPunct="1">
+              <a:lnSpc>
+                <a:spcPct val="90000"/>
+              </a:lnSpc>
+              <a:spcBef>
+                <a:spcPts val="500"/>
+              </a:spcBef>
+              <a:buFont typeface="Arial" panose="020B0604020202020204" pitchFamily="34" charset="0"/>
+              <a:buChar char="•"/>
+              <a:defRPr sz="1800" kern="1200">
+                <a:solidFill>
+                  <a:schemeClr val="tx1"/>
+                </a:solidFill>
+                <a:latin typeface="+mn-lt"/>
+                <a:ea typeface="+mn-ea"/>
+                <a:cs typeface="+mn-cs"/>
+              </a:defRPr>
+            </a:lvl9pPr>
+          </a:lstStyle>
+          <a:p>
+            <a:pPr>
+              <a:buNone/>
+              <a:defRPr/>
+            </a:pPr>
+            <a:r>
+              <a:rPr lang="zh-CN" altLang="en-US" dirty="0">
+                <a:solidFill>
+                  <a:srgbClr val="B8C4C9"/>
+                </a:solidFill>
+                <a:ea typeface="微软雅黑" panose="020B0503020204020204" pitchFamily="34" charset="-122"/>
+              </a:rPr>
+              <a:t>需求理解与整体建议</a:t>
+            </a:r>
+            <a:endParaRPr kumimoji="0" lang="zh-CN" altLang="en-US" sz="2400" b="0" i="0" u="none" strike="noStrike" kern="1200" cap="none" spc="100" normalizeH="0" baseline="0" noProof="0" dirty="0">
+              <a:ln>
+                <a:noFill/>
+              </a:ln>
+              <a:solidFill>
+                <a:srgbClr val="8EA2A9"/>
+              </a:solidFill>
+              <a:effectLst/>
+              <a:uLnTx/>
+              <a:uFillTx/>
+              <a:latin typeface="Arial" panose="020B0604020202020204"/>
+              <a:ea typeface="微软雅黑" panose="020B0503020204020204" pitchFamily="34" charset="-122"/>
+              <a:cs typeface="+mn-cs"/>
+            </a:endParaRPr>
+          </a:p>
+        </p:txBody>
+      </p:sp>
+      <p:grpSp>
+        <p:nvGrpSpPr>
+          <p:cNvPr id="9" name="组合 110"/>
+          <p:cNvGrpSpPr/>
+          <p:nvPr/>
+        </p:nvGrpSpPr>
+        <p:grpSpPr>
+          <a:xfrm>
+            <a:off x="1452939" y="2926509"/>
+            <a:ext cx="4077153" cy="73789"/>
+            <a:chOff x="10228870" y="-1876245"/>
+            <a:chExt cx="1109599" cy="49098"/>
+          </a:xfrm>
+        </p:grpSpPr>
+        <p:cxnSp>
+          <p:nvCxnSpPr>
+            <p:cNvPr id="10" name="直接连接符 111"/>
+            <p:cNvCxnSpPr/>
+            <p:nvPr/>
+          </p:nvCxnSpPr>
+          <p:spPr>
+            <a:xfrm>
+              <a:off x="10228870" y="-1827147"/>
+              <a:ext cx="208749" cy="0"/>
+            </a:xfrm>
+            <a:prstGeom prst="line">
+              <a:avLst/>
+            </a:prstGeom>
+            <a:noFill/>
+            <a:ln w="38100" cap="rnd" cmpd="sng" algn="ctr">
+              <a:gradFill flip="none" rotWithShape="1">
+                <a:gsLst>
+                  <a:gs pos="0">
+                    <a:srgbClr val="8EA2A9">
+                      <a:alpha val="0"/>
+                    </a:srgbClr>
+                  </a:gs>
+                  <a:gs pos="100000">
+                    <a:srgbClr val="8EA2A9"/>
+                  </a:gs>
+                </a:gsLst>
+                <a:lin ang="0" scaled="1"/>
+                <a:tileRect/>
+              </a:gradFill>
+              <a:prstDash val="solid"/>
+              <a:round/>
+            </a:ln>
+            <a:effectLst/>
+          </p:spPr>
+        </p:cxnSp>
+        <p:cxnSp>
+          <p:nvCxnSpPr>
+            <p:cNvPr id="11" name="直接连接符 112"/>
+            <p:cNvCxnSpPr/>
+            <p:nvPr/>
+          </p:nvCxnSpPr>
+          <p:spPr>
+            <a:xfrm>
+              <a:off x="10273345" y="-1876245"/>
+              <a:ext cx="1065124" cy="0"/>
+            </a:xfrm>
+            <a:prstGeom prst="line">
+              <a:avLst/>
+            </a:prstGeom>
+            <a:noFill/>
+            <a:ln w="38100" cap="rnd" cmpd="sng" algn="ctr">
+              <a:gradFill flip="none" rotWithShape="1">
+                <a:gsLst>
+                  <a:gs pos="0">
+                    <a:srgbClr val="AD053D">
+                      <a:alpha val="0"/>
+                    </a:srgbClr>
+                  </a:gs>
+                  <a:gs pos="100000">
+                    <a:srgbClr val="AD053D"/>
+                  </a:gs>
+                </a:gsLst>
+                <a:lin ang="0" scaled="1"/>
+                <a:tileRect/>
+              </a:gradFill>
+              <a:prstDash val="solid"/>
+              <a:round/>
+            </a:ln>
+            <a:effectLst/>
+          </p:spPr>
+        </p:cxnSp>
+      </p:grpSp>
+      <p:sp>
+        <p:nvSpPr>
+          <p:cNvPr id="12" name="文本框 116"/>
+          <p:cNvSpPr txBox="1"/>
+          <p:nvPr/>
+        </p:nvSpPr>
+        <p:spPr>
+          <a:xfrm>
+            <a:off x="1518896" y="2279242"/>
+            <a:ext cx="798693" cy="523220"/>
+          </a:xfrm>
+          <a:prstGeom prst="rect">
+            <a:avLst/>
+          </a:prstGeom>
+          <a:noFill/>
+        </p:spPr>
+        <p:txBody>
+          <a:bodyPr wrap="square" rtlCol="0">
+            <a:spAutoFit/>
+          </a:bodyPr>
+          <a:lstStyle/>
+          <a:p>
+            <a:r>
+              <a:rPr lang="en-US" altLang="zh-CN" sz="2800" b="1" dirty="0">
+                <a:gradFill flip="none" rotWithShape="1">
+                  <a:gsLst>
+                    <a:gs pos="0">
+                      <a:srgbClr val="AD053D">
+                        <a:alpha val="0"/>
+                      </a:srgbClr>
+                    </a:gs>
+                    <a:gs pos="100000">
+                      <a:srgbClr val="AD053D"/>
+                    </a:gs>
+                  </a:gsLst>
+                  <a:lin ang="16200000" scaled="1"/>
+                  <a:tileRect/>
+                </a:gradFill>
+                <a:latin typeface="Arial" panose="020B0604020202020204"/>
+                <a:ea typeface="微软雅黑" panose="020B0503020204020204" pitchFamily="34" charset="-122"/>
+              </a:rPr>
+              <a:t>01</a:t>
+            </a:r>
+            <a:endParaRPr lang="zh-CN" altLang="en-US" sz="2800" b="1" dirty="0">
+              <a:gradFill flip="none" rotWithShape="1">
+                <a:gsLst>
+                  <a:gs pos="0">
+                    <a:srgbClr val="AD053D">
+                      <a:alpha val="0"/>
+                    </a:srgbClr>
+                  </a:gs>
+                  <a:gs pos="100000">
+                    <a:srgbClr val="AD053D"/>
+                  </a:gs>
+                </a:gsLst>
+                <a:lin ang="16200000" scaled="1"/>
+                <a:tileRect/>
+              </a:gradFill>
+              <a:latin typeface="Arial" panose="020B0604020202020204"/>
+              <a:ea typeface="微软雅黑" panose="020B0503020204020204" pitchFamily="34" charset="-122"/>
+            </a:endParaRPr>
+          </a:p>
+        </p:txBody>
+      </p:sp>
+      <p:grpSp>
+        <p:nvGrpSpPr>
+          <p:cNvPr id="13" name="组合 117"/>
+          <p:cNvGrpSpPr/>
+          <p:nvPr/>
+        </p:nvGrpSpPr>
+        <p:grpSpPr>
+          <a:xfrm>
+            <a:off x="6834564" y="2926509"/>
+            <a:ext cx="4077153" cy="73789"/>
+            <a:chOff x="10228870" y="-1876245"/>
+            <a:chExt cx="1109599" cy="49098"/>
+          </a:xfrm>
+        </p:grpSpPr>
+        <p:cxnSp>
+          <p:nvCxnSpPr>
+            <p:cNvPr id="14" name="直接连接符 118"/>
+            <p:cNvCxnSpPr/>
+            <p:nvPr/>
+          </p:nvCxnSpPr>
+          <p:spPr>
+            <a:xfrm>
+              <a:off x="10228870" y="-1827147"/>
+              <a:ext cx="208749" cy="0"/>
+            </a:xfrm>
+            <a:prstGeom prst="line">
+              <a:avLst/>
+            </a:prstGeom>
+            <a:noFill/>
+            <a:ln w="38100" cap="rnd" cmpd="sng" algn="ctr">
+              <a:gradFill flip="none" rotWithShape="1">
+                <a:gsLst>
+                  <a:gs pos="0">
+                    <a:srgbClr val="8EA2A9">
+                      <a:alpha val="0"/>
+                    </a:srgbClr>
+                  </a:gs>
+                  <a:gs pos="100000">
+                    <a:srgbClr val="8EA2A9"/>
+                  </a:gs>
+                </a:gsLst>
+                <a:lin ang="0" scaled="1"/>
+                <a:tileRect/>
+              </a:gradFill>
+              <a:prstDash val="solid"/>
+              <a:round/>
+            </a:ln>
+            <a:effectLst/>
+          </p:spPr>
+        </p:cxnSp>
+        <p:cxnSp>
+          <p:nvCxnSpPr>
+            <p:cNvPr id="15" name="直接连接符 119"/>
+            <p:cNvCxnSpPr/>
+            <p:nvPr/>
+          </p:nvCxnSpPr>
+          <p:spPr>
+            <a:xfrm>
+              <a:off x="10273345" y="-1876245"/>
+              <a:ext cx="1065124" cy="0"/>
+            </a:xfrm>
+            <a:prstGeom prst="line">
+              <a:avLst/>
+            </a:prstGeom>
+            <a:noFill/>
+            <a:ln w="38100" cap="rnd" cmpd="sng" algn="ctr">
+              <a:gradFill flip="none" rotWithShape="1">
+                <a:gsLst>
+                  <a:gs pos="0">
+                    <a:srgbClr val="AD053D">
+                      <a:alpha val="0"/>
+                    </a:srgbClr>
+                  </a:gs>
+                  <a:gs pos="100000">
+                    <a:srgbClr val="AD053D"/>
+                  </a:gs>
+                </a:gsLst>
+                <a:lin ang="0" scaled="1"/>
+                <a:tileRect/>
+              </a:gradFill>
+              <a:prstDash val="solid"/>
+              <a:round/>
+            </a:ln>
+            <a:effectLst/>
+          </p:spPr>
+        </p:cxnSp>
+      </p:grpSp>
+      <p:sp>
+        <p:nvSpPr>
+          <p:cNvPr id="16" name="文本框 120"/>
+          <p:cNvSpPr txBox="1"/>
+          <p:nvPr/>
+        </p:nvSpPr>
+        <p:spPr>
+          <a:xfrm>
+            <a:off x="6834481" y="2331947"/>
+            <a:ext cx="798693" cy="521970"/>
+          </a:xfrm>
+          <a:prstGeom prst="rect">
+            <a:avLst/>
+          </a:prstGeom>
+          <a:noFill/>
+        </p:spPr>
+        <p:txBody>
+          <a:bodyPr wrap="square" rtlCol="0">
+            <a:spAutoFit/>
+          </a:bodyPr>
+          <a:lstStyle/>
+          <a:p>
+            <a:r>
+              <a:rPr lang="en-US" altLang="zh-CN" sz="2800" b="1" dirty="0">
+                <a:gradFill flip="none" rotWithShape="1">
+                  <a:gsLst>
+                    <a:gs pos="0">
+                      <a:srgbClr val="AD053D">
+                        <a:alpha val="0"/>
+                      </a:srgbClr>
+                    </a:gs>
+                    <a:gs pos="100000">
+                      <a:srgbClr val="AD053D"/>
+                    </a:gs>
+                  </a:gsLst>
+                  <a:lin ang="16200000" scaled="1"/>
+                  <a:tileRect/>
+                </a:gradFill>
+                <a:latin typeface="Arial" panose="020B0604020202020204"/>
+                <a:ea typeface="微软雅黑" panose="020B0503020204020204" pitchFamily="34" charset="-122"/>
+              </a:rPr>
+              <a:t>02</a:t>
+            </a:r>
+            <a:endParaRPr lang="zh-CN" altLang="en-US" sz="2800" b="1" dirty="0">
+              <a:gradFill flip="none" rotWithShape="1">
+                <a:gsLst>
+                  <a:gs pos="0">
+                    <a:srgbClr val="AD053D">
+                      <a:alpha val="0"/>
+                    </a:srgbClr>
+                  </a:gs>
+                  <a:gs pos="100000">
+                    <a:srgbClr val="AD053D"/>
+                  </a:gs>
+                </a:gsLst>
+                <a:lin ang="16200000" scaled="1"/>
+                <a:tileRect/>
+              </a:gradFill>
+              <a:latin typeface="Arial" panose="020B0604020202020204"/>
+              <a:ea typeface="微软雅黑" panose="020B0503020204020204" pitchFamily="34" charset="-122"/>
+            </a:endParaRPr>
+          </a:p>
+        </p:txBody>
+      </p:sp>
+    </p:spTree>
+  </p:cSld>
+  <p:clrMapOvr>
+    <a:masterClrMapping/>
+  </p:clrMapOvr>
+</p:sld>
+</file>
+
+<file path=ppt/slides/slide9.xml><?xml version="1.0" encoding="utf-8"?>
+<p:sld xmlns:a="http://schemas.openxmlformats.org/drawingml/2006/main" xmlns:p="http://schemas.openxmlformats.org/presentationml/2006/main" xmlns:r="http://schemas.openxmlformats.org/officeDocument/2006/relationships">
+  <p:cSld>
+    <p:spTree>
+      <p:nvGrpSpPr>
+        <p:cNvPr id="1" name=""/>
+        <p:cNvGrpSpPr/>
+        <p:nvPr/>
+      </p:nvGrpSpPr>
+      <p:grpSpPr/>
+      <p:sp>
+        <p:nvSpPr>
+          <p:cNvPr id="2" name="标题 1">
+            <a:extLst>
+              <a:ext uri="{FF2B5EF4-FFF2-40B4-BE49-F238E27FC236}">
+                <a16:creationId xmlns:a16="http://schemas.microsoft.com/office/drawing/2014/main" id="{01767E06-9427-7B8F-F9AB-5190D68AD0E9}"/>
+              </a:ext>
+            </a:extLst>
+          </p:cNvPr>
+          <p:cNvSpPr>
+            <a:spLocks noGrp="1"/>
+          </p:cNvSpPr>
+          <p:nvPr>
+            <p:ph type="title"/>
+          </p:nvPr>
+        </p:nvSpPr>
+        <p:spPr>
+          <a:xfrm>
+            <a:off x="166370" y="36830"/>
+            <a:ext cx="10034086" cy="480060"/>
+          </a:xfrm>
+        </p:spPr>
+        <p:txBody>
+          <a:bodyPr/>
+          <a:lstStyle/>
+          <a:p>
+            <a:r>
+              <a:rPr lang="zh-CN" altLang="en-US" dirty="0">
+                <a:solidFill>
+                  <a:srgbClr val="9F2240"/>
+                </a:solidFill>
+                <a:cs typeface="+mn-ea"/>
+                <a:sym typeface="微软雅黑" panose="020B0503020204020204" pitchFamily="34" charset="-122"/>
+              </a:rPr>
+              <a:t>标题：</a:t>
+            </a:r>
+          </a:p>
+        </p:txBody>
+      </p:sp>
+    </p:spTree>
+  </p:cSld>
+  <p:clrMapOvr>
+    <a:masterClrMapping/>
+  </p:clrMapOvr>
 </p:sld>
 </file>
 
